--- a/VyaparMarg_Modern_Presentation.pptx
+++ b/VyaparMarg_Modern_Presentation.pptx
@@ -7,6 +7,14 @@
   <p:sldIdLst>
     <p:sldId id="256" r:id="R82efb41a4e074fea"/>
     <p:sldId id="257" r:id="R9bfce5ed8a894c09"/>
+    <p:sldId id="258" r:id="R9a7589ea67324f8c"/>
+    <p:sldId id="259" r:id="R45198a75c17b4bda"/>
+    <p:sldId id="260" r:id="R818ebc3d778b4ade"/>
+    <p:sldId id="261" r:id="Rece1fdbf12a84494"/>
+    <p:sldId id="262" r:id="Rf8ef399dec354ba2"/>
+    <p:sldId id="263" r:id="Rff216f1634e14ed5"/>
+    <p:sldId id="264" r:id="R2d3df6adba1f4eb4"/>
+    <p:sldId id="265" r:id="Rcd38e33f330b4f33"/>
   </p:sldIdLst>
   <p:sldSz cx="12192000" cy="6858000"/>
   <p:notesSz cx="6858000" cy="9144000"/>
@@ -596,6 +604,207 @@
 </p:sld>
 </file>
 
+<file path=ppt/slides/slide10.xml><?xml version="1.0" encoding="utf-8"?>
+<p:sld xmlns:p="http://schemas.openxmlformats.org/presentationml/2006/main">
+  <p:cSld>
+    <p:bg>
+      <p:bgPr>
+        <a:solidFill xmlns:a="http://schemas.openxmlformats.org/drawingml/2006/main">
+          <a:srgbClr val="0B1220"/>
+        </a:solidFill>
+      </p:bgPr>
+    </p:bg>
+    <p:spTree>
+      <p:nvGrpSpPr>
+        <p:cNvPr id="1" name=""/>
+        <p:cNvGrpSpPr/>
+        <p:nvPr/>
+      </p:nvGrpSpPr>
+      <p:grpSpPr/>
+      <p:sp>
+        <p:nvSpPr>
+          <p:cNvPr id="100129" name="TextBox 1"/>
+          <p:cNvSpPr/>
+          <p:nvPr/>
+        </p:nvSpPr>
+        <p:spPr>
+          <a:xfrm xmlns:a="http://schemas.openxmlformats.org/drawingml/2006/main">
+            <a:off x="594360" y="411480"/>
+            <a:ext cx="7406640" cy="502920"/>
+          </a:xfrm>
+          <a:prstGeom xmlns:a="http://schemas.openxmlformats.org/drawingml/2006/main" prst="rect">
+            <a:avLst/>
+          </a:prstGeom>
+          <a:noFill xmlns:a="http://schemas.openxmlformats.org/drawingml/2006/main"/>
+          <a:ln xmlns:a="http://schemas.openxmlformats.org/drawingml/2006/main">
+            <a:noFill/>
+          </a:ln>
+        </p:spPr>
+        <p:txBody>
+          <a:bodyPr xmlns:a="http://schemas.openxmlformats.org/drawingml/2006/main" lIns="73152" tIns="73152" rIns="73152" bIns="73152"/>
+          <a:lstStyle xmlns:a="http://schemas.openxmlformats.org/drawingml/2006/main"/>
+          <a:p xmlns:a="http://schemas.openxmlformats.org/drawingml/2006/main">
+            <a:pPr algn="l"/>
+            <a:r>
+              <a:rPr lang="en-US" sz="2700" b="1">
+                <a:solidFill>
+                  <a:srgbClr val="FFFFFF"/>
+                </a:solidFill>
+              </a:rPr>
+              <a:t>Thank you</a:t>
+            </a:r>
+          </a:p>
+        </p:txBody>
+      </p:sp>
+      <p:sp>
+        <p:nvSpPr>
+          <p:cNvPr id="100130" name="TextBox 2"/>
+          <p:cNvSpPr/>
+          <p:nvPr/>
+        </p:nvSpPr>
+        <p:spPr>
+          <a:xfrm xmlns:a="http://schemas.openxmlformats.org/drawingml/2006/main">
+            <a:off x="594360" y="987552"/>
+            <a:ext cx="914400" cy="73152"/>
+          </a:xfrm>
+          <a:prstGeom xmlns:a="http://schemas.openxmlformats.org/drawingml/2006/main" prst="rect">
+            <a:avLst/>
+          </a:prstGeom>
+          <a:solidFill xmlns:a="http://schemas.openxmlformats.org/drawingml/2006/main">
+            <a:srgbClr val="F97316"/>
+          </a:solidFill>
+          <a:ln xmlns:a="http://schemas.openxmlformats.org/drawingml/2006/main">
+            <a:noFill/>
+          </a:ln>
+        </p:spPr>
+        <p:txBody>
+          <a:bodyPr xmlns:a="http://schemas.openxmlformats.org/drawingml/2006/main" lIns="73152" tIns="73152" rIns="73152" bIns="73152"/>
+          <a:lstStyle xmlns:a="http://schemas.openxmlformats.org/drawingml/2006/main"/>
+          <a:p xmlns:a="http://schemas.openxmlformats.org/drawingml/2006/main">
+            <a:pPr algn="l"/>
+            <a:endParaRPr lang="en-US" sz="800" b="0">
+              <a:solidFill>
+                <a:srgbClr val="F97316"/>
+              </a:solidFill>
+            </a:endParaRPr>
+          </a:p>
+        </p:txBody>
+      </p:sp>
+      <p:sp>
+        <p:nvSpPr>
+          <p:cNvPr id="100131" name="TextBox 3"/>
+          <p:cNvSpPr/>
+          <p:nvPr/>
+        </p:nvSpPr>
+        <p:spPr>
+          <a:xfrm xmlns:a="http://schemas.openxmlformats.org/drawingml/2006/main">
+            <a:off x="594360" y="1115568"/>
+            <a:ext cx="7315200" cy="347472"/>
+          </a:xfrm>
+          <a:prstGeom xmlns:a="http://schemas.openxmlformats.org/drawingml/2006/main" prst="rect">
+            <a:avLst/>
+          </a:prstGeom>
+          <a:noFill xmlns:a="http://schemas.openxmlformats.org/drawingml/2006/main"/>
+          <a:ln xmlns:a="http://schemas.openxmlformats.org/drawingml/2006/main">
+            <a:noFill/>
+          </a:ln>
+        </p:spPr>
+        <p:txBody>
+          <a:bodyPr xmlns:a="http://schemas.openxmlformats.org/drawingml/2006/main" lIns="73152" tIns="73152" rIns="73152" bIns="73152"/>
+          <a:lstStyle xmlns:a="http://schemas.openxmlformats.org/drawingml/2006/main"/>
+          <a:p xmlns:a="http://schemas.openxmlformats.org/drawingml/2006/main">
+            <a:pPr algn="l"/>
+            <a:r>
+              <a:rPr lang="en-US" sz="1300" b="0">
+                <a:solidFill>
+                  <a:srgbClr val="A8B3C7"/>
+                </a:solidFill>
+              </a:rPr>
+              <a:t>VyaparMarg - making the next business step easier to see.</a:t>
+            </a:r>
+          </a:p>
+        </p:txBody>
+      </p:sp>
+      <p:sp>
+        <p:nvSpPr>
+          <p:cNvPr id="100132" name="TextBox 4"/>
+          <p:cNvSpPr/>
+          <p:nvPr/>
+        </p:nvSpPr>
+        <p:spPr>
+          <a:xfrm xmlns:a="http://schemas.openxmlformats.org/drawingml/2006/main">
+            <a:off x="1920240" y="1965960"/>
+            <a:ext cx="4754880" cy="777240"/>
+          </a:xfrm>
+          <a:prstGeom xmlns:a="http://schemas.openxmlformats.org/drawingml/2006/main" prst="roundRect">
+            <a:avLst/>
+          </a:prstGeom>
+          <a:solidFill xmlns:a="http://schemas.openxmlformats.org/drawingml/2006/main">
+            <a:srgbClr val="145DA0"/>
+          </a:solidFill>
+          <a:ln xmlns:a="http://schemas.openxmlformats.org/drawingml/2006/main">
+            <a:noFill/>
+          </a:ln>
+        </p:spPr>
+        <p:txBody>
+          <a:bodyPr xmlns:a="http://schemas.openxmlformats.org/drawingml/2006/main" lIns="73152" tIns="73152" rIns="73152" bIns="73152"/>
+          <a:lstStyle xmlns:a="http://schemas.openxmlformats.org/drawingml/2006/main"/>
+          <a:p xmlns:a="http://schemas.openxmlformats.org/drawingml/2006/main">
+            <a:pPr algn="ctr"/>
+            <a:r>
+              <a:rPr lang="en-US" sz="3200" b="1">
+                <a:solidFill>
+                  <a:srgbClr val="FFFFFF"/>
+                </a:solidFill>
+              </a:rPr>
+              <a:t>Questions?</a:t>
+            </a:r>
+          </a:p>
+        </p:txBody>
+      </p:sp>
+      <p:sp>
+        <p:nvSpPr>
+          <p:cNvPr id="100133" name="TextBox 5"/>
+          <p:cNvSpPr/>
+          <p:nvPr/>
+        </p:nvSpPr>
+        <p:spPr>
+          <a:xfrm xmlns:a="http://schemas.openxmlformats.org/drawingml/2006/main">
+            <a:off x="1828800" y="3246120"/>
+            <a:ext cx="4937760" cy="365760"/>
+          </a:xfrm>
+          <a:prstGeom xmlns:a="http://schemas.openxmlformats.org/drawingml/2006/main" prst="rect">
+            <a:avLst/>
+          </a:prstGeom>
+          <a:noFill xmlns:a="http://schemas.openxmlformats.org/drawingml/2006/main"/>
+          <a:ln xmlns:a="http://schemas.openxmlformats.org/drawingml/2006/main">
+            <a:noFill/>
+          </a:ln>
+        </p:spPr>
+        <p:txBody>
+          <a:bodyPr xmlns:a="http://schemas.openxmlformats.org/drawingml/2006/main" lIns="73152" tIns="73152" rIns="73152" bIns="73152"/>
+          <a:lstStyle xmlns:a="http://schemas.openxmlformats.org/drawingml/2006/main"/>
+          <a:p xmlns:a="http://schemas.openxmlformats.org/drawingml/2006/main">
+            <a:pPr algn="ctr"/>
+            <a:r>
+              <a:rPr lang="en-US" sz="1400" b="0">
+                <a:solidFill>
+                  <a:srgbClr val="A8B3C7"/>
+                </a:solidFill>
+              </a:rPr>
+              <a:t>Rangesh Gupta  |  Roll No. 53  |  SE CPMN A</a:t>
+            </a:r>
+          </a:p>
+        </p:txBody>
+      </p:sp>
+    </p:spTree>
+  </p:cSld>
+  <p:transition>
+    <p:fade/>
+  </p:transition>
+</p:sld>
+</file>
+
 <file path=ppt/slides/slide2.xml><?xml version="1.0" encoding="utf-8"?>
 <p:sld xmlns:p="http://schemas.openxmlformats.org/presentationml/2006/main">
   <p:cSld>
@@ -782,6 +991,4357 @@
                 </a:solidFill>
               </a:rPr>
               <a:t>01  Discover</a:t>
+            </a:r>
+          </a:p>
+        </p:txBody>
+      </p:sp>
+      <p:sp>
+        <p:nvSpPr>
+          <p:cNvPr id="100013" name="TextBox 6"/>
+          <p:cNvSpPr/>
+          <p:nvPr/>
+        </p:nvSpPr>
+        <p:spPr>
+          <a:xfrm xmlns:a="http://schemas.openxmlformats.org/drawingml/2006/main">
+            <a:off x="594360" y="2130552"/>
+            <a:ext cx="2331720" cy="1261872"/>
+          </a:xfrm>
+          <a:prstGeom xmlns:a="http://schemas.openxmlformats.org/drawingml/2006/main" prst="rect">
+            <a:avLst/>
+          </a:prstGeom>
+          <a:noFill xmlns:a="http://schemas.openxmlformats.org/drawingml/2006/main"/>
+          <a:ln xmlns:a="http://schemas.openxmlformats.org/drawingml/2006/main">
+            <a:noFill/>
+          </a:ln>
+        </p:spPr>
+        <p:txBody>
+          <a:bodyPr xmlns:a="http://schemas.openxmlformats.org/drawingml/2006/main" lIns="73152" tIns="73152" rIns="73152" bIns="73152"/>
+          <a:lstStyle xmlns:a="http://schemas.openxmlformats.org/drawingml/2006/main"/>
+          <a:p xmlns:a="http://schemas.openxmlformats.org/drawingml/2006/main">
+            <a:pPr algn="l"/>
+            <a:r>
+              <a:rPr lang="en-US" sz="1200" b="0">
+                <a:solidFill>
+                  <a:srgbClr val="D7DFEC"/>
+                </a:solidFill>
+              </a:rPr>
+              <a:t>Scheme information is scattered across portals, PDFs and offices.</a:t>
+            </a:r>
+          </a:p>
+        </p:txBody>
+      </p:sp>
+      <p:sp>
+        <p:nvSpPr>
+          <p:cNvPr id="100014" name="TextBox 7"/>
+          <p:cNvSpPr/>
+          <p:nvPr/>
+        </p:nvSpPr>
+        <p:spPr>
+          <a:xfrm xmlns:a="http://schemas.openxmlformats.org/drawingml/2006/main">
+            <a:off x="3154680" y="1645920"/>
+            <a:ext cx="2331720" cy="1828800"/>
+          </a:xfrm>
+          <a:prstGeom xmlns:a="http://schemas.openxmlformats.org/drawingml/2006/main" prst="roundRect">
+            <a:avLst/>
+          </a:prstGeom>
+          <a:solidFill xmlns:a="http://schemas.openxmlformats.org/drawingml/2006/main">
+            <a:srgbClr val="162238"/>
+          </a:solidFill>
+          <a:ln xmlns:a="http://schemas.openxmlformats.org/drawingml/2006/main">
+            <a:noFill/>
+          </a:ln>
+        </p:spPr>
+        <p:txBody>
+          <a:bodyPr xmlns:a="http://schemas.openxmlformats.org/drawingml/2006/main" lIns="73152" tIns="73152" rIns="73152" bIns="73152"/>
+          <a:lstStyle xmlns:a="http://schemas.openxmlformats.org/drawingml/2006/main"/>
+          <a:p xmlns:a="http://schemas.openxmlformats.org/drawingml/2006/main">
+            <a:pPr algn="l"/>
+            <a:endParaRPr lang="en-US" sz="1000" b="0">
+              <a:solidFill>
+                <a:srgbClr val="FFFFFF"/>
+              </a:solidFill>
+            </a:endParaRPr>
+          </a:p>
+        </p:txBody>
+      </p:sp>
+      <p:sp>
+        <p:nvSpPr>
+          <p:cNvPr id="100015" name="TextBox 8"/>
+          <p:cNvSpPr/>
+          <p:nvPr/>
+        </p:nvSpPr>
+        <p:spPr>
+          <a:xfrm xmlns:a="http://schemas.openxmlformats.org/drawingml/2006/main">
+            <a:off x="3154680" y="1792224"/>
+            <a:ext cx="2331720" cy="292608"/>
+          </a:xfrm>
+          <a:prstGeom xmlns:a="http://schemas.openxmlformats.org/drawingml/2006/main" prst="rect">
+            <a:avLst/>
+          </a:prstGeom>
+          <a:noFill xmlns:a="http://schemas.openxmlformats.org/drawingml/2006/main"/>
+          <a:ln xmlns:a="http://schemas.openxmlformats.org/drawingml/2006/main">
+            <a:noFill/>
+          </a:ln>
+        </p:spPr>
+        <p:txBody>
+          <a:bodyPr xmlns:a="http://schemas.openxmlformats.org/drawingml/2006/main" lIns="73152" tIns="73152" rIns="73152" bIns="73152"/>
+          <a:lstStyle xmlns:a="http://schemas.openxmlformats.org/drawingml/2006/main"/>
+          <a:p xmlns:a="http://schemas.openxmlformats.org/drawingml/2006/main">
+            <a:pPr algn="l"/>
+            <a:r>
+              <a:rPr lang="en-US" sz="1600" b="1">
+                <a:solidFill>
+                  <a:srgbClr val="F97316"/>
+                </a:solidFill>
+              </a:rPr>
+              <a:t>02  Understand</a:t>
+            </a:r>
+          </a:p>
+        </p:txBody>
+      </p:sp>
+      <p:sp>
+        <p:nvSpPr>
+          <p:cNvPr id="100016" name="TextBox 9"/>
+          <p:cNvSpPr/>
+          <p:nvPr/>
+        </p:nvSpPr>
+        <p:spPr>
+          <a:xfrm xmlns:a="http://schemas.openxmlformats.org/drawingml/2006/main">
+            <a:off x="3154680" y="2130552"/>
+            <a:ext cx="2331720" cy="1261872"/>
+          </a:xfrm>
+          <a:prstGeom xmlns:a="http://schemas.openxmlformats.org/drawingml/2006/main" prst="rect">
+            <a:avLst/>
+          </a:prstGeom>
+          <a:noFill xmlns:a="http://schemas.openxmlformats.org/drawingml/2006/main"/>
+          <a:ln xmlns:a="http://schemas.openxmlformats.org/drawingml/2006/main">
+            <a:noFill/>
+          </a:ln>
+        </p:spPr>
+        <p:txBody>
+          <a:bodyPr xmlns:a="http://schemas.openxmlformats.org/drawingml/2006/main" lIns="73152" tIns="73152" rIns="73152" bIns="73152"/>
+          <a:lstStyle xmlns:a="http://schemas.openxmlformats.org/drawingml/2006/main"/>
+          <a:p xmlns:a="http://schemas.openxmlformats.org/drawingml/2006/main">
+            <a:pPr algn="l"/>
+            <a:r>
+              <a:rPr lang="en-US" sz="1200" b="0">
+                <a:solidFill>
+                  <a:srgbClr val="D7DFEC"/>
+                </a:solidFill>
+              </a:rPr>
+              <a:t>Eligibility language and process steps are difficult to interpret.</a:t>
+            </a:r>
+          </a:p>
+        </p:txBody>
+      </p:sp>
+      <p:sp>
+        <p:nvSpPr>
+          <p:cNvPr id="100017" name="TextBox 10"/>
+          <p:cNvSpPr/>
+          <p:nvPr/>
+        </p:nvSpPr>
+        <p:spPr>
+          <a:xfrm xmlns:a="http://schemas.openxmlformats.org/drawingml/2006/main">
+            <a:off x="5715000" y="1645920"/>
+            <a:ext cx="2331720" cy="1828800"/>
+          </a:xfrm>
+          <a:prstGeom xmlns:a="http://schemas.openxmlformats.org/drawingml/2006/main" prst="roundRect">
+            <a:avLst/>
+          </a:prstGeom>
+          <a:solidFill xmlns:a="http://schemas.openxmlformats.org/drawingml/2006/main">
+            <a:srgbClr val="162238"/>
+          </a:solidFill>
+          <a:ln xmlns:a="http://schemas.openxmlformats.org/drawingml/2006/main">
+            <a:noFill/>
+          </a:ln>
+        </p:spPr>
+        <p:txBody>
+          <a:bodyPr xmlns:a="http://schemas.openxmlformats.org/drawingml/2006/main" lIns="73152" tIns="73152" rIns="73152" bIns="73152"/>
+          <a:lstStyle xmlns:a="http://schemas.openxmlformats.org/drawingml/2006/main"/>
+          <a:p xmlns:a="http://schemas.openxmlformats.org/drawingml/2006/main">
+            <a:pPr algn="l"/>
+            <a:endParaRPr lang="en-US" sz="1000" b="0">
+              <a:solidFill>
+                <a:srgbClr val="FFFFFF"/>
+              </a:solidFill>
+            </a:endParaRPr>
+          </a:p>
+        </p:txBody>
+      </p:sp>
+      <p:sp>
+        <p:nvSpPr>
+          <p:cNvPr id="100018" name="TextBox 11"/>
+          <p:cNvSpPr/>
+          <p:nvPr/>
+        </p:nvSpPr>
+        <p:spPr>
+          <a:xfrm xmlns:a="http://schemas.openxmlformats.org/drawingml/2006/main">
+            <a:off x="5715000" y="1792224"/>
+            <a:ext cx="2331720" cy="292608"/>
+          </a:xfrm>
+          <a:prstGeom xmlns:a="http://schemas.openxmlformats.org/drawingml/2006/main" prst="rect">
+            <a:avLst/>
+          </a:prstGeom>
+          <a:noFill xmlns:a="http://schemas.openxmlformats.org/drawingml/2006/main"/>
+          <a:ln xmlns:a="http://schemas.openxmlformats.org/drawingml/2006/main">
+            <a:noFill/>
+          </a:ln>
+        </p:spPr>
+        <p:txBody>
+          <a:bodyPr xmlns:a="http://schemas.openxmlformats.org/drawingml/2006/main" lIns="73152" tIns="73152" rIns="73152" bIns="73152"/>
+          <a:lstStyle xmlns:a="http://schemas.openxmlformats.org/drawingml/2006/main"/>
+          <a:p xmlns:a="http://schemas.openxmlformats.org/drawingml/2006/main">
+            <a:pPr algn="l"/>
+            <a:r>
+              <a:rPr lang="en-US" sz="1600" b="1">
+                <a:solidFill>
+                  <a:srgbClr val="7C3AED"/>
+                </a:solidFill>
+              </a:rPr>
+              <a:t>03  Act</a:t>
+            </a:r>
+          </a:p>
+        </p:txBody>
+      </p:sp>
+      <p:sp>
+        <p:nvSpPr>
+          <p:cNvPr id="100019" name="TextBox 12"/>
+          <p:cNvSpPr/>
+          <p:nvPr/>
+        </p:nvSpPr>
+        <p:spPr>
+          <a:xfrm xmlns:a="http://schemas.openxmlformats.org/drawingml/2006/main">
+            <a:off x="5715000" y="2130552"/>
+            <a:ext cx="2331720" cy="1261872"/>
+          </a:xfrm>
+          <a:prstGeom xmlns:a="http://schemas.openxmlformats.org/drawingml/2006/main" prst="rect">
+            <a:avLst/>
+          </a:prstGeom>
+          <a:noFill xmlns:a="http://schemas.openxmlformats.org/drawingml/2006/main"/>
+          <a:ln xmlns:a="http://schemas.openxmlformats.org/drawingml/2006/main">
+            <a:noFill/>
+          </a:ln>
+        </p:spPr>
+        <p:txBody>
+          <a:bodyPr xmlns:a="http://schemas.openxmlformats.org/drawingml/2006/main" lIns="73152" tIns="73152" rIns="73152" bIns="73152"/>
+          <a:lstStyle xmlns:a="http://schemas.openxmlformats.org/drawingml/2006/main"/>
+          <a:p xmlns:a="http://schemas.openxmlformats.org/drawingml/2006/main">
+            <a:pPr algn="l"/>
+            <a:r>
+              <a:rPr lang="en-US" sz="1200" b="0">
+                <a:solidFill>
+                  <a:srgbClr val="D7DFEC"/>
+                </a:solidFill>
+              </a:rPr>
+              <a:t>Users need a guided application journey, not just a recommendation.</a:t>
+            </a:r>
+          </a:p>
+        </p:txBody>
+      </p:sp>
+      <p:sp>
+        <p:nvSpPr>
+          <p:cNvPr id="100020" name="TextBox 13"/>
+          <p:cNvSpPr/>
+          <p:nvPr/>
+        </p:nvSpPr>
+        <p:spPr>
+          <a:xfrm xmlns:a="http://schemas.openxmlformats.org/drawingml/2006/main">
+            <a:off x="594360" y="4160520"/>
+            <a:ext cx="1417320" cy="320040"/>
+          </a:xfrm>
+          <a:prstGeom xmlns:a="http://schemas.openxmlformats.org/drawingml/2006/main" prst="rect">
+            <a:avLst/>
+          </a:prstGeom>
+          <a:noFill xmlns:a="http://schemas.openxmlformats.org/drawingml/2006/main"/>
+          <a:ln xmlns:a="http://schemas.openxmlformats.org/drawingml/2006/main">
+            <a:noFill/>
+          </a:ln>
+        </p:spPr>
+        <p:txBody>
+          <a:bodyPr xmlns:a="http://schemas.openxmlformats.org/drawingml/2006/main" lIns="73152" tIns="73152" rIns="73152" bIns="73152"/>
+          <a:lstStyle xmlns:a="http://schemas.openxmlformats.org/drawingml/2006/main"/>
+          <a:p xmlns:a="http://schemas.openxmlformats.org/drawingml/2006/main">
+            <a:pPr algn="l"/>
+            <a:r>
+              <a:rPr lang="en-US" sz="1300" b="1">
+                <a:solidFill>
+                  <a:srgbClr val="F97316"/>
+                </a:solidFill>
+              </a:rPr>
+              <a:t>Core challenge</a:t>
+            </a:r>
+          </a:p>
+        </p:txBody>
+      </p:sp>
+      <p:sp>
+        <p:nvSpPr>
+          <p:cNvPr id="100021" name="TextBox 14"/>
+          <p:cNvSpPr/>
+          <p:nvPr/>
+        </p:nvSpPr>
+        <p:spPr>
+          <a:xfrm xmlns:a="http://schemas.openxmlformats.org/drawingml/2006/main">
+            <a:off x="594360" y="4526280"/>
+            <a:ext cx="7315200" cy="640080"/>
+          </a:xfrm>
+          <a:prstGeom xmlns:a="http://schemas.openxmlformats.org/drawingml/2006/main" prst="rect">
+            <a:avLst/>
+          </a:prstGeom>
+          <a:noFill xmlns:a="http://schemas.openxmlformats.org/drawingml/2006/main"/>
+          <a:ln xmlns:a="http://schemas.openxmlformats.org/drawingml/2006/main">
+            <a:noFill/>
+          </a:ln>
+        </p:spPr>
+        <p:txBody>
+          <a:bodyPr xmlns:a="http://schemas.openxmlformats.org/drawingml/2006/main" lIns="73152" tIns="73152" rIns="73152" bIns="73152"/>
+          <a:lstStyle xmlns:a="http://schemas.openxmlformats.org/drawingml/2006/main"/>
+          <a:p xmlns:a="http://schemas.openxmlformats.org/drawingml/2006/main">
+            <a:pPr algn="l"/>
+            <a:r>
+              <a:rPr lang="en-US" sz="2400" b="1">
+                <a:solidFill>
+                  <a:srgbClr val="FFFFFF"/>
+                </a:solidFill>
+              </a:rPr>
+              <a:t>Turn a voice question into a trustworthy, actionable business decision.</a:t>
+            </a:r>
+          </a:p>
+        </p:txBody>
+      </p:sp>
+    </p:spTree>
+  </p:cSld>
+  <p:transition>
+    <p:fade/>
+  </p:transition>
+</p:sld>
+</file>
+
+<file path=ppt/slides/slide3.xml><?xml version="1.0" encoding="utf-8"?>
+<p:sld xmlns:p="http://schemas.openxmlformats.org/presentationml/2006/main">
+  <p:cSld>
+    <p:bg>
+      <p:bgPr>
+        <a:solidFill xmlns:a="http://schemas.openxmlformats.org/drawingml/2006/main">
+          <a:srgbClr val="0B1220"/>
+        </a:solidFill>
+      </p:bgPr>
+    </p:bg>
+    <p:spTree>
+      <p:nvGrpSpPr>
+        <p:cNvPr id="1" name=""/>
+        <p:cNvGrpSpPr/>
+        <p:nvPr/>
+      </p:nvGrpSpPr>
+      <p:grpSpPr/>
+      <p:sp>
+        <p:nvSpPr>
+          <p:cNvPr id="100022" name="TextBox 1"/>
+          <p:cNvSpPr/>
+          <p:nvPr/>
+        </p:nvSpPr>
+        <p:spPr>
+          <a:xfrm xmlns:a="http://schemas.openxmlformats.org/drawingml/2006/main">
+            <a:off x="594360" y="411480"/>
+            <a:ext cx="7406640" cy="502920"/>
+          </a:xfrm>
+          <a:prstGeom xmlns:a="http://schemas.openxmlformats.org/drawingml/2006/main" prst="rect">
+            <a:avLst/>
+          </a:prstGeom>
+          <a:noFill xmlns:a="http://schemas.openxmlformats.org/drawingml/2006/main"/>
+          <a:ln xmlns:a="http://schemas.openxmlformats.org/drawingml/2006/main">
+            <a:noFill/>
+          </a:ln>
+        </p:spPr>
+        <p:txBody>
+          <a:bodyPr xmlns:a="http://schemas.openxmlformats.org/drawingml/2006/main" lIns="73152" tIns="73152" rIns="73152" bIns="73152"/>
+          <a:lstStyle xmlns:a="http://schemas.openxmlformats.org/drawingml/2006/main"/>
+          <a:p xmlns:a="http://schemas.openxmlformats.org/drawingml/2006/main">
+            <a:pPr algn="l"/>
+            <a:r>
+              <a:rPr lang="en-US" sz="2700" b="1">
+                <a:solidFill>
+                  <a:srgbClr val="FFFFFF"/>
+                </a:solidFill>
+              </a:rPr>
+              <a:t>The product</a:t>
+            </a:r>
+          </a:p>
+        </p:txBody>
+      </p:sp>
+      <p:sp>
+        <p:nvSpPr>
+          <p:cNvPr id="100023" name="TextBox 2"/>
+          <p:cNvSpPr/>
+          <p:nvPr/>
+        </p:nvSpPr>
+        <p:spPr>
+          <a:xfrm xmlns:a="http://schemas.openxmlformats.org/drawingml/2006/main">
+            <a:off x="594360" y="987552"/>
+            <a:ext cx="914400" cy="73152"/>
+          </a:xfrm>
+          <a:prstGeom xmlns:a="http://schemas.openxmlformats.org/drawingml/2006/main" prst="rect">
+            <a:avLst/>
+          </a:prstGeom>
+          <a:solidFill xmlns:a="http://schemas.openxmlformats.org/drawingml/2006/main">
+            <a:srgbClr val="F97316"/>
+          </a:solidFill>
+          <a:ln xmlns:a="http://schemas.openxmlformats.org/drawingml/2006/main">
+            <a:noFill/>
+          </a:ln>
+        </p:spPr>
+        <p:txBody>
+          <a:bodyPr xmlns:a="http://schemas.openxmlformats.org/drawingml/2006/main" lIns="73152" tIns="73152" rIns="73152" bIns="73152"/>
+          <a:lstStyle xmlns:a="http://schemas.openxmlformats.org/drawingml/2006/main"/>
+          <a:p xmlns:a="http://schemas.openxmlformats.org/drawingml/2006/main">
+            <a:pPr algn="l"/>
+            <a:endParaRPr lang="en-US" sz="800" b="0">
+              <a:solidFill>
+                <a:srgbClr val="F97316"/>
+              </a:solidFill>
+            </a:endParaRPr>
+          </a:p>
+        </p:txBody>
+      </p:sp>
+      <p:sp>
+        <p:nvSpPr>
+          <p:cNvPr id="100024" name="TextBox 3"/>
+          <p:cNvSpPr/>
+          <p:nvPr/>
+        </p:nvSpPr>
+        <p:spPr>
+          <a:xfrm xmlns:a="http://schemas.openxmlformats.org/drawingml/2006/main">
+            <a:off x="594360" y="1115568"/>
+            <a:ext cx="7315200" cy="347472"/>
+          </a:xfrm>
+          <a:prstGeom xmlns:a="http://schemas.openxmlformats.org/drawingml/2006/main" prst="rect">
+            <a:avLst/>
+          </a:prstGeom>
+          <a:noFill xmlns:a="http://schemas.openxmlformats.org/drawingml/2006/main"/>
+          <a:ln xmlns:a="http://schemas.openxmlformats.org/drawingml/2006/main">
+            <a:noFill/>
+          </a:ln>
+        </p:spPr>
+        <p:txBody>
+          <a:bodyPr xmlns:a="http://schemas.openxmlformats.org/drawingml/2006/main" lIns="73152" tIns="73152" rIns="73152" bIns="73152"/>
+          <a:lstStyle xmlns:a="http://schemas.openxmlformats.org/drawingml/2006/main"/>
+          <a:p xmlns:a="http://schemas.openxmlformats.org/drawingml/2006/main">
+            <a:pPr algn="l"/>
+            <a:r>
+              <a:rPr lang="en-US" sz="1300" b="0">
+                <a:solidFill>
+                  <a:srgbClr val="A8B3C7"/>
+                </a:solidFill>
+              </a:rPr>
+              <a:t>One mobile-first experience from question to application plan.</a:t>
+            </a:r>
+          </a:p>
+        </p:txBody>
+      </p:sp>
+      <p:pic>
+        <p:nvPicPr>
+          <p:cNvPr id="100025" name="Picture 1" descr="VyaparMarg mobile assistant screen"/>
+          <p:cNvPicPr>
+            <a:picLocks xmlns:a="http://schemas.openxmlformats.org/drawingml/2006/main" noChangeAspect="1"/>
+          </p:cNvPicPr>
+          <p:nvPr/>
+        </p:nvPicPr>
+        <p:blipFill>
+          <a:blip xmlns:r="http://schemas.openxmlformats.org/officeDocument/2006/relationships" xmlns:a="http://schemas.openxmlformats.org/drawingml/2006/main" r:embed="Recf608af37e44092"/>
+          <a:stretch xmlns:a="http://schemas.openxmlformats.org/drawingml/2006/main">
+            <a:fillRect/>
+          </a:stretch>
+        </p:blipFill>
+        <p:spPr>
+          <a:xfrm xmlns:a="http://schemas.openxmlformats.org/drawingml/2006/main">
+            <a:off x="685800" y="1508760"/>
+            <a:ext cx="2331720" cy="4617720"/>
+          </a:xfrm>
+          <a:prstGeom xmlns:a="http://schemas.openxmlformats.org/drawingml/2006/main" prst="rect">
+            <a:avLst/>
+          </a:prstGeom>
+        </p:spPr>
+      </p:pic>
+      <p:sp>
+        <p:nvSpPr>
+          <p:cNvPr id="100026" name="TextBox 4"/>
+          <p:cNvSpPr/>
+          <p:nvPr/>
+        </p:nvSpPr>
+        <p:spPr>
+          <a:xfrm xmlns:a="http://schemas.openxmlformats.org/drawingml/2006/main">
+            <a:off x="3474720" y="1554480"/>
+            <a:ext cx="4389120" cy="1051560"/>
+          </a:xfrm>
+          <a:prstGeom xmlns:a="http://schemas.openxmlformats.org/drawingml/2006/main" prst="roundRect">
+            <a:avLst/>
+          </a:prstGeom>
+          <a:solidFill xmlns:a="http://schemas.openxmlformats.org/drawingml/2006/main">
+            <a:srgbClr val="162238"/>
+          </a:solidFill>
+          <a:ln xmlns:a="http://schemas.openxmlformats.org/drawingml/2006/main">
+            <a:noFill/>
+          </a:ln>
+        </p:spPr>
+        <p:txBody>
+          <a:bodyPr xmlns:a="http://schemas.openxmlformats.org/drawingml/2006/main" lIns="73152" tIns="73152" rIns="73152" bIns="73152"/>
+          <a:lstStyle xmlns:a="http://schemas.openxmlformats.org/drawingml/2006/main"/>
+          <a:p xmlns:a="http://schemas.openxmlformats.org/drawingml/2006/main">
+            <a:pPr algn="l"/>
+            <a:endParaRPr lang="en-US" sz="1000" b="0">
+              <a:solidFill>
+                <a:srgbClr val="FFFFFF"/>
+              </a:solidFill>
+            </a:endParaRPr>
+          </a:p>
+        </p:txBody>
+      </p:sp>
+      <p:sp>
+        <p:nvSpPr>
+          <p:cNvPr id="100027" name="TextBox 5"/>
+          <p:cNvSpPr/>
+          <p:nvPr/>
+        </p:nvSpPr>
+        <p:spPr>
+          <a:xfrm xmlns:a="http://schemas.openxmlformats.org/drawingml/2006/main">
+            <a:off x="3474720" y="1700784"/>
+            <a:ext cx="4389120" cy="292608"/>
+          </a:xfrm>
+          <a:prstGeom xmlns:a="http://schemas.openxmlformats.org/drawingml/2006/main" prst="rect">
+            <a:avLst/>
+          </a:prstGeom>
+          <a:noFill xmlns:a="http://schemas.openxmlformats.org/drawingml/2006/main"/>
+          <a:ln xmlns:a="http://schemas.openxmlformats.org/drawingml/2006/main">
+            <a:noFill/>
+          </a:ln>
+        </p:spPr>
+        <p:txBody>
+          <a:bodyPr xmlns:a="http://schemas.openxmlformats.org/drawingml/2006/main" lIns="73152" tIns="73152" rIns="73152" bIns="73152"/>
+          <a:lstStyle xmlns:a="http://schemas.openxmlformats.org/drawingml/2006/main"/>
+          <a:p xmlns:a="http://schemas.openxmlformats.org/drawingml/2006/main">
+            <a:pPr algn="l"/>
+            <a:r>
+              <a:rPr lang="en-US" sz="1600" b="1">
+                <a:solidFill>
+                  <a:srgbClr val="145DA0"/>
+                </a:solidFill>
+              </a:rPr>
+              <a:t>Ask naturally</a:t>
+            </a:r>
+          </a:p>
+        </p:txBody>
+      </p:sp>
+      <p:sp>
+        <p:nvSpPr>
+          <p:cNvPr id="100028" name="TextBox 6"/>
+          <p:cNvSpPr/>
+          <p:nvPr/>
+        </p:nvSpPr>
+        <p:spPr>
+          <a:xfrm xmlns:a="http://schemas.openxmlformats.org/drawingml/2006/main">
+            <a:off x="3474720" y="2039112"/>
+            <a:ext cx="4389120" cy="484632"/>
+          </a:xfrm>
+          <a:prstGeom xmlns:a="http://schemas.openxmlformats.org/drawingml/2006/main" prst="rect">
+            <a:avLst/>
+          </a:prstGeom>
+          <a:noFill xmlns:a="http://schemas.openxmlformats.org/drawingml/2006/main"/>
+          <a:ln xmlns:a="http://schemas.openxmlformats.org/drawingml/2006/main">
+            <a:noFill/>
+          </a:ln>
+        </p:spPr>
+        <p:txBody>
+          <a:bodyPr xmlns:a="http://schemas.openxmlformats.org/drawingml/2006/main" lIns="73152" tIns="73152" rIns="73152" bIns="73152"/>
+          <a:lstStyle xmlns:a="http://schemas.openxmlformats.org/drawingml/2006/main"/>
+          <a:p xmlns:a="http://schemas.openxmlformats.org/drawingml/2006/main">
+            <a:pPr algn="l"/>
+            <a:r>
+              <a:rPr lang="en-US" sz="1200" b="0">
+                <a:solidFill>
+                  <a:srgbClr val="D7DFEC"/>
+                </a:solidFill>
+              </a:rPr>
+              <a:t>Marathi, Hindi, Hinglish or English voice and text.</a:t>
+            </a:r>
+          </a:p>
+        </p:txBody>
+      </p:sp>
+      <p:sp>
+        <p:nvSpPr>
+          <p:cNvPr id="100029" name="TextBox 7"/>
+          <p:cNvSpPr/>
+          <p:nvPr/>
+        </p:nvSpPr>
+        <p:spPr>
+          <a:xfrm xmlns:a="http://schemas.openxmlformats.org/drawingml/2006/main">
+            <a:off x="3474720" y="2834640"/>
+            <a:ext cx="4389120" cy="1051560"/>
+          </a:xfrm>
+          <a:prstGeom xmlns:a="http://schemas.openxmlformats.org/drawingml/2006/main" prst="roundRect">
+            <a:avLst/>
+          </a:prstGeom>
+          <a:solidFill xmlns:a="http://schemas.openxmlformats.org/drawingml/2006/main">
+            <a:srgbClr val="162238"/>
+          </a:solidFill>
+          <a:ln xmlns:a="http://schemas.openxmlformats.org/drawingml/2006/main">
+            <a:noFill/>
+          </a:ln>
+        </p:spPr>
+        <p:txBody>
+          <a:bodyPr xmlns:a="http://schemas.openxmlformats.org/drawingml/2006/main" lIns="73152" tIns="73152" rIns="73152" bIns="73152"/>
+          <a:lstStyle xmlns:a="http://schemas.openxmlformats.org/drawingml/2006/main"/>
+          <a:p xmlns:a="http://schemas.openxmlformats.org/drawingml/2006/main">
+            <a:pPr algn="l"/>
+            <a:endParaRPr lang="en-US" sz="1000" b="0">
+              <a:solidFill>
+                <a:srgbClr val="FFFFFF"/>
+              </a:solidFill>
+            </a:endParaRPr>
+          </a:p>
+        </p:txBody>
+      </p:sp>
+      <p:sp>
+        <p:nvSpPr>
+          <p:cNvPr id="100030" name="TextBox 8"/>
+          <p:cNvSpPr/>
+          <p:nvPr/>
+        </p:nvSpPr>
+        <p:spPr>
+          <a:xfrm xmlns:a="http://schemas.openxmlformats.org/drawingml/2006/main">
+            <a:off x="3474720" y="2980944"/>
+            <a:ext cx="4389120" cy="292608"/>
+          </a:xfrm>
+          <a:prstGeom xmlns:a="http://schemas.openxmlformats.org/drawingml/2006/main" prst="rect">
+            <a:avLst/>
+          </a:prstGeom>
+          <a:noFill xmlns:a="http://schemas.openxmlformats.org/drawingml/2006/main"/>
+          <a:ln xmlns:a="http://schemas.openxmlformats.org/drawingml/2006/main">
+            <a:noFill/>
+          </a:ln>
+        </p:spPr>
+        <p:txBody>
+          <a:bodyPr xmlns:a="http://schemas.openxmlformats.org/drawingml/2006/main" lIns="73152" tIns="73152" rIns="73152" bIns="73152"/>
+          <a:lstStyle xmlns:a="http://schemas.openxmlformats.org/drawingml/2006/main"/>
+          <a:p xmlns:a="http://schemas.openxmlformats.org/drawingml/2006/main">
+            <a:pPr algn="l"/>
+            <a:r>
+              <a:rPr lang="en-US" sz="1600" b="1">
+                <a:solidFill>
+                  <a:srgbClr val="F97316"/>
+                </a:solidFill>
+              </a:rPr>
+              <a:t>Build context</a:t>
+            </a:r>
+          </a:p>
+        </p:txBody>
+      </p:sp>
+      <p:sp>
+        <p:nvSpPr>
+          <p:cNvPr id="100031" name="TextBox 9"/>
+          <p:cNvSpPr/>
+          <p:nvPr/>
+        </p:nvSpPr>
+        <p:spPr>
+          <a:xfrm xmlns:a="http://schemas.openxmlformats.org/drawingml/2006/main">
+            <a:off x="3474720" y="3319272"/>
+            <a:ext cx="4389120" cy="484632"/>
+          </a:xfrm>
+          <a:prstGeom xmlns:a="http://schemas.openxmlformats.org/drawingml/2006/main" prst="rect">
+            <a:avLst/>
+          </a:prstGeom>
+          <a:noFill xmlns:a="http://schemas.openxmlformats.org/drawingml/2006/main"/>
+          <a:ln xmlns:a="http://schemas.openxmlformats.org/drawingml/2006/main">
+            <a:noFill/>
+          </a:ln>
+        </p:spPr>
+        <p:txBody>
+          <a:bodyPr xmlns:a="http://schemas.openxmlformats.org/drawingml/2006/main" lIns="73152" tIns="73152" rIns="73152" bIns="73152"/>
+          <a:lstStyle xmlns:a="http://schemas.openxmlformats.org/drawingml/2006/main"/>
+          <a:p xmlns:a="http://schemas.openxmlformats.org/drawingml/2006/main">
+            <a:pPr algn="l"/>
+            <a:r>
+              <a:rPr lang="en-US" sz="1200" b="0">
+                <a:solidFill>
+                  <a:srgbClr val="D7DFEC"/>
+                </a:solidFill>
+              </a:rPr>
+              <a:t>Business profile captures type, location, turnover and goals.</a:t>
+            </a:r>
+          </a:p>
+        </p:txBody>
+      </p:sp>
+      <p:sp>
+        <p:nvSpPr>
+          <p:cNvPr id="100032" name="TextBox 10"/>
+          <p:cNvSpPr/>
+          <p:nvPr/>
+        </p:nvSpPr>
+        <p:spPr>
+          <a:xfrm xmlns:a="http://schemas.openxmlformats.org/drawingml/2006/main">
+            <a:off x="3474720" y="4114800"/>
+            <a:ext cx="4389120" cy="1051560"/>
+          </a:xfrm>
+          <a:prstGeom xmlns:a="http://schemas.openxmlformats.org/drawingml/2006/main" prst="roundRect">
+            <a:avLst/>
+          </a:prstGeom>
+          <a:solidFill xmlns:a="http://schemas.openxmlformats.org/drawingml/2006/main">
+            <a:srgbClr val="162238"/>
+          </a:solidFill>
+          <a:ln xmlns:a="http://schemas.openxmlformats.org/drawingml/2006/main">
+            <a:noFill/>
+          </a:ln>
+        </p:spPr>
+        <p:txBody>
+          <a:bodyPr xmlns:a="http://schemas.openxmlformats.org/drawingml/2006/main" lIns="73152" tIns="73152" rIns="73152" bIns="73152"/>
+          <a:lstStyle xmlns:a="http://schemas.openxmlformats.org/drawingml/2006/main"/>
+          <a:p xmlns:a="http://schemas.openxmlformats.org/drawingml/2006/main">
+            <a:pPr algn="l"/>
+            <a:endParaRPr lang="en-US" sz="1000" b="0">
+              <a:solidFill>
+                <a:srgbClr val="FFFFFF"/>
+              </a:solidFill>
+            </a:endParaRPr>
+          </a:p>
+        </p:txBody>
+      </p:sp>
+      <p:sp>
+        <p:nvSpPr>
+          <p:cNvPr id="100033" name="TextBox 11"/>
+          <p:cNvSpPr/>
+          <p:nvPr/>
+        </p:nvSpPr>
+        <p:spPr>
+          <a:xfrm xmlns:a="http://schemas.openxmlformats.org/drawingml/2006/main">
+            <a:off x="3474720" y="4261104"/>
+            <a:ext cx="4389120" cy="292608"/>
+          </a:xfrm>
+          <a:prstGeom xmlns:a="http://schemas.openxmlformats.org/drawingml/2006/main" prst="rect">
+            <a:avLst/>
+          </a:prstGeom>
+          <a:noFill xmlns:a="http://schemas.openxmlformats.org/drawingml/2006/main"/>
+          <a:ln xmlns:a="http://schemas.openxmlformats.org/drawingml/2006/main">
+            <a:noFill/>
+          </a:ln>
+        </p:spPr>
+        <p:txBody>
+          <a:bodyPr xmlns:a="http://schemas.openxmlformats.org/drawingml/2006/main" lIns="73152" tIns="73152" rIns="73152" bIns="73152"/>
+          <a:lstStyle xmlns:a="http://schemas.openxmlformats.org/drawingml/2006/main"/>
+          <a:p xmlns:a="http://schemas.openxmlformats.org/drawingml/2006/main">
+            <a:pPr algn="l"/>
+            <a:r>
+              <a:rPr lang="en-US" sz="1600" b="1">
+                <a:solidFill>
+                  <a:srgbClr val="138A5E"/>
+                </a:solidFill>
+              </a:rPr>
+              <a:t>Get clarity</a:t>
+            </a:r>
+          </a:p>
+        </p:txBody>
+      </p:sp>
+      <p:sp>
+        <p:nvSpPr>
+          <p:cNvPr id="100034" name="TextBox 12"/>
+          <p:cNvSpPr/>
+          <p:nvPr/>
+        </p:nvSpPr>
+        <p:spPr>
+          <a:xfrm xmlns:a="http://schemas.openxmlformats.org/drawingml/2006/main">
+            <a:off x="3474720" y="4599432"/>
+            <a:ext cx="4389120" cy="484632"/>
+          </a:xfrm>
+          <a:prstGeom xmlns:a="http://schemas.openxmlformats.org/drawingml/2006/main" prst="rect">
+            <a:avLst/>
+          </a:prstGeom>
+          <a:noFill xmlns:a="http://schemas.openxmlformats.org/drawingml/2006/main"/>
+          <a:ln xmlns:a="http://schemas.openxmlformats.org/drawingml/2006/main">
+            <a:noFill/>
+          </a:ln>
+        </p:spPr>
+        <p:txBody>
+          <a:bodyPr xmlns:a="http://schemas.openxmlformats.org/drawingml/2006/main" lIns="73152" tIns="73152" rIns="73152" bIns="73152"/>
+          <a:lstStyle xmlns:a="http://schemas.openxmlformats.org/drawingml/2006/main"/>
+          <a:p xmlns:a="http://schemas.openxmlformats.org/drawingml/2006/main">
+            <a:pPr algn="l"/>
+            <a:r>
+              <a:rPr lang="en-US" sz="1200" b="0">
+                <a:solidFill>
+                  <a:srgbClr val="D7DFEC"/>
+                </a:solidFill>
+              </a:rPr>
+              <a:t>Recommendations show reasons, score and missing requirements.</a:t>
+            </a:r>
+          </a:p>
+        </p:txBody>
+      </p:sp>
+      <p:sp>
+        <p:nvSpPr>
+          <p:cNvPr id="100035" name="TextBox 13"/>
+          <p:cNvSpPr/>
+          <p:nvPr/>
+        </p:nvSpPr>
+        <p:spPr>
+          <a:xfrm xmlns:a="http://schemas.openxmlformats.org/drawingml/2006/main">
+            <a:off x="3474720" y="5532120"/>
+            <a:ext cx="4389120" cy="502920"/>
+          </a:xfrm>
+          <a:prstGeom xmlns:a="http://schemas.openxmlformats.org/drawingml/2006/main" prst="rect">
+            <a:avLst/>
+          </a:prstGeom>
+          <a:noFill xmlns:a="http://schemas.openxmlformats.org/drawingml/2006/main"/>
+          <a:ln xmlns:a="http://schemas.openxmlformats.org/drawingml/2006/main">
+            <a:noFill/>
+          </a:ln>
+        </p:spPr>
+        <p:txBody>
+          <a:bodyPr xmlns:a="http://schemas.openxmlformats.org/drawingml/2006/main" lIns="73152" tIns="73152" rIns="73152" bIns="73152"/>
+          <a:lstStyle xmlns:a="http://schemas.openxmlformats.org/drawingml/2006/main"/>
+          <a:p xmlns:a="http://schemas.openxmlformats.org/drawingml/2006/main">
+            <a:pPr algn="l"/>
+            <a:r>
+              <a:rPr lang="en-US" sz="1500" b="0">
+                <a:solidFill>
+                  <a:srgbClr val="D7DFEC"/>
+                </a:solidFill>
+              </a:rPr>
+              <a:t>The interface feels like a helpful local guide - not a government form.</a:t>
+            </a:r>
+          </a:p>
+        </p:txBody>
+      </p:sp>
+    </p:spTree>
+  </p:cSld>
+  <p:transition>
+    <p:fade/>
+  </p:transition>
+</p:sld>
+</file>
+
+<file path=ppt/slides/slide4.xml><?xml version="1.0" encoding="utf-8"?>
+<p:sld xmlns:p="http://schemas.openxmlformats.org/presentationml/2006/main">
+  <p:cSld>
+    <p:bg>
+      <p:bgPr>
+        <a:solidFill xmlns:a="http://schemas.openxmlformats.org/drawingml/2006/main">
+          <a:srgbClr val="0B1220"/>
+        </a:solidFill>
+      </p:bgPr>
+    </p:bg>
+    <p:spTree>
+      <p:nvGrpSpPr>
+        <p:cNvPr id="1" name=""/>
+        <p:cNvGrpSpPr/>
+        <p:nvPr/>
+      </p:nvGrpSpPr>
+      <p:grpSpPr/>
+      <p:sp>
+        <p:nvSpPr>
+          <p:cNvPr id="100036" name="TextBox 1"/>
+          <p:cNvSpPr/>
+          <p:nvPr/>
+        </p:nvSpPr>
+        <p:spPr>
+          <a:xfrm xmlns:a="http://schemas.openxmlformats.org/drawingml/2006/main">
+            <a:off x="594360" y="411480"/>
+            <a:ext cx="7406640" cy="502920"/>
+          </a:xfrm>
+          <a:prstGeom xmlns:a="http://schemas.openxmlformats.org/drawingml/2006/main" prst="rect">
+            <a:avLst/>
+          </a:prstGeom>
+          <a:noFill xmlns:a="http://schemas.openxmlformats.org/drawingml/2006/main"/>
+          <a:ln xmlns:a="http://schemas.openxmlformats.org/drawingml/2006/main">
+            <a:noFill/>
+          </a:ln>
+        </p:spPr>
+        <p:txBody>
+          <a:bodyPr xmlns:a="http://schemas.openxmlformats.org/drawingml/2006/main" lIns="73152" tIns="73152" rIns="73152" bIns="73152"/>
+          <a:lstStyle xmlns:a="http://schemas.openxmlformats.org/drawingml/2006/main"/>
+          <a:p xmlns:a="http://schemas.openxmlformats.org/drawingml/2006/main">
+            <a:pPr algn="l"/>
+            <a:r>
+              <a:rPr lang="en-US" sz="2700" b="1">
+                <a:solidFill>
+                  <a:srgbClr val="FFFFFF"/>
+                </a:solidFill>
+              </a:rPr>
+              <a:t>How it works</a:t>
+            </a:r>
+          </a:p>
+        </p:txBody>
+      </p:sp>
+      <p:sp>
+        <p:nvSpPr>
+          <p:cNvPr id="100037" name="TextBox 2"/>
+          <p:cNvSpPr/>
+          <p:nvPr/>
+        </p:nvSpPr>
+        <p:spPr>
+          <a:xfrm xmlns:a="http://schemas.openxmlformats.org/drawingml/2006/main">
+            <a:off x="594360" y="987552"/>
+            <a:ext cx="914400" cy="73152"/>
+          </a:xfrm>
+          <a:prstGeom xmlns:a="http://schemas.openxmlformats.org/drawingml/2006/main" prst="rect">
+            <a:avLst/>
+          </a:prstGeom>
+          <a:solidFill xmlns:a="http://schemas.openxmlformats.org/drawingml/2006/main">
+            <a:srgbClr val="F97316"/>
+          </a:solidFill>
+          <a:ln xmlns:a="http://schemas.openxmlformats.org/drawingml/2006/main">
+            <a:noFill/>
+          </a:ln>
+        </p:spPr>
+        <p:txBody>
+          <a:bodyPr xmlns:a="http://schemas.openxmlformats.org/drawingml/2006/main" lIns="73152" tIns="73152" rIns="73152" bIns="73152"/>
+          <a:lstStyle xmlns:a="http://schemas.openxmlformats.org/drawingml/2006/main"/>
+          <a:p xmlns:a="http://schemas.openxmlformats.org/drawingml/2006/main">
+            <a:pPr algn="l"/>
+            <a:endParaRPr lang="en-US" sz="800" b="0">
+              <a:solidFill>
+                <a:srgbClr val="F97316"/>
+              </a:solidFill>
+            </a:endParaRPr>
+          </a:p>
+        </p:txBody>
+      </p:sp>
+      <p:sp>
+        <p:nvSpPr>
+          <p:cNvPr id="100038" name="TextBox 3"/>
+          <p:cNvSpPr/>
+          <p:nvPr/>
+        </p:nvSpPr>
+        <p:spPr>
+          <a:xfrm xmlns:a="http://schemas.openxmlformats.org/drawingml/2006/main">
+            <a:off x="594360" y="1115568"/>
+            <a:ext cx="7315200" cy="347472"/>
+          </a:xfrm>
+          <a:prstGeom xmlns:a="http://schemas.openxmlformats.org/drawingml/2006/main" prst="rect">
+            <a:avLst/>
+          </a:prstGeom>
+          <a:noFill xmlns:a="http://schemas.openxmlformats.org/drawingml/2006/main"/>
+          <a:ln xmlns:a="http://schemas.openxmlformats.org/drawingml/2006/main">
+            <a:noFill/>
+          </a:ln>
+        </p:spPr>
+        <p:txBody>
+          <a:bodyPr xmlns:a="http://schemas.openxmlformats.org/drawingml/2006/main" lIns="73152" tIns="73152" rIns="73152" bIns="73152"/>
+          <a:lstStyle xmlns:a="http://schemas.openxmlformats.org/drawingml/2006/main"/>
+          <a:p xmlns:a="http://schemas.openxmlformats.org/drawingml/2006/main">
+            <a:pPr algn="l"/>
+            <a:r>
+              <a:rPr lang="en-US" sz="1300" b="0">
+                <a:solidFill>
+                  <a:srgbClr val="A8B3C7"/>
+                </a:solidFill>
+              </a:rPr>
+              <a:t>A simple four-step journey with a rules-backed decision layer.</a:t>
+            </a:r>
+          </a:p>
+        </p:txBody>
+      </p:sp>
+      <p:sp>
+        <p:nvSpPr>
+          <p:cNvPr id="100039" name="TextBox 4"/>
+          <p:cNvSpPr/>
+          <p:nvPr/>
+        </p:nvSpPr>
+        <p:spPr>
+          <a:xfrm xmlns:a="http://schemas.openxmlformats.org/drawingml/2006/main">
+            <a:off x="640080" y="1874520"/>
+            <a:ext cx="1508760" cy="621792"/>
+          </a:xfrm>
+          <a:prstGeom xmlns:a="http://schemas.openxmlformats.org/drawingml/2006/main" prst="roundRect">
+            <a:avLst/>
+          </a:prstGeom>
+          <a:solidFill xmlns:a="http://schemas.openxmlformats.org/drawingml/2006/main">
+            <a:srgbClr val="145DA0"/>
+          </a:solidFill>
+          <a:ln xmlns:a="http://schemas.openxmlformats.org/drawingml/2006/main">
+            <a:noFill/>
+          </a:ln>
+        </p:spPr>
+        <p:txBody>
+          <a:bodyPr xmlns:a="http://schemas.openxmlformats.org/drawingml/2006/main" lIns="73152" tIns="73152" rIns="73152" bIns="73152"/>
+          <a:lstStyle xmlns:a="http://schemas.openxmlformats.org/drawingml/2006/main"/>
+          <a:p xmlns:a="http://schemas.openxmlformats.org/drawingml/2006/main">
+            <a:pPr algn="ctr"/>
+            <a:r>
+              <a:rPr lang="en-US" sz="1600" b="1">
+                <a:solidFill>
+                  <a:srgbClr val="FFFFFF"/>
+                </a:solidFill>
+              </a:rPr>
+              <a:t>1  ASK</a:t>
+            </a:r>
+          </a:p>
+        </p:txBody>
+      </p:sp>
+      <p:sp>
+        <p:nvSpPr>
+          <p:cNvPr id="100040" name="TextBox 5"/>
+          <p:cNvSpPr/>
+          <p:nvPr/>
+        </p:nvSpPr>
+        <p:spPr>
+          <a:xfrm xmlns:a="http://schemas.openxmlformats.org/drawingml/2006/main">
+            <a:off x="2267712" y="2011680"/>
+            <a:ext cx="384048" cy="384048"/>
+          </a:xfrm>
+          <a:prstGeom xmlns:a="http://schemas.openxmlformats.org/drawingml/2006/main" prst="rightArrow">
+            <a:avLst/>
+          </a:prstGeom>
+          <a:noFill xmlns:a="http://schemas.openxmlformats.org/drawingml/2006/main"/>
+          <a:ln xmlns:a="http://schemas.openxmlformats.org/drawingml/2006/main">
+            <a:noFill/>
+          </a:ln>
+        </p:spPr>
+        <p:txBody>
+          <a:bodyPr xmlns:a="http://schemas.openxmlformats.org/drawingml/2006/main" lIns="73152" tIns="73152" rIns="73152" bIns="73152"/>
+          <a:lstStyle xmlns:a="http://schemas.openxmlformats.org/drawingml/2006/main"/>
+          <a:p xmlns:a="http://schemas.openxmlformats.org/drawingml/2006/main">
+            <a:pPr algn="ctr"/>
+            <a:r>
+              <a:rPr lang="en-US" sz="2200" b="1">
+                <a:solidFill>
+                  <a:srgbClr val="F97316"/>
+                </a:solidFill>
+              </a:rPr>
+              <a:t>&gt;</a:t>
+            </a:r>
+          </a:p>
+        </p:txBody>
+      </p:sp>
+      <p:sp>
+        <p:nvSpPr>
+          <p:cNvPr id="100041" name="TextBox 6"/>
+          <p:cNvSpPr/>
+          <p:nvPr/>
+        </p:nvSpPr>
+        <p:spPr>
+          <a:xfrm xmlns:a="http://schemas.openxmlformats.org/drawingml/2006/main">
+            <a:off x="2697480" y="1874520"/>
+            <a:ext cx="1508760" cy="621792"/>
+          </a:xfrm>
+          <a:prstGeom xmlns:a="http://schemas.openxmlformats.org/drawingml/2006/main" prst="roundRect">
+            <a:avLst/>
+          </a:prstGeom>
+          <a:solidFill xmlns:a="http://schemas.openxmlformats.org/drawingml/2006/main">
+            <a:srgbClr val="145DA0"/>
+          </a:solidFill>
+          <a:ln xmlns:a="http://schemas.openxmlformats.org/drawingml/2006/main">
+            <a:noFill/>
+          </a:ln>
+        </p:spPr>
+        <p:txBody>
+          <a:bodyPr xmlns:a="http://schemas.openxmlformats.org/drawingml/2006/main" lIns="73152" tIns="73152" rIns="73152" bIns="73152"/>
+          <a:lstStyle xmlns:a="http://schemas.openxmlformats.org/drawingml/2006/main"/>
+          <a:p xmlns:a="http://schemas.openxmlformats.org/drawingml/2006/main">
+            <a:pPr algn="ctr"/>
+            <a:r>
+              <a:rPr lang="en-US" sz="1600" b="1">
+                <a:solidFill>
+                  <a:srgbClr val="FFFFFF"/>
+                </a:solidFill>
+              </a:rPr>
+              <a:t>2  PROFILE</a:t>
+            </a:r>
+          </a:p>
+        </p:txBody>
+      </p:sp>
+      <p:sp>
+        <p:nvSpPr>
+          <p:cNvPr id="100042" name="TextBox 7"/>
+          <p:cNvSpPr/>
+          <p:nvPr/>
+        </p:nvSpPr>
+        <p:spPr>
+          <a:xfrm xmlns:a="http://schemas.openxmlformats.org/drawingml/2006/main">
+            <a:off x="4325112" y="2011680"/>
+            <a:ext cx="384048" cy="384048"/>
+          </a:xfrm>
+          <a:prstGeom xmlns:a="http://schemas.openxmlformats.org/drawingml/2006/main" prst="rightArrow">
+            <a:avLst/>
+          </a:prstGeom>
+          <a:noFill xmlns:a="http://schemas.openxmlformats.org/drawingml/2006/main"/>
+          <a:ln xmlns:a="http://schemas.openxmlformats.org/drawingml/2006/main">
+            <a:noFill/>
+          </a:ln>
+        </p:spPr>
+        <p:txBody>
+          <a:bodyPr xmlns:a="http://schemas.openxmlformats.org/drawingml/2006/main" lIns="73152" tIns="73152" rIns="73152" bIns="73152"/>
+          <a:lstStyle xmlns:a="http://schemas.openxmlformats.org/drawingml/2006/main"/>
+          <a:p xmlns:a="http://schemas.openxmlformats.org/drawingml/2006/main">
+            <a:pPr algn="ctr"/>
+            <a:r>
+              <a:rPr lang="en-US" sz="2200" b="1">
+                <a:solidFill>
+                  <a:srgbClr val="F97316"/>
+                </a:solidFill>
+              </a:rPr>
+              <a:t>&gt;</a:t>
+            </a:r>
+          </a:p>
+        </p:txBody>
+      </p:sp>
+      <p:sp>
+        <p:nvSpPr>
+          <p:cNvPr id="100043" name="TextBox 8"/>
+          <p:cNvSpPr/>
+          <p:nvPr/>
+        </p:nvSpPr>
+        <p:spPr>
+          <a:xfrm xmlns:a="http://schemas.openxmlformats.org/drawingml/2006/main">
+            <a:off x="4754880" y="1874520"/>
+            <a:ext cx="1508760" cy="621792"/>
+          </a:xfrm>
+          <a:prstGeom xmlns:a="http://schemas.openxmlformats.org/drawingml/2006/main" prst="roundRect">
+            <a:avLst/>
+          </a:prstGeom>
+          <a:solidFill xmlns:a="http://schemas.openxmlformats.org/drawingml/2006/main">
+            <a:srgbClr val="F97316"/>
+          </a:solidFill>
+          <a:ln xmlns:a="http://schemas.openxmlformats.org/drawingml/2006/main">
+            <a:noFill/>
+          </a:ln>
+        </p:spPr>
+        <p:txBody>
+          <a:bodyPr xmlns:a="http://schemas.openxmlformats.org/drawingml/2006/main" lIns="73152" tIns="73152" rIns="73152" bIns="73152"/>
+          <a:lstStyle xmlns:a="http://schemas.openxmlformats.org/drawingml/2006/main"/>
+          <a:p xmlns:a="http://schemas.openxmlformats.org/drawingml/2006/main">
+            <a:pPr algn="ctr"/>
+            <a:r>
+              <a:rPr lang="en-US" sz="1600" b="1">
+                <a:solidFill>
+                  <a:srgbClr val="FFFFFF"/>
+                </a:solidFill>
+              </a:rPr>
+              <a:t>3  MATCH</a:t>
+            </a:r>
+          </a:p>
+        </p:txBody>
+      </p:sp>
+      <p:sp>
+        <p:nvSpPr>
+          <p:cNvPr id="100044" name="TextBox 9"/>
+          <p:cNvSpPr/>
+          <p:nvPr/>
+        </p:nvSpPr>
+        <p:spPr>
+          <a:xfrm xmlns:a="http://schemas.openxmlformats.org/drawingml/2006/main">
+            <a:off x="6382512" y="2011680"/>
+            <a:ext cx="384048" cy="384048"/>
+          </a:xfrm>
+          <a:prstGeom xmlns:a="http://schemas.openxmlformats.org/drawingml/2006/main" prst="rightArrow">
+            <a:avLst/>
+          </a:prstGeom>
+          <a:noFill xmlns:a="http://schemas.openxmlformats.org/drawingml/2006/main"/>
+          <a:ln xmlns:a="http://schemas.openxmlformats.org/drawingml/2006/main">
+            <a:noFill/>
+          </a:ln>
+        </p:spPr>
+        <p:txBody>
+          <a:bodyPr xmlns:a="http://schemas.openxmlformats.org/drawingml/2006/main" lIns="73152" tIns="73152" rIns="73152" bIns="73152"/>
+          <a:lstStyle xmlns:a="http://schemas.openxmlformats.org/drawingml/2006/main"/>
+          <a:p xmlns:a="http://schemas.openxmlformats.org/drawingml/2006/main">
+            <a:pPr algn="ctr"/>
+            <a:r>
+              <a:rPr lang="en-US" sz="2200" b="1">
+                <a:solidFill>
+                  <a:srgbClr val="F97316"/>
+                </a:solidFill>
+              </a:rPr>
+              <a:t>&gt;</a:t>
+            </a:r>
+          </a:p>
+        </p:txBody>
+      </p:sp>
+      <p:sp>
+        <p:nvSpPr>
+          <p:cNvPr id="100045" name="TextBox 10"/>
+          <p:cNvSpPr/>
+          <p:nvPr/>
+        </p:nvSpPr>
+        <p:spPr>
+          <a:xfrm xmlns:a="http://schemas.openxmlformats.org/drawingml/2006/main">
+            <a:off x="6812280" y="1874520"/>
+            <a:ext cx="1097280" cy="621792"/>
+          </a:xfrm>
+          <a:prstGeom xmlns:a="http://schemas.openxmlformats.org/drawingml/2006/main" prst="roundRect">
+            <a:avLst/>
+          </a:prstGeom>
+          <a:solidFill xmlns:a="http://schemas.openxmlformats.org/drawingml/2006/main">
+            <a:srgbClr val="138A5E"/>
+          </a:solidFill>
+          <a:ln xmlns:a="http://schemas.openxmlformats.org/drawingml/2006/main">
+            <a:noFill/>
+          </a:ln>
+        </p:spPr>
+        <p:txBody>
+          <a:bodyPr xmlns:a="http://schemas.openxmlformats.org/drawingml/2006/main" lIns="73152" tIns="73152" rIns="73152" bIns="73152"/>
+          <a:lstStyle xmlns:a="http://schemas.openxmlformats.org/drawingml/2006/main"/>
+          <a:p xmlns:a="http://schemas.openxmlformats.org/drawingml/2006/main">
+            <a:pPr algn="ctr"/>
+            <a:r>
+              <a:rPr lang="en-US" sz="1600" b="1">
+                <a:solidFill>
+                  <a:srgbClr val="FFFFFF"/>
+                </a:solidFill>
+              </a:rPr>
+              <a:t>4  APPLY</a:t>
+            </a:r>
+          </a:p>
+        </p:txBody>
+      </p:sp>
+      <p:sp>
+        <p:nvSpPr>
+          <p:cNvPr id="100046" name="TextBox 11"/>
+          <p:cNvSpPr/>
+          <p:nvPr/>
+        </p:nvSpPr>
+        <p:spPr>
+          <a:xfrm xmlns:a="http://schemas.openxmlformats.org/drawingml/2006/main">
+            <a:off x="658368" y="3063240"/>
+            <a:ext cx="1463040" cy="411480"/>
+          </a:xfrm>
+          <a:prstGeom xmlns:a="http://schemas.openxmlformats.org/drawingml/2006/main" prst="rect">
+            <a:avLst/>
+          </a:prstGeom>
+          <a:noFill xmlns:a="http://schemas.openxmlformats.org/drawingml/2006/main"/>
+          <a:ln xmlns:a="http://schemas.openxmlformats.org/drawingml/2006/main">
+            <a:noFill/>
+          </a:ln>
+        </p:spPr>
+        <p:txBody>
+          <a:bodyPr xmlns:a="http://schemas.openxmlformats.org/drawingml/2006/main" lIns="73152" tIns="73152" rIns="73152" bIns="73152"/>
+          <a:lstStyle xmlns:a="http://schemas.openxmlformats.org/drawingml/2006/main"/>
+          <a:p xmlns:a="http://schemas.openxmlformats.org/drawingml/2006/main">
+            <a:pPr algn="ctr"/>
+            <a:r>
+              <a:rPr lang="en-US" sz="1200" b="0">
+                <a:solidFill>
+                  <a:srgbClr val="A8B3C7"/>
+                </a:solidFill>
+              </a:rPr>
+              <a:t>Voice/text input</a:t>
+            </a:r>
+          </a:p>
+        </p:txBody>
+      </p:sp>
+      <p:sp>
+        <p:nvSpPr>
+          <p:cNvPr id="100047" name="TextBox 12"/>
+          <p:cNvSpPr/>
+          <p:nvPr/>
+        </p:nvSpPr>
+        <p:spPr>
+          <a:xfrm xmlns:a="http://schemas.openxmlformats.org/drawingml/2006/main">
+            <a:off x="2670048" y="3063240"/>
+            <a:ext cx="1554480" cy="411480"/>
+          </a:xfrm>
+          <a:prstGeom xmlns:a="http://schemas.openxmlformats.org/drawingml/2006/main" prst="rect">
+            <a:avLst/>
+          </a:prstGeom>
+          <a:noFill xmlns:a="http://schemas.openxmlformats.org/drawingml/2006/main"/>
+          <a:ln xmlns:a="http://schemas.openxmlformats.org/drawingml/2006/main">
+            <a:noFill/>
+          </a:ln>
+        </p:spPr>
+        <p:txBody>
+          <a:bodyPr xmlns:a="http://schemas.openxmlformats.org/drawingml/2006/main" lIns="73152" tIns="73152" rIns="73152" bIns="73152"/>
+          <a:lstStyle xmlns:a="http://schemas.openxmlformats.org/drawingml/2006/main"/>
+          <a:p xmlns:a="http://schemas.openxmlformats.org/drawingml/2006/main">
+            <a:pPr algn="ctr"/>
+            <a:r>
+              <a:rPr lang="en-US" sz="1200" b="0">
+                <a:solidFill>
+                  <a:srgbClr val="A8B3C7"/>
+                </a:solidFill>
+              </a:rPr>
+              <a:t>Structured profile</a:t>
+            </a:r>
+          </a:p>
+        </p:txBody>
+      </p:sp>
+      <p:sp>
+        <p:nvSpPr>
+          <p:cNvPr id="100048" name="TextBox 13"/>
+          <p:cNvSpPr/>
+          <p:nvPr/>
+        </p:nvSpPr>
+        <p:spPr>
+          <a:xfrm xmlns:a="http://schemas.openxmlformats.org/drawingml/2006/main">
+            <a:off x="4681728" y="3063240"/>
+            <a:ext cx="1645920" cy="411480"/>
+          </a:xfrm>
+          <a:prstGeom xmlns:a="http://schemas.openxmlformats.org/drawingml/2006/main" prst="rect">
+            <a:avLst/>
+          </a:prstGeom>
+          <a:noFill xmlns:a="http://schemas.openxmlformats.org/drawingml/2006/main"/>
+          <a:ln xmlns:a="http://schemas.openxmlformats.org/drawingml/2006/main">
+            <a:noFill/>
+          </a:ln>
+        </p:spPr>
+        <p:txBody>
+          <a:bodyPr xmlns:a="http://schemas.openxmlformats.org/drawingml/2006/main" lIns="73152" tIns="73152" rIns="73152" bIns="73152"/>
+          <a:lstStyle xmlns:a="http://schemas.openxmlformats.org/drawingml/2006/main"/>
+          <a:p xmlns:a="http://schemas.openxmlformats.org/drawingml/2006/main">
+            <a:pPr algn="ctr"/>
+            <a:r>
+              <a:rPr lang="en-US" sz="1200" b="0">
+                <a:solidFill>
+                  <a:srgbClr val="A8B3C7"/>
+                </a:solidFill>
+              </a:rPr>
+              <a:t>Deterministic rules</a:t>
+            </a:r>
+          </a:p>
+        </p:txBody>
+      </p:sp>
+      <p:sp>
+        <p:nvSpPr>
+          <p:cNvPr id="100049" name="TextBox 14"/>
+          <p:cNvSpPr/>
+          <p:nvPr/>
+        </p:nvSpPr>
+        <p:spPr>
+          <a:xfrm xmlns:a="http://schemas.openxmlformats.org/drawingml/2006/main">
+            <a:off x="6629400" y="3063240"/>
+            <a:ext cx="1417320" cy="411480"/>
+          </a:xfrm>
+          <a:prstGeom xmlns:a="http://schemas.openxmlformats.org/drawingml/2006/main" prst="rect">
+            <a:avLst/>
+          </a:prstGeom>
+          <a:noFill xmlns:a="http://schemas.openxmlformats.org/drawingml/2006/main"/>
+          <a:ln xmlns:a="http://schemas.openxmlformats.org/drawingml/2006/main">
+            <a:noFill/>
+          </a:ln>
+        </p:spPr>
+        <p:txBody>
+          <a:bodyPr xmlns:a="http://schemas.openxmlformats.org/drawingml/2006/main" lIns="73152" tIns="73152" rIns="73152" bIns="73152"/>
+          <a:lstStyle xmlns:a="http://schemas.openxmlformats.org/drawingml/2006/main"/>
+          <a:p xmlns:a="http://schemas.openxmlformats.org/drawingml/2006/main">
+            <a:pPr algn="ctr"/>
+            <a:r>
+              <a:rPr lang="en-US" sz="1200" b="0">
+                <a:solidFill>
+                  <a:srgbClr val="A8B3C7"/>
+                </a:solidFill>
+              </a:rPr>
+              <a:t>Portal steps + progress</a:t>
+            </a:r>
+          </a:p>
+        </p:txBody>
+      </p:sp>
+      <p:sp>
+        <p:nvSpPr>
+          <p:cNvPr id="100050" name="TextBox 15"/>
+          <p:cNvSpPr/>
+          <p:nvPr/>
+        </p:nvSpPr>
+        <p:spPr>
+          <a:xfrm xmlns:a="http://schemas.openxmlformats.org/drawingml/2006/main">
+            <a:off x="1645920" y="4754880"/>
+            <a:ext cx="5760720" cy="594360"/>
+          </a:xfrm>
+          <a:prstGeom xmlns:a="http://schemas.openxmlformats.org/drawingml/2006/main" prst="roundRect">
+            <a:avLst/>
+          </a:prstGeom>
+          <a:solidFill xmlns:a="http://schemas.openxmlformats.org/drawingml/2006/main">
+            <a:srgbClr val="162238"/>
+          </a:solidFill>
+          <a:ln xmlns:a="http://schemas.openxmlformats.org/drawingml/2006/main">
+            <a:noFill/>
+          </a:ln>
+        </p:spPr>
+        <p:txBody>
+          <a:bodyPr xmlns:a="http://schemas.openxmlformats.org/drawingml/2006/main" lIns="73152" tIns="73152" rIns="73152" bIns="73152"/>
+          <a:lstStyle xmlns:a="http://schemas.openxmlformats.org/drawingml/2006/main"/>
+          <a:p xmlns:a="http://schemas.openxmlformats.org/drawingml/2006/main">
+            <a:pPr algn="ctr"/>
+            <a:r>
+              <a:rPr lang="en-US" sz="2200" b="1">
+                <a:solidFill>
+                  <a:srgbClr val="FFFFFF"/>
+                </a:solidFill>
+              </a:rPr>
+              <a:t>AI explains. Structured data and rules decide.</a:t>
+            </a:r>
+          </a:p>
+        </p:txBody>
+      </p:sp>
+    </p:spTree>
+  </p:cSld>
+  <p:transition>
+    <p:fade/>
+  </p:transition>
+</p:sld>
+</file>
+
+<file path=ppt/slides/slide5.xml><?xml version="1.0" encoding="utf-8"?>
+<p:sld xmlns:p="http://schemas.openxmlformats.org/presentationml/2006/main">
+  <p:cSld>
+    <p:bg>
+      <p:bgPr>
+        <a:solidFill xmlns:a="http://schemas.openxmlformats.org/drawingml/2006/main">
+          <a:srgbClr val="0B1220"/>
+        </a:solidFill>
+      </p:bgPr>
+    </p:bg>
+    <p:spTree>
+      <p:nvGrpSpPr>
+        <p:cNvPr id="1" name=""/>
+        <p:cNvGrpSpPr/>
+        <p:nvPr/>
+      </p:nvGrpSpPr>
+      <p:grpSpPr/>
+      <p:sp>
+        <p:nvSpPr>
+          <p:cNvPr id="100051" name="TextBox 1"/>
+          <p:cNvSpPr/>
+          <p:nvPr/>
+        </p:nvSpPr>
+        <p:spPr>
+          <a:xfrm xmlns:a="http://schemas.openxmlformats.org/drawingml/2006/main">
+            <a:off x="594360" y="411480"/>
+            <a:ext cx="7406640" cy="502920"/>
+          </a:xfrm>
+          <a:prstGeom xmlns:a="http://schemas.openxmlformats.org/drawingml/2006/main" prst="rect">
+            <a:avLst/>
+          </a:prstGeom>
+          <a:noFill xmlns:a="http://schemas.openxmlformats.org/drawingml/2006/main"/>
+          <a:ln xmlns:a="http://schemas.openxmlformats.org/drawingml/2006/main">
+            <a:noFill/>
+          </a:ln>
+        </p:spPr>
+        <p:txBody>
+          <a:bodyPr xmlns:a="http://schemas.openxmlformats.org/drawingml/2006/main" lIns="73152" tIns="73152" rIns="73152" bIns="73152"/>
+          <a:lstStyle xmlns:a="http://schemas.openxmlformats.org/drawingml/2006/main"/>
+          <a:p xmlns:a="http://schemas.openxmlformats.org/drawingml/2006/main">
+            <a:pPr algn="l"/>
+            <a:r>
+              <a:rPr lang="en-US" sz="2700" b="1">
+                <a:solidFill>
+                  <a:srgbClr val="FFFFFF"/>
+                </a:solidFill>
+              </a:rPr>
+              <a:t>Product architecture</a:t>
+            </a:r>
+          </a:p>
+        </p:txBody>
+      </p:sp>
+      <p:sp>
+        <p:nvSpPr>
+          <p:cNvPr id="100052" name="TextBox 2"/>
+          <p:cNvSpPr/>
+          <p:nvPr/>
+        </p:nvSpPr>
+        <p:spPr>
+          <a:xfrm xmlns:a="http://schemas.openxmlformats.org/drawingml/2006/main">
+            <a:off x="594360" y="987552"/>
+            <a:ext cx="914400" cy="73152"/>
+          </a:xfrm>
+          <a:prstGeom xmlns:a="http://schemas.openxmlformats.org/drawingml/2006/main" prst="rect">
+            <a:avLst/>
+          </a:prstGeom>
+          <a:solidFill xmlns:a="http://schemas.openxmlformats.org/drawingml/2006/main">
+            <a:srgbClr val="F97316"/>
+          </a:solidFill>
+          <a:ln xmlns:a="http://schemas.openxmlformats.org/drawingml/2006/main">
+            <a:noFill/>
+          </a:ln>
+        </p:spPr>
+        <p:txBody>
+          <a:bodyPr xmlns:a="http://schemas.openxmlformats.org/drawingml/2006/main" lIns="73152" tIns="73152" rIns="73152" bIns="73152"/>
+          <a:lstStyle xmlns:a="http://schemas.openxmlformats.org/drawingml/2006/main"/>
+          <a:p xmlns:a="http://schemas.openxmlformats.org/drawingml/2006/main">
+            <a:pPr algn="l"/>
+            <a:endParaRPr lang="en-US" sz="800" b="0">
+              <a:solidFill>
+                <a:srgbClr val="F97316"/>
+              </a:solidFill>
+            </a:endParaRPr>
+          </a:p>
+        </p:txBody>
+      </p:sp>
+      <p:sp>
+        <p:nvSpPr>
+          <p:cNvPr id="100053" name="TextBox 3"/>
+          <p:cNvSpPr/>
+          <p:nvPr/>
+        </p:nvSpPr>
+        <p:spPr>
+          <a:xfrm xmlns:a="http://schemas.openxmlformats.org/drawingml/2006/main">
+            <a:off x="594360" y="1115568"/>
+            <a:ext cx="7315200" cy="347472"/>
+          </a:xfrm>
+          <a:prstGeom xmlns:a="http://schemas.openxmlformats.org/drawingml/2006/main" prst="rect">
+            <a:avLst/>
+          </a:prstGeom>
+          <a:noFill xmlns:a="http://schemas.openxmlformats.org/drawingml/2006/main"/>
+          <a:ln xmlns:a="http://schemas.openxmlformats.org/drawingml/2006/main">
+            <a:noFill/>
+          </a:ln>
+        </p:spPr>
+        <p:txBody>
+          <a:bodyPr xmlns:a="http://schemas.openxmlformats.org/drawingml/2006/main" lIns="73152" tIns="73152" rIns="73152" bIns="73152"/>
+          <a:lstStyle xmlns:a="http://schemas.openxmlformats.org/drawingml/2006/main"/>
+          <a:p xmlns:a="http://schemas.openxmlformats.org/drawingml/2006/main">
+            <a:pPr algn="l"/>
+            <a:r>
+              <a:rPr lang="en-US" sz="1300" b="0">
+                <a:solidFill>
+                  <a:srgbClr val="A8B3C7"/>
+                </a:solidFill>
+              </a:rPr>
+              <a:t>Clear boundaries keep the experience helpful, secure and testable.</a:t>
+            </a:r>
+          </a:p>
+        </p:txBody>
+      </p:sp>
+      <p:sp>
+        <p:nvSpPr>
+          <p:cNvPr id="100054" name="TextBox 4"/>
+          <p:cNvSpPr/>
+          <p:nvPr/>
+        </p:nvSpPr>
+        <p:spPr>
+          <a:xfrm xmlns:a="http://schemas.openxmlformats.org/drawingml/2006/main">
+            <a:off x="640080" y="1554480"/>
+            <a:ext cx="2240280" cy="1508760"/>
+          </a:xfrm>
+          <a:prstGeom xmlns:a="http://schemas.openxmlformats.org/drawingml/2006/main" prst="roundRect">
+            <a:avLst/>
+          </a:prstGeom>
+          <a:solidFill xmlns:a="http://schemas.openxmlformats.org/drawingml/2006/main">
+            <a:srgbClr val="162238"/>
+          </a:solidFill>
+          <a:ln xmlns:a="http://schemas.openxmlformats.org/drawingml/2006/main">
+            <a:noFill/>
+          </a:ln>
+        </p:spPr>
+        <p:txBody>
+          <a:bodyPr xmlns:a="http://schemas.openxmlformats.org/drawingml/2006/main" lIns="73152" tIns="73152" rIns="73152" bIns="73152"/>
+          <a:lstStyle xmlns:a="http://schemas.openxmlformats.org/drawingml/2006/main"/>
+          <a:p xmlns:a="http://schemas.openxmlformats.org/drawingml/2006/main">
+            <a:pPr algn="l"/>
+            <a:endParaRPr lang="en-US" sz="1000" b="0">
+              <a:solidFill>
+                <a:srgbClr val="FFFFFF"/>
+              </a:solidFill>
+            </a:endParaRPr>
+          </a:p>
+        </p:txBody>
+      </p:sp>
+      <p:sp>
+        <p:nvSpPr>
+          <p:cNvPr id="100055" name="TextBox 5"/>
+          <p:cNvSpPr/>
+          <p:nvPr/>
+        </p:nvSpPr>
+        <p:spPr>
+          <a:xfrm xmlns:a="http://schemas.openxmlformats.org/drawingml/2006/main">
+            <a:off x="640080" y="1700784"/>
+            <a:ext cx="2240280" cy="292608"/>
+          </a:xfrm>
+          <a:prstGeom xmlns:a="http://schemas.openxmlformats.org/drawingml/2006/main" prst="rect">
+            <a:avLst/>
+          </a:prstGeom>
+          <a:noFill xmlns:a="http://schemas.openxmlformats.org/drawingml/2006/main"/>
+          <a:ln xmlns:a="http://schemas.openxmlformats.org/drawingml/2006/main">
+            <a:noFill/>
+          </a:ln>
+        </p:spPr>
+        <p:txBody>
+          <a:bodyPr xmlns:a="http://schemas.openxmlformats.org/drawingml/2006/main" lIns="73152" tIns="73152" rIns="73152" bIns="73152"/>
+          <a:lstStyle xmlns:a="http://schemas.openxmlformats.org/drawingml/2006/main"/>
+          <a:p xmlns:a="http://schemas.openxmlformats.org/drawingml/2006/main">
+            <a:pPr algn="l"/>
+            <a:r>
+              <a:rPr lang="en-US" sz="1600" b="1">
+                <a:solidFill>
+                  <a:srgbClr val="145DA0"/>
+                </a:solidFill>
+              </a:rPr>
+              <a:t>Mobile app</a:t>
+            </a:r>
+          </a:p>
+        </p:txBody>
+      </p:sp>
+      <p:sp>
+        <p:nvSpPr>
+          <p:cNvPr id="100056" name="TextBox 6"/>
+          <p:cNvSpPr/>
+          <p:nvPr/>
+        </p:nvSpPr>
+        <p:spPr>
+          <a:xfrm xmlns:a="http://schemas.openxmlformats.org/drawingml/2006/main">
+            <a:off x="640080" y="2039112"/>
+            <a:ext cx="2240280" cy="941832"/>
+          </a:xfrm>
+          <a:prstGeom xmlns:a="http://schemas.openxmlformats.org/drawingml/2006/main" prst="rect">
+            <a:avLst/>
+          </a:prstGeom>
+          <a:noFill xmlns:a="http://schemas.openxmlformats.org/drawingml/2006/main"/>
+          <a:ln xmlns:a="http://schemas.openxmlformats.org/drawingml/2006/main">
+            <a:noFill/>
+          </a:ln>
+        </p:spPr>
+        <p:txBody>
+          <a:bodyPr xmlns:a="http://schemas.openxmlformats.org/drawingml/2006/main" lIns="73152" tIns="73152" rIns="73152" bIns="73152"/>
+          <a:lstStyle xmlns:a="http://schemas.openxmlformats.org/drawingml/2006/main"/>
+          <a:p xmlns:a="http://schemas.openxmlformats.org/drawingml/2006/main">
+            <a:pPr algn="l"/>
+            <a:r>
+              <a:rPr lang="en-US" sz="1200" b="0">
+                <a:solidFill>
+                  <a:srgbClr val="D7DFEC"/>
+                </a:solidFill>
+              </a:rPr>
+              <a:t>Expo / React Native UI for assistant, profile and applications.</a:t>
+            </a:r>
+          </a:p>
+        </p:txBody>
+      </p:sp>
+      <p:sp>
+        <p:nvSpPr>
+          <p:cNvPr id="100057" name="TextBox 7"/>
+          <p:cNvSpPr/>
+          <p:nvPr/>
+        </p:nvSpPr>
+        <p:spPr>
+          <a:xfrm xmlns:a="http://schemas.openxmlformats.org/drawingml/2006/main">
+            <a:off x="2990088" y="2029968"/>
+            <a:ext cx="384048" cy="384048"/>
+          </a:xfrm>
+          <a:prstGeom xmlns:a="http://schemas.openxmlformats.org/drawingml/2006/main" prst="rightArrow">
+            <a:avLst/>
+          </a:prstGeom>
+          <a:noFill xmlns:a="http://schemas.openxmlformats.org/drawingml/2006/main"/>
+          <a:ln xmlns:a="http://schemas.openxmlformats.org/drawingml/2006/main">
+            <a:noFill/>
+          </a:ln>
+        </p:spPr>
+        <p:txBody>
+          <a:bodyPr xmlns:a="http://schemas.openxmlformats.org/drawingml/2006/main" lIns="73152" tIns="73152" rIns="73152" bIns="73152"/>
+          <a:lstStyle xmlns:a="http://schemas.openxmlformats.org/drawingml/2006/main"/>
+          <a:p xmlns:a="http://schemas.openxmlformats.org/drawingml/2006/main">
+            <a:pPr algn="ctr"/>
+            <a:r>
+              <a:rPr lang="en-US" sz="2200" b="1">
+                <a:solidFill>
+                  <a:srgbClr val="F97316"/>
+                </a:solidFill>
+              </a:rPr>
+              <a:t>&gt;</a:t>
+            </a:r>
+          </a:p>
+        </p:txBody>
+      </p:sp>
+      <p:sp>
+        <p:nvSpPr>
+          <p:cNvPr id="100058" name="TextBox 8"/>
+          <p:cNvSpPr/>
+          <p:nvPr/>
+        </p:nvSpPr>
+        <p:spPr>
+          <a:xfrm xmlns:a="http://schemas.openxmlformats.org/drawingml/2006/main">
+            <a:off x="3429000" y="1554480"/>
+            <a:ext cx="2240280" cy="1508760"/>
+          </a:xfrm>
+          <a:prstGeom xmlns:a="http://schemas.openxmlformats.org/drawingml/2006/main" prst="roundRect">
+            <a:avLst/>
+          </a:prstGeom>
+          <a:solidFill xmlns:a="http://schemas.openxmlformats.org/drawingml/2006/main">
+            <a:srgbClr val="162238"/>
+          </a:solidFill>
+          <a:ln xmlns:a="http://schemas.openxmlformats.org/drawingml/2006/main">
+            <a:noFill/>
+          </a:ln>
+        </p:spPr>
+        <p:txBody>
+          <a:bodyPr xmlns:a="http://schemas.openxmlformats.org/drawingml/2006/main" lIns="73152" tIns="73152" rIns="73152" bIns="73152"/>
+          <a:lstStyle xmlns:a="http://schemas.openxmlformats.org/drawingml/2006/main"/>
+          <a:p xmlns:a="http://schemas.openxmlformats.org/drawingml/2006/main">
+            <a:pPr algn="l"/>
+            <a:endParaRPr lang="en-US" sz="1000" b="0">
+              <a:solidFill>
+                <a:srgbClr val="FFFFFF"/>
+              </a:solidFill>
+            </a:endParaRPr>
+          </a:p>
+        </p:txBody>
+      </p:sp>
+      <p:sp>
+        <p:nvSpPr>
+          <p:cNvPr id="100059" name="TextBox 9"/>
+          <p:cNvSpPr/>
+          <p:nvPr/>
+        </p:nvSpPr>
+        <p:spPr>
+          <a:xfrm xmlns:a="http://schemas.openxmlformats.org/drawingml/2006/main">
+            <a:off x="3429000" y="1700784"/>
+            <a:ext cx="2240280" cy="292608"/>
+          </a:xfrm>
+          <a:prstGeom xmlns:a="http://schemas.openxmlformats.org/drawingml/2006/main" prst="rect">
+            <a:avLst/>
+          </a:prstGeom>
+          <a:noFill xmlns:a="http://schemas.openxmlformats.org/drawingml/2006/main"/>
+          <a:ln xmlns:a="http://schemas.openxmlformats.org/drawingml/2006/main">
+            <a:noFill/>
+          </a:ln>
+        </p:spPr>
+        <p:txBody>
+          <a:bodyPr xmlns:a="http://schemas.openxmlformats.org/drawingml/2006/main" lIns="73152" tIns="73152" rIns="73152" bIns="73152"/>
+          <a:lstStyle xmlns:a="http://schemas.openxmlformats.org/drawingml/2006/main"/>
+          <a:p xmlns:a="http://schemas.openxmlformats.org/drawingml/2006/main">
+            <a:pPr algn="l"/>
+            <a:r>
+              <a:rPr lang="en-US" sz="1600" b="1">
+                <a:solidFill>
+                  <a:srgbClr val="F97316"/>
+                </a:solidFill>
+              </a:rPr>
+              <a:t>FastAPI</a:t>
+            </a:r>
+          </a:p>
+        </p:txBody>
+      </p:sp>
+      <p:sp>
+        <p:nvSpPr>
+          <p:cNvPr id="100060" name="TextBox 10"/>
+          <p:cNvSpPr/>
+          <p:nvPr/>
+        </p:nvSpPr>
+        <p:spPr>
+          <a:xfrm xmlns:a="http://schemas.openxmlformats.org/drawingml/2006/main">
+            <a:off x="3429000" y="2039112"/>
+            <a:ext cx="2240280" cy="941832"/>
+          </a:xfrm>
+          <a:prstGeom xmlns:a="http://schemas.openxmlformats.org/drawingml/2006/main" prst="rect">
+            <a:avLst/>
+          </a:prstGeom>
+          <a:noFill xmlns:a="http://schemas.openxmlformats.org/drawingml/2006/main"/>
+          <a:ln xmlns:a="http://schemas.openxmlformats.org/drawingml/2006/main">
+            <a:noFill/>
+          </a:ln>
+        </p:spPr>
+        <p:txBody>
+          <a:bodyPr xmlns:a="http://schemas.openxmlformats.org/drawingml/2006/main" lIns="73152" tIns="73152" rIns="73152" bIns="73152"/>
+          <a:lstStyle xmlns:a="http://schemas.openxmlformats.org/drawingml/2006/main"/>
+          <a:p xmlns:a="http://schemas.openxmlformats.org/drawingml/2006/main">
+            <a:pPr algn="l"/>
+            <a:r>
+              <a:rPr lang="en-US" sz="1200" b="0">
+                <a:solidFill>
+                  <a:srgbClr val="D7DFEC"/>
+                </a:solidFill>
+              </a:rPr>
+              <a:t>Authenticated REST contract under /api/v1.</a:t>
+            </a:r>
+          </a:p>
+        </p:txBody>
+      </p:sp>
+      <p:sp>
+        <p:nvSpPr>
+          <p:cNvPr id="100061" name="TextBox 11"/>
+          <p:cNvSpPr/>
+          <p:nvPr/>
+        </p:nvSpPr>
+        <p:spPr>
+          <a:xfrm xmlns:a="http://schemas.openxmlformats.org/drawingml/2006/main">
+            <a:off x="5779008" y="2029968"/>
+            <a:ext cx="384048" cy="384048"/>
+          </a:xfrm>
+          <a:prstGeom xmlns:a="http://schemas.openxmlformats.org/drawingml/2006/main" prst="rightArrow">
+            <a:avLst/>
+          </a:prstGeom>
+          <a:noFill xmlns:a="http://schemas.openxmlformats.org/drawingml/2006/main"/>
+          <a:ln xmlns:a="http://schemas.openxmlformats.org/drawingml/2006/main">
+            <a:noFill/>
+          </a:ln>
+        </p:spPr>
+        <p:txBody>
+          <a:bodyPr xmlns:a="http://schemas.openxmlformats.org/drawingml/2006/main" lIns="73152" tIns="73152" rIns="73152" bIns="73152"/>
+          <a:lstStyle xmlns:a="http://schemas.openxmlformats.org/drawingml/2006/main"/>
+          <a:p xmlns:a="http://schemas.openxmlformats.org/drawingml/2006/main">
+            <a:pPr algn="ctr"/>
+            <a:r>
+              <a:rPr lang="en-US" sz="2200" b="1">
+                <a:solidFill>
+                  <a:srgbClr val="F97316"/>
+                </a:solidFill>
+              </a:rPr>
+              <a:t>&gt;</a:t>
+            </a:r>
+          </a:p>
+        </p:txBody>
+      </p:sp>
+      <p:sp>
+        <p:nvSpPr>
+          <p:cNvPr id="100062" name="TextBox 12"/>
+          <p:cNvSpPr/>
+          <p:nvPr/>
+        </p:nvSpPr>
+        <p:spPr>
+          <a:xfrm xmlns:a="http://schemas.openxmlformats.org/drawingml/2006/main">
+            <a:off x="6217920" y="1554480"/>
+            <a:ext cx="2240280" cy="1508760"/>
+          </a:xfrm>
+          <a:prstGeom xmlns:a="http://schemas.openxmlformats.org/drawingml/2006/main" prst="roundRect">
+            <a:avLst/>
+          </a:prstGeom>
+          <a:solidFill xmlns:a="http://schemas.openxmlformats.org/drawingml/2006/main">
+            <a:srgbClr val="162238"/>
+          </a:solidFill>
+          <a:ln xmlns:a="http://schemas.openxmlformats.org/drawingml/2006/main">
+            <a:noFill/>
+          </a:ln>
+        </p:spPr>
+        <p:txBody>
+          <a:bodyPr xmlns:a="http://schemas.openxmlformats.org/drawingml/2006/main" lIns="73152" tIns="73152" rIns="73152" bIns="73152"/>
+          <a:lstStyle xmlns:a="http://schemas.openxmlformats.org/drawingml/2006/main"/>
+          <a:p xmlns:a="http://schemas.openxmlformats.org/drawingml/2006/main">
+            <a:pPr algn="l"/>
+            <a:endParaRPr lang="en-US" sz="1000" b="0">
+              <a:solidFill>
+                <a:srgbClr val="FFFFFF"/>
+              </a:solidFill>
+            </a:endParaRPr>
+          </a:p>
+        </p:txBody>
+      </p:sp>
+      <p:sp>
+        <p:nvSpPr>
+          <p:cNvPr id="100063" name="TextBox 13"/>
+          <p:cNvSpPr/>
+          <p:nvPr/>
+        </p:nvSpPr>
+        <p:spPr>
+          <a:xfrm xmlns:a="http://schemas.openxmlformats.org/drawingml/2006/main">
+            <a:off x="6217920" y="1700784"/>
+            <a:ext cx="2240280" cy="292608"/>
+          </a:xfrm>
+          <a:prstGeom xmlns:a="http://schemas.openxmlformats.org/drawingml/2006/main" prst="rect">
+            <a:avLst/>
+          </a:prstGeom>
+          <a:noFill xmlns:a="http://schemas.openxmlformats.org/drawingml/2006/main"/>
+          <a:ln xmlns:a="http://schemas.openxmlformats.org/drawingml/2006/main">
+            <a:noFill/>
+          </a:ln>
+        </p:spPr>
+        <p:txBody>
+          <a:bodyPr xmlns:a="http://schemas.openxmlformats.org/drawingml/2006/main" lIns="73152" tIns="73152" rIns="73152" bIns="73152"/>
+          <a:lstStyle xmlns:a="http://schemas.openxmlformats.org/drawingml/2006/main"/>
+          <a:p xmlns:a="http://schemas.openxmlformats.org/drawingml/2006/main">
+            <a:pPr algn="l"/>
+            <a:r>
+              <a:rPr lang="en-US" sz="1600" b="1">
+                <a:solidFill>
+                  <a:srgbClr val="138A5E"/>
+                </a:solidFill>
+              </a:rPr>
+              <a:t>Decision layer</a:t>
+            </a:r>
+          </a:p>
+        </p:txBody>
+      </p:sp>
+      <p:sp>
+        <p:nvSpPr>
+          <p:cNvPr id="100064" name="TextBox 14"/>
+          <p:cNvSpPr/>
+          <p:nvPr/>
+        </p:nvSpPr>
+        <p:spPr>
+          <a:xfrm xmlns:a="http://schemas.openxmlformats.org/drawingml/2006/main">
+            <a:off x="6217920" y="2039112"/>
+            <a:ext cx="2240280" cy="941832"/>
+          </a:xfrm>
+          <a:prstGeom xmlns:a="http://schemas.openxmlformats.org/drawingml/2006/main" prst="rect">
+            <a:avLst/>
+          </a:prstGeom>
+          <a:noFill xmlns:a="http://schemas.openxmlformats.org/drawingml/2006/main"/>
+          <a:ln xmlns:a="http://schemas.openxmlformats.org/drawingml/2006/main">
+            <a:noFill/>
+          </a:ln>
+        </p:spPr>
+        <p:txBody>
+          <a:bodyPr xmlns:a="http://schemas.openxmlformats.org/drawingml/2006/main" lIns="73152" tIns="73152" rIns="73152" bIns="73152"/>
+          <a:lstStyle xmlns:a="http://schemas.openxmlformats.org/drawingml/2006/main"/>
+          <a:p xmlns:a="http://schemas.openxmlformats.org/drawingml/2006/main">
+            <a:pPr algn="l"/>
+            <a:r>
+              <a:rPr lang="en-US" sz="1200" b="0">
+                <a:solidFill>
+                  <a:srgbClr val="D7DFEC"/>
+                </a:solidFill>
+              </a:rPr>
+              <a:t>Verified schemes, requirements, rules and recommendations.</a:t>
+            </a:r>
+          </a:p>
+        </p:txBody>
+      </p:sp>
+      <p:sp>
+        <p:nvSpPr>
+          <p:cNvPr id="100065" name="TextBox 15"/>
+          <p:cNvSpPr/>
+          <p:nvPr/>
+        </p:nvSpPr>
+        <p:spPr>
+          <a:xfrm xmlns:a="http://schemas.openxmlformats.org/drawingml/2006/main">
+            <a:off x="1051560" y="3977640"/>
+            <a:ext cx="2971800" cy="1143000"/>
+          </a:xfrm>
+          <a:prstGeom xmlns:a="http://schemas.openxmlformats.org/drawingml/2006/main" prst="roundRect">
+            <a:avLst/>
+          </a:prstGeom>
+          <a:solidFill xmlns:a="http://schemas.openxmlformats.org/drawingml/2006/main">
+            <a:srgbClr val="162238"/>
+          </a:solidFill>
+          <a:ln xmlns:a="http://schemas.openxmlformats.org/drawingml/2006/main">
+            <a:noFill/>
+          </a:ln>
+        </p:spPr>
+        <p:txBody>
+          <a:bodyPr xmlns:a="http://schemas.openxmlformats.org/drawingml/2006/main" lIns="73152" tIns="73152" rIns="73152" bIns="73152"/>
+          <a:lstStyle xmlns:a="http://schemas.openxmlformats.org/drawingml/2006/main"/>
+          <a:p xmlns:a="http://schemas.openxmlformats.org/drawingml/2006/main">
+            <a:pPr algn="l"/>
+            <a:endParaRPr lang="en-US" sz="1000" b="0">
+              <a:solidFill>
+                <a:srgbClr val="FFFFFF"/>
+              </a:solidFill>
+            </a:endParaRPr>
+          </a:p>
+        </p:txBody>
+      </p:sp>
+      <p:sp>
+        <p:nvSpPr>
+          <p:cNvPr id="100066" name="TextBox 16"/>
+          <p:cNvSpPr/>
+          <p:nvPr/>
+        </p:nvSpPr>
+        <p:spPr>
+          <a:xfrm xmlns:a="http://schemas.openxmlformats.org/drawingml/2006/main">
+            <a:off x="1051560" y="4123944"/>
+            <a:ext cx="2971800" cy="292608"/>
+          </a:xfrm>
+          <a:prstGeom xmlns:a="http://schemas.openxmlformats.org/drawingml/2006/main" prst="rect">
+            <a:avLst/>
+          </a:prstGeom>
+          <a:noFill xmlns:a="http://schemas.openxmlformats.org/drawingml/2006/main"/>
+          <a:ln xmlns:a="http://schemas.openxmlformats.org/drawingml/2006/main">
+            <a:noFill/>
+          </a:ln>
+        </p:spPr>
+        <p:txBody>
+          <a:bodyPr xmlns:a="http://schemas.openxmlformats.org/drawingml/2006/main" lIns="73152" tIns="73152" rIns="73152" bIns="73152"/>
+          <a:lstStyle xmlns:a="http://schemas.openxmlformats.org/drawingml/2006/main"/>
+          <a:p xmlns:a="http://schemas.openxmlformats.org/drawingml/2006/main">
+            <a:pPr algn="l"/>
+            <a:r>
+              <a:rPr lang="en-US" sz="1600" b="1">
+                <a:solidFill>
+                  <a:srgbClr val="7C3AED"/>
+                </a:solidFill>
+              </a:rPr>
+              <a:t>Supabase Auth + Postgres + RLS</a:t>
+            </a:r>
+          </a:p>
+        </p:txBody>
+      </p:sp>
+      <p:sp>
+        <p:nvSpPr>
+          <p:cNvPr id="100067" name="TextBox 17"/>
+          <p:cNvSpPr/>
+          <p:nvPr/>
+        </p:nvSpPr>
+        <p:spPr>
+          <a:xfrm xmlns:a="http://schemas.openxmlformats.org/drawingml/2006/main">
+            <a:off x="1051560" y="4462272"/>
+            <a:ext cx="2971800" cy="576072"/>
+          </a:xfrm>
+          <a:prstGeom xmlns:a="http://schemas.openxmlformats.org/drawingml/2006/main" prst="rect">
+            <a:avLst/>
+          </a:prstGeom>
+          <a:noFill xmlns:a="http://schemas.openxmlformats.org/drawingml/2006/main"/>
+          <a:ln xmlns:a="http://schemas.openxmlformats.org/drawingml/2006/main">
+            <a:noFill/>
+          </a:ln>
+        </p:spPr>
+        <p:txBody>
+          <a:bodyPr xmlns:a="http://schemas.openxmlformats.org/drawingml/2006/main" lIns="73152" tIns="73152" rIns="73152" bIns="73152"/>
+          <a:lstStyle xmlns:a="http://schemas.openxmlformats.org/drawingml/2006/main"/>
+          <a:p xmlns:a="http://schemas.openxmlformats.org/drawingml/2006/main">
+            <a:pPr algn="l"/>
+            <a:r>
+              <a:rPr lang="en-US" sz="1200" b="0">
+                <a:solidFill>
+                  <a:srgbClr val="D7DFEC"/>
+                </a:solidFill>
+              </a:rPr>
+              <a:t>User-owned profiles, conversations, recommendations, applications and document metadata.</a:t>
+            </a:r>
+          </a:p>
+        </p:txBody>
+      </p:sp>
+      <p:sp>
+        <p:nvSpPr>
+          <p:cNvPr id="100068" name="TextBox 18"/>
+          <p:cNvSpPr/>
+          <p:nvPr/>
+        </p:nvSpPr>
+        <p:spPr>
+          <a:xfrm xmlns:a="http://schemas.openxmlformats.org/drawingml/2006/main">
+            <a:off x="5074920" y="3977640"/>
+            <a:ext cx="2971800" cy="1143000"/>
+          </a:xfrm>
+          <a:prstGeom xmlns:a="http://schemas.openxmlformats.org/drawingml/2006/main" prst="roundRect">
+            <a:avLst/>
+          </a:prstGeom>
+          <a:solidFill xmlns:a="http://schemas.openxmlformats.org/drawingml/2006/main">
+            <a:srgbClr val="162238"/>
+          </a:solidFill>
+          <a:ln xmlns:a="http://schemas.openxmlformats.org/drawingml/2006/main">
+            <a:noFill/>
+          </a:ln>
+        </p:spPr>
+        <p:txBody>
+          <a:bodyPr xmlns:a="http://schemas.openxmlformats.org/drawingml/2006/main" lIns="73152" tIns="73152" rIns="73152" bIns="73152"/>
+          <a:lstStyle xmlns:a="http://schemas.openxmlformats.org/drawingml/2006/main"/>
+          <a:p xmlns:a="http://schemas.openxmlformats.org/drawingml/2006/main">
+            <a:pPr algn="l"/>
+            <a:endParaRPr lang="en-US" sz="1000" b="0">
+              <a:solidFill>
+                <a:srgbClr val="FFFFFF"/>
+              </a:solidFill>
+            </a:endParaRPr>
+          </a:p>
+        </p:txBody>
+      </p:sp>
+      <p:sp>
+        <p:nvSpPr>
+          <p:cNvPr id="100069" name="TextBox 19"/>
+          <p:cNvSpPr/>
+          <p:nvPr/>
+        </p:nvSpPr>
+        <p:spPr>
+          <a:xfrm xmlns:a="http://schemas.openxmlformats.org/drawingml/2006/main">
+            <a:off x="5074920" y="4123944"/>
+            <a:ext cx="2971800" cy="292608"/>
+          </a:xfrm>
+          <a:prstGeom xmlns:a="http://schemas.openxmlformats.org/drawingml/2006/main" prst="rect">
+            <a:avLst/>
+          </a:prstGeom>
+          <a:noFill xmlns:a="http://schemas.openxmlformats.org/drawingml/2006/main"/>
+          <a:ln xmlns:a="http://schemas.openxmlformats.org/drawingml/2006/main">
+            <a:noFill/>
+          </a:ln>
+        </p:spPr>
+        <p:txBody>
+          <a:bodyPr xmlns:a="http://schemas.openxmlformats.org/drawingml/2006/main" lIns="73152" tIns="73152" rIns="73152" bIns="73152"/>
+          <a:lstStyle xmlns:a="http://schemas.openxmlformats.org/drawingml/2006/main"/>
+          <a:p xmlns:a="http://schemas.openxmlformats.org/drawingml/2006/main">
+            <a:pPr algn="l"/>
+            <a:r>
+              <a:rPr lang="en-US" sz="1600" b="1">
+                <a:solidFill>
+                  <a:srgbClr val="F97316"/>
+                </a:solidFill>
+              </a:rPr>
+              <a:t>Explainable response</a:t>
+            </a:r>
+          </a:p>
+        </p:txBody>
+      </p:sp>
+      <p:sp>
+        <p:nvSpPr>
+          <p:cNvPr id="100070" name="TextBox 20"/>
+          <p:cNvSpPr/>
+          <p:nvPr/>
+        </p:nvSpPr>
+        <p:spPr>
+          <a:xfrm xmlns:a="http://schemas.openxmlformats.org/drawingml/2006/main">
+            <a:off x="5074920" y="4462272"/>
+            <a:ext cx="2971800" cy="576072"/>
+          </a:xfrm>
+          <a:prstGeom xmlns:a="http://schemas.openxmlformats.org/drawingml/2006/main" prst="rect">
+            <a:avLst/>
+          </a:prstGeom>
+          <a:noFill xmlns:a="http://schemas.openxmlformats.org/drawingml/2006/main"/>
+          <a:ln xmlns:a="http://schemas.openxmlformats.org/drawingml/2006/main">
+            <a:noFill/>
+          </a:ln>
+        </p:spPr>
+        <p:txBody>
+          <a:bodyPr xmlns:a="http://schemas.openxmlformats.org/drawingml/2006/main" lIns="73152" tIns="73152" rIns="73152" bIns="73152"/>
+          <a:lstStyle xmlns:a="http://schemas.openxmlformats.org/drawingml/2006/main"/>
+          <a:p xmlns:a="http://schemas.openxmlformats.org/drawingml/2006/main">
+            <a:pPr algn="l"/>
+            <a:r>
+              <a:rPr lang="en-US" sz="1200" b="0">
+                <a:solidFill>
+                  <a:srgbClr val="D7DFEC"/>
+                </a:solidFill>
+              </a:rPr>
+              <a:t>Score, reasons, eligibility status and missing information return to the user.</a:t>
+            </a:r>
+          </a:p>
+        </p:txBody>
+      </p:sp>
+    </p:spTree>
+  </p:cSld>
+  <p:transition>
+    <p:fade/>
+  </p:transition>
+</p:sld>
+</file>
+
+<file path=ppt/slides/slide6.xml><?xml version="1.0" encoding="utf-8"?>
+<p:sld xmlns:p="http://schemas.openxmlformats.org/presentationml/2006/main">
+  <p:cSld>
+    <p:bg>
+      <p:bgPr>
+        <a:solidFill xmlns:a="http://schemas.openxmlformats.org/drawingml/2006/main">
+          <a:srgbClr val="0B1220"/>
+        </a:solidFill>
+      </p:bgPr>
+    </p:bg>
+    <p:spTree>
+      <p:nvGrpSpPr>
+        <p:cNvPr id="1" name=""/>
+        <p:cNvGrpSpPr/>
+        <p:nvPr/>
+      </p:nvGrpSpPr>
+      <p:grpSpPr/>
+      <p:sp>
+        <p:nvSpPr>
+          <p:cNvPr id="100071" name="TextBox 1"/>
+          <p:cNvSpPr/>
+          <p:nvPr/>
+        </p:nvSpPr>
+        <p:spPr>
+          <a:xfrm xmlns:a="http://schemas.openxmlformats.org/drawingml/2006/main">
+            <a:off x="594360" y="411480"/>
+            <a:ext cx="7406640" cy="502920"/>
+          </a:xfrm>
+          <a:prstGeom xmlns:a="http://schemas.openxmlformats.org/drawingml/2006/main" prst="rect">
+            <a:avLst/>
+          </a:prstGeom>
+          <a:noFill xmlns:a="http://schemas.openxmlformats.org/drawingml/2006/main"/>
+          <a:ln xmlns:a="http://schemas.openxmlformats.org/drawingml/2006/main">
+            <a:noFill/>
+          </a:ln>
+        </p:spPr>
+        <p:txBody>
+          <a:bodyPr xmlns:a="http://schemas.openxmlformats.org/drawingml/2006/main" lIns="73152" tIns="73152" rIns="73152" bIns="73152"/>
+          <a:lstStyle xmlns:a="http://schemas.openxmlformats.org/drawingml/2006/main"/>
+          <a:p xmlns:a="http://schemas.openxmlformats.org/drawingml/2006/main">
+            <a:pPr algn="l"/>
+            <a:r>
+              <a:rPr lang="en-US" sz="2700" b="1">
+                <a:solidFill>
+                  <a:srgbClr val="FFFFFF"/>
+                </a:solidFill>
+              </a:rPr>
+              <a:t>What makes it different</a:t>
+            </a:r>
+          </a:p>
+        </p:txBody>
+      </p:sp>
+      <p:sp>
+        <p:nvSpPr>
+          <p:cNvPr id="100072" name="TextBox 2"/>
+          <p:cNvSpPr/>
+          <p:nvPr/>
+        </p:nvSpPr>
+        <p:spPr>
+          <a:xfrm xmlns:a="http://schemas.openxmlformats.org/drawingml/2006/main">
+            <a:off x="594360" y="987552"/>
+            <a:ext cx="914400" cy="73152"/>
+          </a:xfrm>
+          <a:prstGeom xmlns:a="http://schemas.openxmlformats.org/drawingml/2006/main" prst="rect">
+            <a:avLst/>
+          </a:prstGeom>
+          <a:solidFill xmlns:a="http://schemas.openxmlformats.org/drawingml/2006/main">
+            <a:srgbClr val="F97316"/>
+          </a:solidFill>
+          <a:ln xmlns:a="http://schemas.openxmlformats.org/drawingml/2006/main">
+            <a:noFill/>
+          </a:ln>
+        </p:spPr>
+        <p:txBody>
+          <a:bodyPr xmlns:a="http://schemas.openxmlformats.org/drawingml/2006/main" lIns="73152" tIns="73152" rIns="73152" bIns="73152"/>
+          <a:lstStyle xmlns:a="http://schemas.openxmlformats.org/drawingml/2006/main"/>
+          <a:p xmlns:a="http://schemas.openxmlformats.org/drawingml/2006/main">
+            <a:pPr algn="l"/>
+            <a:endParaRPr lang="en-US" sz="800" b="0">
+              <a:solidFill>
+                <a:srgbClr val="F97316"/>
+              </a:solidFill>
+            </a:endParaRPr>
+          </a:p>
+        </p:txBody>
+      </p:sp>
+      <p:sp>
+        <p:nvSpPr>
+          <p:cNvPr id="100073" name="TextBox 3"/>
+          <p:cNvSpPr/>
+          <p:nvPr/>
+        </p:nvSpPr>
+        <p:spPr>
+          <a:xfrm xmlns:a="http://schemas.openxmlformats.org/drawingml/2006/main">
+            <a:off x="594360" y="1115568"/>
+            <a:ext cx="7315200" cy="347472"/>
+          </a:xfrm>
+          <a:prstGeom xmlns:a="http://schemas.openxmlformats.org/drawingml/2006/main" prst="rect">
+            <a:avLst/>
+          </a:prstGeom>
+          <a:noFill xmlns:a="http://schemas.openxmlformats.org/drawingml/2006/main"/>
+          <a:ln xmlns:a="http://schemas.openxmlformats.org/drawingml/2006/main">
+            <a:noFill/>
+          </a:ln>
+        </p:spPr>
+        <p:txBody>
+          <a:bodyPr xmlns:a="http://schemas.openxmlformats.org/drawingml/2006/main" lIns="73152" tIns="73152" rIns="73152" bIns="73152"/>
+          <a:lstStyle xmlns:a="http://schemas.openxmlformats.org/drawingml/2006/main"/>
+          <a:p xmlns:a="http://schemas.openxmlformats.org/drawingml/2006/main">
+            <a:pPr algn="l"/>
+            <a:r>
+              <a:rPr lang="en-US" sz="1300" b="0">
+                <a:solidFill>
+                  <a:srgbClr val="A8B3C7"/>
+                </a:solidFill>
+              </a:rPr>
+              <a:t>Designed around trust, inclusion and action.</a:t>
+            </a:r>
+          </a:p>
+        </p:txBody>
+      </p:sp>
+      <p:sp>
+        <p:nvSpPr>
+          <p:cNvPr id="100074" name="TextBox 4"/>
+          <p:cNvSpPr/>
+          <p:nvPr/>
+        </p:nvSpPr>
+        <p:spPr>
+          <a:xfrm xmlns:a="http://schemas.openxmlformats.org/drawingml/2006/main">
+            <a:off x="640080" y="1554480"/>
+            <a:ext cx="3474720" cy="1234440"/>
+          </a:xfrm>
+          <a:prstGeom xmlns:a="http://schemas.openxmlformats.org/drawingml/2006/main" prst="roundRect">
+            <a:avLst/>
+          </a:prstGeom>
+          <a:solidFill xmlns:a="http://schemas.openxmlformats.org/drawingml/2006/main">
+            <a:srgbClr val="162238"/>
+          </a:solidFill>
+          <a:ln xmlns:a="http://schemas.openxmlformats.org/drawingml/2006/main">
+            <a:noFill/>
+          </a:ln>
+        </p:spPr>
+        <p:txBody>
+          <a:bodyPr xmlns:a="http://schemas.openxmlformats.org/drawingml/2006/main" lIns="73152" tIns="73152" rIns="73152" bIns="73152"/>
+          <a:lstStyle xmlns:a="http://schemas.openxmlformats.org/drawingml/2006/main"/>
+          <a:p xmlns:a="http://schemas.openxmlformats.org/drawingml/2006/main">
+            <a:pPr algn="l"/>
+            <a:endParaRPr lang="en-US" sz="1000" b="0">
+              <a:solidFill>
+                <a:srgbClr val="FFFFFF"/>
+              </a:solidFill>
+            </a:endParaRPr>
+          </a:p>
+        </p:txBody>
+      </p:sp>
+      <p:sp>
+        <p:nvSpPr>
+          <p:cNvPr id="100075" name="TextBox 5"/>
+          <p:cNvSpPr/>
+          <p:nvPr/>
+        </p:nvSpPr>
+        <p:spPr>
+          <a:xfrm xmlns:a="http://schemas.openxmlformats.org/drawingml/2006/main">
+            <a:off x="640080" y="1700784"/>
+            <a:ext cx="3474720" cy="292608"/>
+          </a:xfrm>
+          <a:prstGeom xmlns:a="http://schemas.openxmlformats.org/drawingml/2006/main" prst="rect">
+            <a:avLst/>
+          </a:prstGeom>
+          <a:noFill xmlns:a="http://schemas.openxmlformats.org/drawingml/2006/main"/>
+          <a:ln xmlns:a="http://schemas.openxmlformats.org/drawingml/2006/main">
+            <a:noFill/>
+          </a:ln>
+        </p:spPr>
+        <p:txBody>
+          <a:bodyPr xmlns:a="http://schemas.openxmlformats.org/drawingml/2006/main" lIns="73152" tIns="73152" rIns="73152" bIns="73152"/>
+          <a:lstStyle xmlns:a="http://schemas.openxmlformats.org/drawingml/2006/main"/>
+          <a:p xmlns:a="http://schemas.openxmlformats.org/drawingml/2006/main">
+            <a:pPr algn="l"/>
+            <a:r>
+              <a:rPr lang="en-US" sz="1600" b="1">
+                <a:solidFill>
+                  <a:srgbClr val="145DA0"/>
+                </a:solidFill>
+              </a:rPr>
+              <a:t>Local-language by default</a:t>
+            </a:r>
+          </a:p>
+        </p:txBody>
+      </p:sp>
+      <p:sp>
+        <p:nvSpPr>
+          <p:cNvPr id="100076" name="TextBox 6"/>
+          <p:cNvSpPr/>
+          <p:nvPr/>
+        </p:nvSpPr>
+        <p:spPr>
+          <a:xfrm xmlns:a="http://schemas.openxmlformats.org/drawingml/2006/main">
+            <a:off x="640080" y="2039112"/>
+            <a:ext cx="3474720" cy="667512"/>
+          </a:xfrm>
+          <a:prstGeom xmlns:a="http://schemas.openxmlformats.org/drawingml/2006/main" prst="rect">
+            <a:avLst/>
+          </a:prstGeom>
+          <a:noFill xmlns:a="http://schemas.openxmlformats.org/drawingml/2006/main"/>
+          <a:ln xmlns:a="http://schemas.openxmlformats.org/drawingml/2006/main">
+            <a:noFill/>
+          </a:ln>
+        </p:spPr>
+        <p:txBody>
+          <a:bodyPr xmlns:a="http://schemas.openxmlformats.org/drawingml/2006/main" lIns="73152" tIns="73152" rIns="73152" bIns="73152"/>
+          <a:lstStyle xmlns:a="http://schemas.openxmlformats.org/drawingml/2006/main"/>
+          <a:p xmlns:a="http://schemas.openxmlformats.org/drawingml/2006/main">
+            <a:pPr algn="l"/>
+            <a:r>
+              <a:rPr lang="en-US" sz="1200" b="0">
+                <a:solidFill>
+                  <a:srgbClr val="D7DFEC"/>
+                </a:solidFill>
+              </a:rPr>
+              <a:t>The user can ask in the language they think in.</a:t>
+            </a:r>
+          </a:p>
+        </p:txBody>
+      </p:sp>
+      <p:sp>
+        <p:nvSpPr>
+          <p:cNvPr id="100077" name="TextBox 7"/>
+          <p:cNvSpPr/>
+          <p:nvPr/>
+        </p:nvSpPr>
+        <p:spPr>
+          <a:xfrm xmlns:a="http://schemas.openxmlformats.org/drawingml/2006/main">
+            <a:off x="4389120" y="1554480"/>
+            <a:ext cx="3474720" cy="1234440"/>
+          </a:xfrm>
+          <a:prstGeom xmlns:a="http://schemas.openxmlformats.org/drawingml/2006/main" prst="roundRect">
+            <a:avLst/>
+          </a:prstGeom>
+          <a:solidFill xmlns:a="http://schemas.openxmlformats.org/drawingml/2006/main">
+            <a:srgbClr val="162238"/>
+          </a:solidFill>
+          <a:ln xmlns:a="http://schemas.openxmlformats.org/drawingml/2006/main">
+            <a:noFill/>
+          </a:ln>
+        </p:spPr>
+        <p:txBody>
+          <a:bodyPr xmlns:a="http://schemas.openxmlformats.org/drawingml/2006/main" lIns="73152" tIns="73152" rIns="73152" bIns="73152"/>
+          <a:lstStyle xmlns:a="http://schemas.openxmlformats.org/drawingml/2006/main"/>
+          <a:p xmlns:a="http://schemas.openxmlformats.org/drawingml/2006/main">
+            <a:pPr algn="l"/>
+            <a:endParaRPr lang="en-US" sz="1000" b="0">
+              <a:solidFill>
+                <a:srgbClr val="FFFFFF"/>
+              </a:solidFill>
+            </a:endParaRPr>
+          </a:p>
+        </p:txBody>
+      </p:sp>
+      <p:sp>
+        <p:nvSpPr>
+          <p:cNvPr id="100078" name="TextBox 8"/>
+          <p:cNvSpPr/>
+          <p:nvPr/>
+        </p:nvSpPr>
+        <p:spPr>
+          <a:xfrm xmlns:a="http://schemas.openxmlformats.org/drawingml/2006/main">
+            <a:off x="4389120" y="1700784"/>
+            <a:ext cx="3474720" cy="292608"/>
+          </a:xfrm>
+          <a:prstGeom xmlns:a="http://schemas.openxmlformats.org/drawingml/2006/main" prst="rect">
+            <a:avLst/>
+          </a:prstGeom>
+          <a:noFill xmlns:a="http://schemas.openxmlformats.org/drawingml/2006/main"/>
+          <a:ln xmlns:a="http://schemas.openxmlformats.org/drawingml/2006/main">
+            <a:noFill/>
+          </a:ln>
+        </p:spPr>
+        <p:txBody>
+          <a:bodyPr xmlns:a="http://schemas.openxmlformats.org/drawingml/2006/main" lIns="73152" tIns="73152" rIns="73152" bIns="73152"/>
+          <a:lstStyle xmlns:a="http://schemas.openxmlformats.org/drawingml/2006/main"/>
+          <a:p xmlns:a="http://schemas.openxmlformats.org/drawingml/2006/main">
+            <a:pPr algn="l"/>
+            <a:r>
+              <a:rPr lang="en-US" sz="1600" b="1">
+                <a:solidFill>
+                  <a:srgbClr val="F97316"/>
+                </a:solidFill>
+              </a:rPr>
+              <a:t>Explainable recommendations</a:t>
+            </a:r>
+          </a:p>
+        </p:txBody>
+      </p:sp>
+      <p:sp>
+        <p:nvSpPr>
+          <p:cNvPr id="100079" name="TextBox 9"/>
+          <p:cNvSpPr/>
+          <p:nvPr/>
+        </p:nvSpPr>
+        <p:spPr>
+          <a:xfrm xmlns:a="http://schemas.openxmlformats.org/drawingml/2006/main">
+            <a:off x="4389120" y="2039112"/>
+            <a:ext cx="3474720" cy="667512"/>
+          </a:xfrm>
+          <a:prstGeom xmlns:a="http://schemas.openxmlformats.org/drawingml/2006/main" prst="rect">
+            <a:avLst/>
+          </a:prstGeom>
+          <a:noFill xmlns:a="http://schemas.openxmlformats.org/drawingml/2006/main"/>
+          <a:ln xmlns:a="http://schemas.openxmlformats.org/drawingml/2006/main">
+            <a:noFill/>
+          </a:ln>
+        </p:spPr>
+        <p:txBody>
+          <a:bodyPr xmlns:a="http://schemas.openxmlformats.org/drawingml/2006/main" lIns="73152" tIns="73152" rIns="73152" bIns="73152"/>
+          <a:lstStyle xmlns:a="http://schemas.openxmlformats.org/drawingml/2006/main"/>
+          <a:p xmlns:a="http://schemas.openxmlformats.org/drawingml/2006/main">
+            <a:pPr algn="l"/>
+            <a:r>
+              <a:rPr lang="en-US" sz="1200" b="0">
+                <a:solidFill>
+                  <a:srgbClr val="D7DFEC"/>
+                </a:solidFill>
+              </a:rPr>
+              <a:t>Every match comes with a reason - and a clear gap to fix.</a:t>
+            </a:r>
+          </a:p>
+        </p:txBody>
+      </p:sp>
+      <p:sp>
+        <p:nvSpPr>
+          <p:cNvPr id="100080" name="TextBox 10"/>
+          <p:cNvSpPr/>
+          <p:nvPr/>
+        </p:nvSpPr>
+        <p:spPr>
+          <a:xfrm xmlns:a="http://schemas.openxmlformats.org/drawingml/2006/main">
+            <a:off x="640080" y="3154680"/>
+            <a:ext cx="3474720" cy="1234440"/>
+          </a:xfrm>
+          <a:prstGeom xmlns:a="http://schemas.openxmlformats.org/drawingml/2006/main" prst="roundRect">
+            <a:avLst/>
+          </a:prstGeom>
+          <a:solidFill xmlns:a="http://schemas.openxmlformats.org/drawingml/2006/main">
+            <a:srgbClr val="162238"/>
+          </a:solidFill>
+          <a:ln xmlns:a="http://schemas.openxmlformats.org/drawingml/2006/main">
+            <a:noFill/>
+          </a:ln>
+        </p:spPr>
+        <p:txBody>
+          <a:bodyPr xmlns:a="http://schemas.openxmlformats.org/drawingml/2006/main" lIns="73152" tIns="73152" rIns="73152" bIns="73152"/>
+          <a:lstStyle xmlns:a="http://schemas.openxmlformats.org/drawingml/2006/main"/>
+          <a:p xmlns:a="http://schemas.openxmlformats.org/drawingml/2006/main">
+            <a:pPr algn="l"/>
+            <a:endParaRPr lang="en-US" sz="1000" b="0">
+              <a:solidFill>
+                <a:srgbClr val="FFFFFF"/>
+              </a:solidFill>
+            </a:endParaRPr>
+          </a:p>
+        </p:txBody>
+      </p:sp>
+      <p:sp>
+        <p:nvSpPr>
+          <p:cNvPr id="100081" name="TextBox 11"/>
+          <p:cNvSpPr/>
+          <p:nvPr/>
+        </p:nvSpPr>
+        <p:spPr>
+          <a:xfrm xmlns:a="http://schemas.openxmlformats.org/drawingml/2006/main">
+            <a:off x="640080" y="3300984"/>
+            <a:ext cx="3474720" cy="292608"/>
+          </a:xfrm>
+          <a:prstGeom xmlns:a="http://schemas.openxmlformats.org/drawingml/2006/main" prst="rect">
+            <a:avLst/>
+          </a:prstGeom>
+          <a:noFill xmlns:a="http://schemas.openxmlformats.org/drawingml/2006/main"/>
+          <a:ln xmlns:a="http://schemas.openxmlformats.org/drawingml/2006/main">
+            <a:noFill/>
+          </a:ln>
+        </p:spPr>
+        <p:txBody>
+          <a:bodyPr xmlns:a="http://schemas.openxmlformats.org/drawingml/2006/main" lIns="73152" tIns="73152" rIns="73152" bIns="73152"/>
+          <a:lstStyle xmlns:a="http://schemas.openxmlformats.org/drawingml/2006/main"/>
+          <a:p xmlns:a="http://schemas.openxmlformats.org/drawingml/2006/main">
+            <a:pPr algn="l"/>
+            <a:r>
+              <a:rPr lang="en-US" sz="1600" b="1">
+                <a:solidFill>
+                  <a:srgbClr val="138A5E"/>
+                </a:solidFill>
+              </a:rPr>
+              <a:t>Rules-backed decisions</a:t>
+            </a:r>
+          </a:p>
+        </p:txBody>
+      </p:sp>
+      <p:sp>
+        <p:nvSpPr>
+          <p:cNvPr id="100082" name="TextBox 12"/>
+          <p:cNvSpPr/>
+          <p:nvPr/>
+        </p:nvSpPr>
+        <p:spPr>
+          <a:xfrm xmlns:a="http://schemas.openxmlformats.org/drawingml/2006/main">
+            <a:off x="640080" y="3639312"/>
+            <a:ext cx="3474720" cy="667512"/>
+          </a:xfrm>
+          <a:prstGeom xmlns:a="http://schemas.openxmlformats.org/drawingml/2006/main" prst="rect">
+            <a:avLst/>
+          </a:prstGeom>
+          <a:noFill xmlns:a="http://schemas.openxmlformats.org/drawingml/2006/main"/>
+          <a:ln xmlns:a="http://schemas.openxmlformats.org/drawingml/2006/main">
+            <a:noFill/>
+          </a:ln>
+        </p:spPr>
+        <p:txBody>
+          <a:bodyPr xmlns:a="http://schemas.openxmlformats.org/drawingml/2006/main" lIns="73152" tIns="73152" rIns="73152" bIns="73152"/>
+          <a:lstStyle xmlns:a="http://schemas.openxmlformats.org/drawingml/2006/main"/>
+          <a:p xmlns:a="http://schemas.openxmlformats.org/drawingml/2006/main">
+            <a:pPr algn="l"/>
+            <a:r>
+              <a:rPr lang="en-US" sz="1200" b="0">
+                <a:solidFill>
+                  <a:srgbClr val="D7DFEC"/>
+                </a:solidFill>
+              </a:rPr>
+              <a:t>The LLM explains; deterministic rules evaluate eligibility.</a:t>
+            </a:r>
+          </a:p>
+        </p:txBody>
+      </p:sp>
+      <p:sp>
+        <p:nvSpPr>
+          <p:cNvPr id="100083" name="TextBox 13"/>
+          <p:cNvSpPr/>
+          <p:nvPr/>
+        </p:nvSpPr>
+        <p:spPr>
+          <a:xfrm xmlns:a="http://schemas.openxmlformats.org/drawingml/2006/main">
+            <a:off x="4389120" y="3154680"/>
+            <a:ext cx="3474720" cy="1234440"/>
+          </a:xfrm>
+          <a:prstGeom xmlns:a="http://schemas.openxmlformats.org/drawingml/2006/main" prst="roundRect">
+            <a:avLst/>
+          </a:prstGeom>
+          <a:solidFill xmlns:a="http://schemas.openxmlformats.org/drawingml/2006/main">
+            <a:srgbClr val="162238"/>
+          </a:solidFill>
+          <a:ln xmlns:a="http://schemas.openxmlformats.org/drawingml/2006/main">
+            <a:noFill/>
+          </a:ln>
+        </p:spPr>
+        <p:txBody>
+          <a:bodyPr xmlns:a="http://schemas.openxmlformats.org/drawingml/2006/main" lIns="73152" tIns="73152" rIns="73152" bIns="73152"/>
+          <a:lstStyle xmlns:a="http://schemas.openxmlformats.org/drawingml/2006/main"/>
+          <a:p xmlns:a="http://schemas.openxmlformats.org/drawingml/2006/main">
+            <a:pPr algn="l"/>
+            <a:endParaRPr lang="en-US" sz="1000" b="0">
+              <a:solidFill>
+                <a:srgbClr val="FFFFFF"/>
+              </a:solidFill>
+            </a:endParaRPr>
+          </a:p>
+        </p:txBody>
+      </p:sp>
+      <p:sp>
+        <p:nvSpPr>
+          <p:cNvPr id="100084" name="TextBox 14"/>
+          <p:cNvSpPr/>
+          <p:nvPr/>
+        </p:nvSpPr>
+        <p:spPr>
+          <a:xfrm xmlns:a="http://schemas.openxmlformats.org/drawingml/2006/main">
+            <a:off x="4389120" y="3300984"/>
+            <a:ext cx="3474720" cy="292608"/>
+          </a:xfrm>
+          <a:prstGeom xmlns:a="http://schemas.openxmlformats.org/drawingml/2006/main" prst="rect">
+            <a:avLst/>
+          </a:prstGeom>
+          <a:noFill xmlns:a="http://schemas.openxmlformats.org/drawingml/2006/main"/>
+          <a:ln xmlns:a="http://schemas.openxmlformats.org/drawingml/2006/main">
+            <a:noFill/>
+          </a:ln>
+        </p:spPr>
+        <p:txBody>
+          <a:bodyPr xmlns:a="http://schemas.openxmlformats.org/drawingml/2006/main" lIns="73152" tIns="73152" rIns="73152" bIns="73152"/>
+          <a:lstStyle xmlns:a="http://schemas.openxmlformats.org/drawingml/2006/main"/>
+          <a:p xmlns:a="http://schemas.openxmlformats.org/drawingml/2006/main">
+            <a:pPr algn="l"/>
+            <a:r>
+              <a:rPr lang="en-US" sz="1600" b="1">
+                <a:solidFill>
+                  <a:srgbClr val="7C3AED"/>
+                </a:solidFill>
+              </a:rPr>
+              <a:t>Application continuity</a:t>
+            </a:r>
+          </a:p>
+        </p:txBody>
+      </p:sp>
+      <p:sp>
+        <p:nvSpPr>
+          <p:cNvPr id="100085" name="TextBox 15"/>
+          <p:cNvSpPr/>
+          <p:nvPr/>
+        </p:nvSpPr>
+        <p:spPr>
+          <a:xfrm xmlns:a="http://schemas.openxmlformats.org/drawingml/2006/main">
+            <a:off x="4389120" y="3639312"/>
+            <a:ext cx="3474720" cy="667512"/>
+          </a:xfrm>
+          <a:prstGeom xmlns:a="http://schemas.openxmlformats.org/drawingml/2006/main" prst="rect">
+            <a:avLst/>
+          </a:prstGeom>
+          <a:noFill xmlns:a="http://schemas.openxmlformats.org/drawingml/2006/main"/>
+          <a:ln xmlns:a="http://schemas.openxmlformats.org/drawingml/2006/main">
+            <a:noFill/>
+          </a:ln>
+        </p:spPr>
+        <p:txBody>
+          <a:bodyPr xmlns:a="http://schemas.openxmlformats.org/drawingml/2006/main" lIns="73152" tIns="73152" rIns="73152" bIns="73152"/>
+          <a:lstStyle xmlns:a="http://schemas.openxmlformats.org/drawingml/2006/main"/>
+          <a:p xmlns:a="http://schemas.openxmlformats.org/drawingml/2006/main">
+            <a:pPr algn="l"/>
+            <a:r>
+              <a:rPr lang="en-US" sz="1200" b="0">
+                <a:solidFill>
+                  <a:srgbClr val="D7DFEC"/>
+                </a:solidFill>
+              </a:rPr>
+              <a:t>The user does not lose momentum between discovery and portal action.</a:t>
+            </a:r>
+          </a:p>
+        </p:txBody>
+      </p:sp>
+      <p:sp>
+        <p:nvSpPr>
+          <p:cNvPr id="100086" name="TextBox 16"/>
+          <p:cNvSpPr/>
+          <p:nvPr/>
+        </p:nvSpPr>
+        <p:spPr>
+          <a:xfrm xmlns:a="http://schemas.openxmlformats.org/drawingml/2006/main">
+            <a:off x="1005840" y="5074920"/>
+            <a:ext cx="6583680" cy="530352"/>
+          </a:xfrm>
+          <a:prstGeom xmlns:a="http://schemas.openxmlformats.org/drawingml/2006/main" prst="roundRect">
+            <a:avLst/>
+          </a:prstGeom>
+          <a:solidFill xmlns:a="http://schemas.openxmlformats.org/drawingml/2006/main">
+            <a:srgbClr val="162238"/>
+          </a:solidFill>
+          <a:ln xmlns:a="http://schemas.openxmlformats.org/drawingml/2006/main">
+            <a:noFill/>
+          </a:ln>
+        </p:spPr>
+        <p:txBody>
+          <a:bodyPr xmlns:a="http://schemas.openxmlformats.org/drawingml/2006/main" lIns="73152" tIns="73152" rIns="73152" bIns="73152"/>
+          <a:lstStyle xmlns:a="http://schemas.openxmlformats.org/drawingml/2006/main"/>
+          <a:p xmlns:a="http://schemas.openxmlformats.org/drawingml/2006/main">
+            <a:pPr algn="ctr"/>
+            <a:r>
+              <a:rPr lang="en-US" sz="1700" b="1">
+                <a:solidFill>
+                  <a:srgbClr val="FFFFFF"/>
+                </a:solidFill>
+              </a:rPr>
+              <a:t>Better access is not only better UX - it is better decision support.</a:t>
+            </a:r>
+          </a:p>
+        </p:txBody>
+      </p:sp>
+    </p:spTree>
+  </p:cSld>
+  <p:transition>
+    <p:fade/>
+  </p:transition>
+</p:sld>
+</file>
+
+<file path=ppt/slides/slide7.xml><?xml version="1.0" encoding="utf-8"?>
+<p:sld xmlns:p="http://schemas.openxmlformats.org/presentationml/2006/main">
+  <p:cSld>
+    <p:bg>
+      <p:bgPr>
+        <a:solidFill xmlns:a="http://schemas.openxmlformats.org/drawingml/2006/main">
+          <a:srgbClr val="0B1220"/>
+        </a:solidFill>
+      </p:bgPr>
+    </p:bg>
+    <p:spTree>
+      <p:nvGrpSpPr>
+        <p:cNvPr id="1" name=""/>
+        <p:cNvGrpSpPr/>
+        <p:nvPr/>
+      </p:nvGrpSpPr>
+      <p:grpSpPr/>
+      <p:sp>
+        <p:nvSpPr>
+          <p:cNvPr id="100087" name="TextBox 1"/>
+          <p:cNvSpPr/>
+          <p:nvPr/>
+        </p:nvSpPr>
+        <p:spPr>
+          <a:xfrm xmlns:a="http://schemas.openxmlformats.org/drawingml/2006/main">
+            <a:off x="594360" y="411480"/>
+            <a:ext cx="7406640" cy="502920"/>
+          </a:xfrm>
+          <a:prstGeom xmlns:a="http://schemas.openxmlformats.org/drawingml/2006/main" prst="rect">
+            <a:avLst/>
+          </a:prstGeom>
+          <a:noFill xmlns:a="http://schemas.openxmlformats.org/drawingml/2006/main"/>
+          <a:ln xmlns:a="http://schemas.openxmlformats.org/drawingml/2006/main">
+            <a:noFill/>
+          </a:ln>
+        </p:spPr>
+        <p:txBody>
+          <a:bodyPr xmlns:a="http://schemas.openxmlformats.org/drawingml/2006/main" lIns="73152" tIns="73152" rIns="73152" bIns="73152"/>
+          <a:lstStyle xmlns:a="http://schemas.openxmlformats.org/drawingml/2006/main"/>
+          <a:p xmlns:a="http://schemas.openxmlformats.org/drawingml/2006/main">
+            <a:pPr algn="l"/>
+            <a:r>
+              <a:rPr lang="en-US" sz="2700" b="1">
+                <a:solidFill>
+                  <a:srgbClr val="FFFFFF"/>
+                </a:solidFill>
+              </a:rPr>
+              <a:t>Technical foundation</a:t>
+            </a:r>
+          </a:p>
+        </p:txBody>
+      </p:sp>
+      <p:sp>
+        <p:nvSpPr>
+          <p:cNvPr id="100088" name="TextBox 2"/>
+          <p:cNvSpPr/>
+          <p:nvPr/>
+        </p:nvSpPr>
+        <p:spPr>
+          <a:xfrm xmlns:a="http://schemas.openxmlformats.org/drawingml/2006/main">
+            <a:off x="594360" y="987552"/>
+            <a:ext cx="914400" cy="73152"/>
+          </a:xfrm>
+          <a:prstGeom xmlns:a="http://schemas.openxmlformats.org/drawingml/2006/main" prst="rect">
+            <a:avLst/>
+          </a:prstGeom>
+          <a:solidFill xmlns:a="http://schemas.openxmlformats.org/drawingml/2006/main">
+            <a:srgbClr val="F97316"/>
+          </a:solidFill>
+          <a:ln xmlns:a="http://schemas.openxmlformats.org/drawingml/2006/main">
+            <a:noFill/>
+          </a:ln>
+        </p:spPr>
+        <p:txBody>
+          <a:bodyPr xmlns:a="http://schemas.openxmlformats.org/drawingml/2006/main" lIns="73152" tIns="73152" rIns="73152" bIns="73152"/>
+          <a:lstStyle xmlns:a="http://schemas.openxmlformats.org/drawingml/2006/main"/>
+          <a:p xmlns:a="http://schemas.openxmlformats.org/drawingml/2006/main">
+            <a:pPr algn="l"/>
+            <a:endParaRPr lang="en-US" sz="800" b="0">
+              <a:solidFill>
+                <a:srgbClr val="F97316"/>
+              </a:solidFill>
+            </a:endParaRPr>
+          </a:p>
+        </p:txBody>
+      </p:sp>
+      <p:sp>
+        <p:nvSpPr>
+          <p:cNvPr id="100089" name="TextBox 3"/>
+          <p:cNvSpPr/>
+          <p:nvPr/>
+        </p:nvSpPr>
+        <p:spPr>
+          <a:xfrm xmlns:a="http://schemas.openxmlformats.org/drawingml/2006/main">
+            <a:off x="594360" y="1115568"/>
+            <a:ext cx="7315200" cy="347472"/>
+          </a:xfrm>
+          <a:prstGeom xmlns:a="http://schemas.openxmlformats.org/drawingml/2006/main" prst="rect">
+            <a:avLst/>
+          </a:prstGeom>
+          <a:noFill xmlns:a="http://schemas.openxmlformats.org/drawingml/2006/main"/>
+          <a:ln xmlns:a="http://schemas.openxmlformats.org/drawingml/2006/main">
+            <a:noFill/>
+          </a:ln>
+        </p:spPr>
+        <p:txBody>
+          <a:bodyPr xmlns:a="http://schemas.openxmlformats.org/drawingml/2006/main" lIns="73152" tIns="73152" rIns="73152" bIns="73152"/>
+          <a:lstStyle xmlns:a="http://schemas.openxmlformats.org/drawingml/2006/main"/>
+          <a:p xmlns:a="http://schemas.openxmlformats.org/drawingml/2006/main">
+            <a:pPr algn="l"/>
+            <a:r>
+              <a:rPr lang="en-US" sz="1300" b="0">
+                <a:solidFill>
+                  <a:srgbClr val="A8B3C7"/>
+                </a:solidFill>
+              </a:rPr>
+              <a:t>A practical first slice built for reliability.</a:t>
+            </a:r>
+          </a:p>
+        </p:txBody>
+      </p:sp>
+      <p:sp>
+        <p:nvSpPr>
+          <p:cNvPr id="100090" name="TextBox 4"/>
+          <p:cNvSpPr/>
+          <p:nvPr/>
+        </p:nvSpPr>
+        <p:spPr>
+          <a:xfrm xmlns:a="http://schemas.openxmlformats.org/drawingml/2006/main">
+            <a:off x="640080" y="1508760"/>
+            <a:ext cx="2331720" cy="1828800"/>
+          </a:xfrm>
+          <a:prstGeom xmlns:a="http://schemas.openxmlformats.org/drawingml/2006/main" prst="roundRect">
+            <a:avLst/>
+          </a:prstGeom>
+          <a:solidFill xmlns:a="http://schemas.openxmlformats.org/drawingml/2006/main">
+            <a:srgbClr val="162238"/>
+          </a:solidFill>
+          <a:ln xmlns:a="http://schemas.openxmlformats.org/drawingml/2006/main">
+            <a:noFill/>
+          </a:ln>
+        </p:spPr>
+        <p:txBody>
+          <a:bodyPr xmlns:a="http://schemas.openxmlformats.org/drawingml/2006/main" lIns="73152" tIns="73152" rIns="73152" bIns="73152"/>
+          <a:lstStyle xmlns:a="http://schemas.openxmlformats.org/drawingml/2006/main"/>
+          <a:p xmlns:a="http://schemas.openxmlformats.org/drawingml/2006/main">
+            <a:pPr algn="l"/>
+            <a:endParaRPr lang="en-US" sz="1000" b="0">
+              <a:solidFill>
+                <a:srgbClr val="FFFFFF"/>
+              </a:solidFill>
+            </a:endParaRPr>
+          </a:p>
+        </p:txBody>
+      </p:sp>
+      <p:sp>
+        <p:nvSpPr>
+          <p:cNvPr id="100091" name="TextBox 5"/>
+          <p:cNvSpPr/>
+          <p:nvPr/>
+        </p:nvSpPr>
+        <p:spPr>
+          <a:xfrm xmlns:a="http://schemas.openxmlformats.org/drawingml/2006/main">
+            <a:off x="640080" y="1655064"/>
+            <a:ext cx="2331720" cy="292608"/>
+          </a:xfrm>
+          <a:prstGeom xmlns:a="http://schemas.openxmlformats.org/drawingml/2006/main" prst="rect">
+            <a:avLst/>
+          </a:prstGeom>
+          <a:noFill xmlns:a="http://schemas.openxmlformats.org/drawingml/2006/main"/>
+          <a:ln xmlns:a="http://schemas.openxmlformats.org/drawingml/2006/main">
+            <a:noFill/>
+          </a:ln>
+        </p:spPr>
+        <p:txBody>
+          <a:bodyPr xmlns:a="http://schemas.openxmlformats.org/drawingml/2006/main" lIns="73152" tIns="73152" rIns="73152" bIns="73152"/>
+          <a:lstStyle xmlns:a="http://schemas.openxmlformats.org/drawingml/2006/main"/>
+          <a:p xmlns:a="http://schemas.openxmlformats.org/drawingml/2006/main">
+            <a:pPr algn="l"/>
+            <a:r>
+              <a:rPr lang="en-US" sz="1600" b="1">
+                <a:solidFill>
+                  <a:srgbClr val="145DA0"/>
+                </a:solidFill>
+              </a:rPr>
+              <a:t>Frontend</a:t>
+            </a:r>
+          </a:p>
+        </p:txBody>
+      </p:sp>
+      <p:sp>
+        <p:nvSpPr>
+          <p:cNvPr id="100092" name="TextBox 6"/>
+          <p:cNvSpPr/>
+          <p:nvPr/>
+        </p:nvSpPr>
+        <p:spPr>
+          <a:xfrm xmlns:a="http://schemas.openxmlformats.org/drawingml/2006/main">
+            <a:off x="640080" y="1993392"/>
+            <a:ext cx="2331720" cy="1261872"/>
+          </a:xfrm>
+          <a:prstGeom xmlns:a="http://schemas.openxmlformats.org/drawingml/2006/main" prst="rect">
+            <a:avLst/>
+          </a:prstGeom>
+          <a:noFill xmlns:a="http://schemas.openxmlformats.org/drawingml/2006/main"/>
+          <a:ln xmlns:a="http://schemas.openxmlformats.org/drawingml/2006/main">
+            <a:noFill/>
+          </a:ln>
+        </p:spPr>
+        <p:txBody>
+          <a:bodyPr xmlns:a="http://schemas.openxmlformats.org/drawingml/2006/main" lIns="73152" tIns="73152" rIns="73152" bIns="73152"/>
+          <a:lstStyle xmlns:a="http://schemas.openxmlformats.org/drawingml/2006/main"/>
+          <a:p xmlns:a="http://schemas.openxmlformats.org/drawingml/2006/main">
+            <a:pPr algn="l"/>
+            <a:r>
+              <a:rPr lang="en-US" sz="1200" b="0">
+                <a:solidFill>
+                  <a:srgbClr val="D7DFEC"/>
+                </a:solidFill>
+              </a:rPr>
+              <a:t>Expo / React Native</a:t>
+            </a:r>
+          </a:p>
+          <a:p xmlns:a="http://schemas.openxmlformats.org/drawingml/2006/main">
+            <a:pPr algn="l"/>
+            <a:r>
+              <a:rPr lang="en-US" sz="1200" b="0">
+                <a:solidFill>
+                  <a:srgbClr val="D7DFEC"/>
+                </a:solidFill>
+              </a:rPr>
+              <a:t>Mobile-first screens</a:t>
+            </a:r>
+          </a:p>
+          <a:p xmlns:a="http://schemas.openxmlformats.org/drawingml/2006/main">
+            <a:pPr algn="l"/>
+            <a:r>
+              <a:rPr lang="en-US" sz="1200" b="0">
+                <a:solidFill>
+                  <a:srgbClr val="D7DFEC"/>
+                </a:solidFill>
+              </a:rPr>
+              <a:t>Voice + text interaction</a:t>
+            </a:r>
+          </a:p>
+        </p:txBody>
+      </p:sp>
+      <p:sp>
+        <p:nvSpPr>
+          <p:cNvPr id="100093" name="TextBox 7"/>
+          <p:cNvSpPr/>
+          <p:nvPr/>
+        </p:nvSpPr>
+        <p:spPr>
+          <a:xfrm xmlns:a="http://schemas.openxmlformats.org/drawingml/2006/main">
+            <a:off x="3154680" y="1508760"/>
+            <a:ext cx="2331720" cy="1828800"/>
+          </a:xfrm>
+          <a:prstGeom xmlns:a="http://schemas.openxmlformats.org/drawingml/2006/main" prst="roundRect">
+            <a:avLst/>
+          </a:prstGeom>
+          <a:solidFill xmlns:a="http://schemas.openxmlformats.org/drawingml/2006/main">
+            <a:srgbClr val="162238"/>
+          </a:solidFill>
+          <a:ln xmlns:a="http://schemas.openxmlformats.org/drawingml/2006/main">
+            <a:noFill/>
+          </a:ln>
+        </p:spPr>
+        <p:txBody>
+          <a:bodyPr xmlns:a="http://schemas.openxmlformats.org/drawingml/2006/main" lIns="73152" tIns="73152" rIns="73152" bIns="73152"/>
+          <a:lstStyle xmlns:a="http://schemas.openxmlformats.org/drawingml/2006/main"/>
+          <a:p xmlns:a="http://schemas.openxmlformats.org/drawingml/2006/main">
+            <a:pPr algn="l"/>
+            <a:endParaRPr lang="en-US" sz="1000" b="0">
+              <a:solidFill>
+                <a:srgbClr val="FFFFFF"/>
+              </a:solidFill>
+            </a:endParaRPr>
+          </a:p>
+        </p:txBody>
+      </p:sp>
+      <p:sp>
+        <p:nvSpPr>
+          <p:cNvPr id="100094" name="TextBox 8"/>
+          <p:cNvSpPr/>
+          <p:nvPr/>
+        </p:nvSpPr>
+        <p:spPr>
+          <a:xfrm xmlns:a="http://schemas.openxmlformats.org/drawingml/2006/main">
+            <a:off x="3154680" y="1655064"/>
+            <a:ext cx="2331720" cy="292608"/>
+          </a:xfrm>
+          <a:prstGeom xmlns:a="http://schemas.openxmlformats.org/drawingml/2006/main" prst="rect">
+            <a:avLst/>
+          </a:prstGeom>
+          <a:noFill xmlns:a="http://schemas.openxmlformats.org/drawingml/2006/main"/>
+          <a:ln xmlns:a="http://schemas.openxmlformats.org/drawingml/2006/main">
+            <a:noFill/>
+          </a:ln>
+        </p:spPr>
+        <p:txBody>
+          <a:bodyPr xmlns:a="http://schemas.openxmlformats.org/drawingml/2006/main" lIns="73152" tIns="73152" rIns="73152" bIns="73152"/>
+          <a:lstStyle xmlns:a="http://schemas.openxmlformats.org/drawingml/2006/main"/>
+          <a:p xmlns:a="http://schemas.openxmlformats.org/drawingml/2006/main">
+            <a:pPr algn="l"/>
+            <a:r>
+              <a:rPr lang="en-US" sz="1600" b="1">
+                <a:solidFill>
+                  <a:srgbClr val="F97316"/>
+                </a:solidFill>
+              </a:rPr>
+              <a:t>Backend</a:t>
+            </a:r>
+          </a:p>
+        </p:txBody>
+      </p:sp>
+      <p:sp>
+        <p:nvSpPr>
+          <p:cNvPr id="100095" name="TextBox 9"/>
+          <p:cNvSpPr/>
+          <p:nvPr/>
+        </p:nvSpPr>
+        <p:spPr>
+          <a:xfrm xmlns:a="http://schemas.openxmlformats.org/drawingml/2006/main">
+            <a:off x="3154680" y="1993392"/>
+            <a:ext cx="2331720" cy="1261872"/>
+          </a:xfrm>
+          <a:prstGeom xmlns:a="http://schemas.openxmlformats.org/drawingml/2006/main" prst="rect">
+            <a:avLst/>
+          </a:prstGeom>
+          <a:noFill xmlns:a="http://schemas.openxmlformats.org/drawingml/2006/main"/>
+          <a:ln xmlns:a="http://schemas.openxmlformats.org/drawingml/2006/main">
+            <a:noFill/>
+          </a:ln>
+        </p:spPr>
+        <p:txBody>
+          <a:bodyPr xmlns:a="http://schemas.openxmlformats.org/drawingml/2006/main" lIns="73152" tIns="73152" rIns="73152" bIns="73152"/>
+          <a:lstStyle xmlns:a="http://schemas.openxmlformats.org/drawingml/2006/main"/>
+          <a:p xmlns:a="http://schemas.openxmlformats.org/drawingml/2006/main">
+            <a:pPr algn="l"/>
+            <a:r>
+              <a:rPr lang="en-US" sz="1200" b="0">
+                <a:solidFill>
+                  <a:srgbClr val="D7DFEC"/>
+                </a:solidFill>
+              </a:rPr>
+              <a:t>FastAPI</a:t>
+            </a:r>
+          </a:p>
+          <a:p xmlns:a="http://schemas.openxmlformats.org/drawingml/2006/main">
+            <a:pPr algn="l"/>
+            <a:r>
+              <a:rPr lang="en-US" sz="1200" b="0">
+                <a:solidFill>
+                  <a:srgbClr val="D7DFEC"/>
+                </a:solidFill>
+              </a:rPr>
+              <a:t>Authenticated endpoints</a:t>
+            </a:r>
+          </a:p>
+          <a:p xmlns:a="http://schemas.openxmlformats.org/drawingml/2006/main">
+            <a:pPr algn="l"/>
+            <a:r>
+              <a:rPr lang="en-US" sz="1200" b="0">
+                <a:solidFill>
+                  <a:srgbClr val="D7DFEC"/>
+                </a:solidFill>
+              </a:rPr>
+              <a:t>Explicit error format</a:t>
+            </a:r>
+          </a:p>
+        </p:txBody>
+      </p:sp>
+      <p:sp>
+        <p:nvSpPr>
+          <p:cNvPr id="100096" name="TextBox 10"/>
+          <p:cNvSpPr/>
+          <p:nvPr/>
+        </p:nvSpPr>
+        <p:spPr>
+          <a:xfrm xmlns:a="http://schemas.openxmlformats.org/drawingml/2006/main">
+            <a:off x="5669280" y="1508760"/>
+            <a:ext cx="2331720" cy="1828800"/>
+          </a:xfrm>
+          <a:prstGeom xmlns:a="http://schemas.openxmlformats.org/drawingml/2006/main" prst="roundRect">
+            <a:avLst/>
+          </a:prstGeom>
+          <a:solidFill xmlns:a="http://schemas.openxmlformats.org/drawingml/2006/main">
+            <a:srgbClr val="162238"/>
+          </a:solidFill>
+          <a:ln xmlns:a="http://schemas.openxmlformats.org/drawingml/2006/main">
+            <a:noFill/>
+          </a:ln>
+        </p:spPr>
+        <p:txBody>
+          <a:bodyPr xmlns:a="http://schemas.openxmlformats.org/drawingml/2006/main" lIns="73152" tIns="73152" rIns="73152" bIns="73152"/>
+          <a:lstStyle xmlns:a="http://schemas.openxmlformats.org/drawingml/2006/main"/>
+          <a:p xmlns:a="http://schemas.openxmlformats.org/drawingml/2006/main">
+            <a:pPr algn="l"/>
+            <a:endParaRPr lang="en-US" sz="1000" b="0">
+              <a:solidFill>
+                <a:srgbClr val="FFFFFF"/>
+              </a:solidFill>
+            </a:endParaRPr>
+          </a:p>
+        </p:txBody>
+      </p:sp>
+      <p:sp>
+        <p:nvSpPr>
+          <p:cNvPr id="100097" name="TextBox 11"/>
+          <p:cNvSpPr/>
+          <p:nvPr/>
+        </p:nvSpPr>
+        <p:spPr>
+          <a:xfrm xmlns:a="http://schemas.openxmlformats.org/drawingml/2006/main">
+            <a:off x="5669280" y="1655064"/>
+            <a:ext cx="2331720" cy="292608"/>
+          </a:xfrm>
+          <a:prstGeom xmlns:a="http://schemas.openxmlformats.org/drawingml/2006/main" prst="rect">
+            <a:avLst/>
+          </a:prstGeom>
+          <a:noFill xmlns:a="http://schemas.openxmlformats.org/drawingml/2006/main"/>
+          <a:ln xmlns:a="http://schemas.openxmlformats.org/drawingml/2006/main">
+            <a:noFill/>
+          </a:ln>
+        </p:spPr>
+        <p:txBody>
+          <a:bodyPr xmlns:a="http://schemas.openxmlformats.org/drawingml/2006/main" lIns="73152" tIns="73152" rIns="73152" bIns="73152"/>
+          <a:lstStyle xmlns:a="http://schemas.openxmlformats.org/drawingml/2006/main"/>
+          <a:p xmlns:a="http://schemas.openxmlformats.org/drawingml/2006/main">
+            <a:pPr algn="l"/>
+            <a:r>
+              <a:rPr lang="en-US" sz="1600" b="1">
+                <a:solidFill>
+                  <a:srgbClr val="138A5E"/>
+                </a:solidFill>
+              </a:rPr>
+              <a:t>Data</a:t>
+            </a:r>
+          </a:p>
+        </p:txBody>
+      </p:sp>
+      <p:sp>
+        <p:nvSpPr>
+          <p:cNvPr id="100098" name="TextBox 12"/>
+          <p:cNvSpPr/>
+          <p:nvPr/>
+        </p:nvSpPr>
+        <p:spPr>
+          <a:xfrm xmlns:a="http://schemas.openxmlformats.org/drawingml/2006/main">
+            <a:off x="5669280" y="1993392"/>
+            <a:ext cx="2331720" cy="1261872"/>
+          </a:xfrm>
+          <a:prstGeom xmlns:a="http://schemas.openxmlformats.org/drawingml/2006/main" prst="rect">
+            <a:avLst/>
+          </a:prstGeom>
+          <a:noFill xmlns:a="http://schemas.openxmlformats.org/drawingml/2006/main"/>
+          <a:ln xmlns:a="http://schemas.openxmlformats.org/drawingml/2006/main">
+            <a:noFill/>
+          </a:ln>
+        </p:spPr>
+        <p:txBody>
+          <a:bodyPr xmlns:a="http://schemas.openxmlformats.org/drawingml/2006/main" lIns="73152" tIns="73152" rIns="73152" bIns="73152"/>
+          <a:lstStyle xmlns:a="http://schemas.openxmlformats.org/drawingml/2006/main"/>
+          <a:p xmlns:a="http://schemas.openxmlformats.org/drawingml/2006/main">
+            <a:pPr algn="l"/>
+            <a:r>
+              <a:rPr lang="en-US" sz="1200" b="0">
+                <a:solidFill>
+                  <a:srgbClr val="D7DFEC"/>
+                </a:solidFill>
+              </a:rPr>
+              <a:t>Supabase Auth</a:t>
+            </a:r>
+          </a:p>
+          <a:p xmlns:a="http://schemas.openxmlformats.org/drawingml/2006/main">
+            <a:pPr algn="l"/>
+            <a:r>
+              <a:rPr lang="en-US" sz="1200" b="0">
+                <a:solidFill>
+                  <a:srgbClr val="D7DFEC"/>
+                </a:solidFill>
+              </a:rPr>
+              <a:t>Postgres + RLS</a:t>
+            </a:r>
+          </a:p>
+          <a:p xmlns:a="http://schemas.openxmlformats.org/drawingml/2006/main">
+            <a:pPr algn="l"/>
+            <a:r>
+              <a:rPr lang="en-US" sz="1200" b="0">
+                <a:solidFill>
+                  <a:srgbClr val="D7DFEC"/>
+                </a:solidFill>
+              </a:rPr>
+              <a:t>Storage metadata</a:t>
+            </a:r>
+          </a:p>
+        </p:txBody>
+      </p:sp>
+      <p:sp>
+        <p:nvSpPr>
+          <p:cNvPr id="100099" name="TextBox 13"/>
+          <p:cNvSpPr/>
+          <p:nvPr/>
+        </p:nvSpPr>
+        <p:spPr>
+          <a:xfrm xmlns:a="http://schemas.openxmlformats.org/drawingml/2006/main">
+            <a:off x="822960" y="4206240"/>
+            <a:ext cx="7040880" cy="822960"/>
+          </a:xfrm>
+          <a:prstGeom xmlns:a="http://schemas.openxmlformats.org/drawingml/2006/main" prst="roundRect">
+            <a:avLst/>
+          </a:prstGeom>
+          <a:solidFill xmlns:a="http://schemas.openxmlformats.org/drawingml/2006/main">
+            <a:srgbClr val="162238"/>
+          </a:solidFill>
+          <a:ln xmlns:a="http://schemas.openxmlformats.org/drawingml/2006/main">
+            <a:noFill/>
+          </a:ln>
+        </p:spPr>
+        <p:txBody>
+          <a:bodyPr xmlns:a="http://schemas.openxmlformats.org/drawingml/2006/main" lIns="73152" tIns="73152" rIns="73152" bIns="73152"/>
+          <a:lstStyle xmlns:a="http://schemas.openxmlformats.org/drawingml/2006/main"/>
+          <a:p xmlns:a="http://schemas.openxmlformats.org/drawingml/2006/main">
+            <a:pPr algn="ctr"/>
+            <a:r>
+              <a:rPr lang="en-US" sz="1800" b="1">
+                <a:solidFill>
+                  <a:srgbClr val="FFFFFF"/>
+                </a:solidFill>
+              </a:rPr>
+              <a:t>Quality bar: explicit errors, testable contracts, server-side service credentials and no secret keys in client apps.</a:t>
+            </a:r>
+          </a:p>
+        </p:txBody>
+      </p:sp>
+    </p:spTree>
+  </p:cSld>
+  <p:transition>
+    <p:fade/>
+  </p:transition>
+</p:sld>
+</file>
+
+<file path=ppt/slides/slide8.xml><?xml version="1.0" encoding="utf-8"?>
+<p:sld xmlns:p="http://schemas.openxmlformats.org/presentationml/2006/main">
+  <p:cSld>
+    <p:bg>
+      <p:bgPr>
+        <a:solidFill xmlns:a="http://schemas.openxmlformats.org/drawingml/2006/main">
+          <a:srgbClr val="0B1220"/>
+        </a:solidFill>
+      </p:bgPr>
+    </p:bg>
+    <p:spTree>
+      <p:nvGrpSpPr>
+        <p:cNvPr id="1" name=""/>
+        <p:cNvGrpSpPr/>
+        <p:nvPr/>
+      </p:nvGrpSpPr>
+      <p:grpSpPr/>
+      <p:sp>
+        <p:nvSpPr>
+          <p:cNvPr id="100100" name="TextBox 1"/>
+          <p:cNvSpPr/>
+          <p:nvPr/>
+        </p:nvSpPr>
+        <p:spPr>
+          <a:xfrm xmlns:a="http://schemas.openxmlformats.org/drawingml/2006/main">
+            <a:off x="594360" y="411480"/>
+            <a:ext cx="7406640" cy="502920"/>
+          </a:xfrm>
+          <a:prstGeom xmlns:a="http://schemas.openxmlformats.org/drawingml/2006/main" prst="rect">
+            <a:avLst/>
+          </a:prstGeom>
+          <a:noFill xmlns:a="http://schemas.openxmlformats.org/drawingml/2006/main"/>
+          <a:ln xmlns:a="http://schemas.openxmlformats.org/drawingml/2006/main">
+            <a:noFill/>
+          </a:ln>
+        </p:spPr>
+        <p:txBody>
+          <a:bodyPr xmlns:a="http://schemas.openxmlformats.org/drawingml/2006/main" lIns="73152" tIns="73152" rIns="73152" bIns="73152"/>
+          <a:lstStyle xmlns:a="http://schemas.openxmlformats.org/drawingml/2006/main"/>
+          <a:p xmlns:a="http://schemas.openxmlformats.org/drawingml/2006/main">
+            <a:pPr algn="l"/>
+            <a:r>
+              <a:rPr lang="en-US" sz="2700" b="1">
+                <a:solidFill>
+                  <a:srgbClr val="FFFFFF"/>
+                </a:solidFill>
+              </a:rPr>
+              <a:t>Roadmap</a:t>
+            </a:r>
+          </a:p>
+        </p:txBody>
+      </p:sp>
+      <p:sp>
+        <p:nvSpPr>
+          <p:cNvPr id="100101" name="TextBox 2"/>
+          <p:cNvSpPr/>
+          <p:nvPr/>
+        </p:nvSpPr>
+        <p:spPr>
+          <a:xfrm xmlns:a="http://schemas.openxmlformats.org/drawingml/2006/main">
+            <a:off x="594360" y="987552"/>
+            <a:ext cx="914400" cy="73152"/>
+          </a:xfrm>
+          <a:prstGeom xmlns:a="http://schemas.openxmlformats.org/drawingml/2006/main" prst="rect">
+            <a:avLst/>
+          </a:prstGeom>
+          <a:solidFill xmlns:a="http://schemas.openxmlformats.org/drawingml/2006/main">
+            <a:srgbClr val="F97316"/>
+          </a:solidFill>
+          <a:ln xmlns:a="http://schemas.openxmlformats.org/drawingml/2006/main">
+            <a:noFill/>
+          </a:ln>
+        </p:spPr>
+        <p:txBody>
+          <a:bodyPr xmlns:a="http://schemas.openxmlformats.org/drawingml/2006/main" lIns="73152" tIns="73152" rIns="73152" bIns="73152"/>
+          <a:lstStyle xmlns:a="http://schemas.openxmlformats.org/drawingml/2006/main"/>
+          <a:p xmlns:a="http://schemas.openxmlformats.org/drawingml/2006/main">
+            <a:pPr algn="l"/>
+            <a:endParaRPr lang="en-US" sz="800" b="0">
+              <a:solidFill>
+                <a:srgbClr val="F97316"/>
+              </a:solidFill>
+            </a:endParaRPr>
+          </a:p>
+        </p:txBody>
+      </p:sp>
+      <p:sp>
+        <p:nvSpPr>
+          <p:cNvPr id="100102" name="TextBox 3"/>
+          <p:cNvSpPr/>
+          <p:nvPr/>
+        </p:nvSpPr>
+        <p:spPr>
+          <a:xfrm xmlns:a="http://schemas.openxmlformats.org/drawingml/2006/main">
+            <a:off x="594360" y="1115568"/>
+            <a:ext cx="7315200" cy="347472"/>
+          </a:xfrm>
+          <a:prstGeom xmlns:a="http://schemas.openxmlformats.org/drawingml/2006/main" prst="rect">
+            <a:avLst/>
+          </a:prstGeom>
+          <a:noFill xmlns:a="http://schemas.openxmlformats.org/drawingml/2006/main"/>
+          <a:ln xmlns:a="http://schemas.openxmlformats.org/drawingml/2006/main">
+            <a:noFill/>
+          </a:ln>
+        </p:spPr>
+        <p:txBody>
+          <a:bodyPr xmlns:a="http://schemas.openxmlformats.org/drawingml/2006/main" lIns="73152" tIns="73152" rIns="73152" bIns="73152"/>
+          <a:lstStyle xmlns:a="http://schemas.openxmlformats.org/drawingml/2006/main"/>
+          <a:p xmlns:a="http://schemas.openxmlformats.org/drawingml/2006/main">
+            <a:pPr algn="l"/>
+            <a:r>
+              <a:rPr lang="en-US" sz="1300" b="0">
+                <a:solidFill>
+                  <a:srgbClr val="A8B3C7"/>
+                </a:solidFill>
+              </a:rPr>
+              <a:t>Start with clarity. Scale with evidence.</a:t>
+            </a:r>
+          </a:p>
+        </p:txBody>
+      </p:sp>
+      <p:sp>
+        <p:nvSpPr>
+          <p:cNvPr id="100103" name="TextBox 4"/>
+          <p:cNvSpPr/>
+          <p:nvPr/>
+        </p:nvSpPr>
+        <p:spPr>
+          <a:xfrm xmlns:a="http://schemas.openxmlformats.org/drawingml/2006/main">
+            <a:off x="731520" y="1828800"/>
+            <a:ext cx="1188720" cy="512064"/>
+          </a:xfrm>
+          <a:prstGeom xmlns:a="http://schemas.openxmlformats.org/drawingml/2006/main" prst="roundRect">
+            <a:avLst/>
+          </a:prstGeom>
+          <a:solidFill xmlns:a="http://schemas.openxmlformats.org/drawingml/2006/main">
+            <a:srgbClr val="145DA0"/>
+          </a:solidFill>
+          <a:ln xmlns:a="http://schemas.openxmlformats.org/drawingml/2006/main">
+            <a:noFill/>
+          </a:ln>
+        </p:spPr>
+        <p:txBody>
+          <a:bodyPr xmlns:a="http://schemas.openxmlformats.org/drawingml/2006/main" lIns="73152" tIns="73152" rIns="73152" bIns="73152"/>
+          <a:lstStyle xmlns:a="http://schemas.openxmlformats.org/drawingml/2006/main"/>
+          <a:p xmlns:a="http://schemas.openxmlformats.org/drawingml/2006/main">
+            <a:pPr algn="ctr"/>
+            <a:r>
+              <a:rPr lang="en-US" sz="1600" b="1">
+                <a:solidFill>
+                  <a:srgbClr val="FFFFFF"/>
+                </a:solidFill>
+              </a:rPr>
+              <a:t>NOW</a:t>
+            </a:r>
+          </a:p>
+        </p:txBody>
+      </p:sp>
+      <p:sp>
+        <p:nvSpPr>
+          <p:cNvPr id="100104" name="TextBox 5"/>
+          <p:cNvSpPr/>
+          <p:nvPr/>
+        </p:nvSpPr>
+        <p:spPr>
+          <a:xfrm xmlns:a="http://schemas.openxmlformats.org/drawingml/2006/main">
+            <a:off x="2029968" y="1901952"/>
+            <a:ext cx="384048" cy="384048"/>
+          </a:xfrm>
+          <a:prstGeom xmlns:a="http://schemas.openxmlformats.org/drawingml/2006/main" prst="rightArrow">
+            <a:avLst/>
+          </a:prstGeom>
+          <a:noFill xmlns:a="http://schemas.openxmlformats.org/drawingml/2006/main"/>
+          <a:ln xmlns:a="http://schemas.openxmlformats.org/drawingml/2006/main">
+            <a:noFill/>
+          </a:ln>
+        </p:spPr>
+        <p:txBody>
+          <a:bodyPr xmlns:a="http://schemas.openxmlformats.org/drawingml/2006/main" lIns="73152" tIns="73152" rIns="73152" bIns="73152"/>
+          <a:lstStyle xmlns:a="http://schemas.openxmlformats.org/drawingml/2006/main"/>
+          <a:p xmlns:a="http://schemas.openxmlformats.org/drawingml/2006/main">
+            <a:pPr algn="ctr"/>
+            <a:r>
+              <a:rPr lang="en-US" sz="2200" b="1">
+                <a:solidFill>
+                  <a:srgbClr val="F97316"/>
+                </a:solidFill>
+              </a:rPr>
+              <a:t>&gt;</a:t>
+            </a:r>
+          </a:p>
+        </p:txBody>
+      </p:sp>
+      <p:sp>
+        <p:nvSpPr>
+          <p:cNvPr id="100105" name="TextBox 6"/>
+          <p:cNvSpPr/>
+          <p:nvPr/>
+        </p:nvSpPr>
+        <p:spPr>
+          <a:xfrm xmlns:a="http://schemas.openxmlformats.org/drawingml/2006/main">
+            <a:off x="2468880" y="1828800"/>
+            <a:ext cx="1188720" cy="512064"/>
+          </a:xfrm>
+          <a:prstGeom xmlns:a="http://schemas.openxmlformats.org/drawingml/2006/main" prst="roundRect">
+            <a:avLst/>
+          </a:prstGeom>
+          <a:solidFill xmlns:a="http://schemas.openxmlformats.org/drawingml/2006/main">
+            <a:srgbClr val="F97316"/>
+          </a:solidFill>
+          <a:ln xmlns:a="http://schemas.openxmlformats.org/drawingml/2006/main">
+            <a:noFill/>
+          </a:ln>
+        </p:spPr>
+        <p:txBody>
+          <a:bodyPr xmlns:a="http://schemas.openxmlformats.org/drawingml/2006/main" lIns="73152" tIns="73152" rIns="73152" bIns="73152"/>
+          <a:lstStyle xmlns:a="http://schemas.openxmlformats.org/drawingml/2006/main"/>
+          <a:p xmlns:a="http://schemas.openxmlformats.org/drawingml/2006/main">
+            <a:pPr algn="ctr"/>
+            <a:r>
+              <a:rPr lang="en-US" sz="1600" b="1">
+                <a:solidFill>
+                  <a:srgbClr val="FFFFFF"/>
+                </a:solidFill>
+              </a:rPr>
+              <a:t>NEXT</a:t>
+            </a:r>
+          </a:p>
+        </p:txBody>
+      </p:sp>
+      <p:sp>
+        <p:nvSpPr>
+          <p:cNvPr id="100106" name="TextBox 7"/>
+          <p:cNvSpPr/>
+          <p:nvPr/>
+        </p:nvSpPr>
+        <p:spPr>
+          <a:xfrm xmlns:a="http://schemas.openxmlformats.org/drawingml/2006/main">
+            <a:off x="3767328" y="1901952"/>
+            <a:ext cx="384048" cy="384048"/>
+          </a:xfrm>
+          <a:prstGeom xmlns:a="http://schemas.openxmlformats.org/drawingml/2006/main" prst="rightArrow">
+            <a:avLst/>
+          </a:prstGeom>
+          <a:noFill xmlns:a="http://schemas.openxmlformats.org/drawingml/2006/main"/>
+          <a:ln xmlns:a="http://schemas.openxmlformats.org/drawingml/2006/main">
+            <a:noFill/>
+          </a:ln>
+        </p:spPr>
+        <p:txBody>
+          <a:bodyPr xmlns:a="http://schemas.openxmlformats.org/drawingml/2006/main" lIns="73152" tIns="73152" rIns="73152" bIns="73152"/>
+          <a:lstStyle xmlns:a="http://schemas.openxmlformats.org/drawingml/2006/main"/>
+          <a:p xmlns:a="http://schemas.openxmlformats.org/drawingml/2006/main">
+            <a:pPr algn="ctr"/>
+            <a:r>
+              <a:rPr lang="en-US" sz="2200" b="1">
+                <a:solidFill>
+                  <a:srgbClr val="F97316"/>
+                </a:solidFill>
+              </a:rPr>
+              <a:t>&gt;</a:t>
+            </a:r>
+          </a:p>
+        </p:txBody>
+      </p:sp>
+      <p:sp>
+        <p:nvSpPr>
+          <p:cNvPr id="100107" name="TextBox 8"/>
+          <p:cNvSpPr/>
+          <p:nvPr/>
+        </p:nvSpPr>
+        <p:spPr>
+          <a:xfrm xmlns:a="http://schemas.openxmlformats.org/drawingml/2006/main">
+            <a:off x="4206240" y="1828800"/>
+            <a:ext cx="1188720" cy="512064"/>
+          </a:xfrm>
+          <a:prstGeom xmlns:a="http://schemas.openxmlformats.org/drawingml/2006/main" prst="roundRect">
+            <a:avLst/>
+          </a:prstGeom>
+          <a:solidFill xmlns:a="http://schemas.openxmlformats.org/drawingml/2006/main">
+            <a:srgbClr val="138A5E"/>
+          </a:solidFill>
+          <a:ln xmlns:a="http://schemas.openxmlformats.org/drawingml/2006/main">
+            <a:noFill/>
+          </a:ln>
+        </p:spPr>
+        <p:txBody>
+          <a:bodyPr xmlns:a="http://schemas.openxmlformats.org/drawingml/2006/main" lIns="73152" tIns="73152" rIns="73152" bIns="73152"/>
+          <a:lstStyle xmlns:a="http://schemas.openxmlformats.org/drawingml/2006/main"/>
+          <a:p xmlns:a="http://schemas.openxmlformats.org/drawingml/2006/main">
+            <a:pPr algn="ctr"/>
+            <a:r>
+              <a:rPr lang="en-US" sz="1600" b="1">
+                <a:solidFill>
+                  <a:srgbClr val="FFFFFF"/>
+                </a:solidFill>
+              </a:rPr>
+              <a:t>SCALE</a:t>
+            </a:r>
+          </a:p>
+        </p:txBody>
+      </p:sp>
+      <p:sp>
+        <p:nvSpPr>
+          <p:cNvPr id="100108" name="TextBox 9"/>
+          <p:cNvSpPr/>
+          <p:nvPr/>
+        </p:nvSpPr>
+        <p:spPr>
+          <a:xfrm xmlns:a="http://schemas.openxmlformats.org/drawingml/2006/main">
+            <a:off x="5504688" y="1901952"/>
+            <a:ext cx="384048" cy="384048"/>
+          </a:xfrm>
+          <a:prstGeom xmlns:a="http://schemas.openxmlformats.org/drawingml/2006/main" prst="rightArrow">
+            <a:avLst/>
+          </a:prstGeom>
+          <a:noFill xmlns:a="http://schemas.openxmlformats.org/drawingml/2006/main"/>
+          <a:ln xmlns:a="http://schemas.openxmlformats.org/drawingml/2006/main">
+            <a:noFill/>
+          </a:ln>
+        </p:spPr>
+        <p:txBody>
+          <a:bodyPr xmlns:a="http://schemas.openxmlformats.org/drawingml/2006/main" lIns="73152" tIns="73152" rIns="73152" bIns="73152"/>
+          <a:lstStyle xmlns:a="http://schemas.openxmlformats.org/drawingml/2006/main"/>
+          <a:p xmlns:a="http://schemas.openxmlformats.org/drawingml/2006/main">
+            <a:pPr algn="ctr"/>
+            <a:r>
+              <a:rPr lang="en-US" sz="2200" b="1">
+                <a:solidFill>
+                  <a:srgbClr val="F97316"/>
+                </a:solidFill>
+              </a:rPr>
+              <a:t>&gt;</a:t>
+            </a:r>
+          </a:p>
+        </p:txBody>
+      </p:sp>
+      <p:sp>
+        <p:nvSpPr>
+          <p:cNvPr id="100109" name="TextBox 10"/>
+          <p:cNvSpPr/>
+          <p:nvPr/>
+        </p:nvSpPr>
+        <p:spPr>
+          <a:xfrm xmlns:a="http://schemas.openxmlformats.org/drawingml/2006/main">
+            <a:off x="5943600" y="1828800"/>
+            <a:ext cx="1188720" cy="512064"/>
+          </a:xfrm>
+          <a:prstGeom xmlns:a="http://schemas.openxmlformats.org/drawingml/2006/main" prst="roundRect">
+            <a:avLst/>
+          </a:prstGeom>
+          <a:solidFill xmlns:a="http://schemas.openxmlformats.org/drawingml/2006/main">
+            <a:srgbClr val="7C3AED"/>
+          </a:solidFill>
+          <a:ln xmlns:a="http://schemas.openxmlformats.org/drawingml/2006/main">
+            <a:noFill/>
+          </a:ln>
+        </p:spPr>
+        <p:txBody>
+          <a:bodyPr xmlns:a="http://schemas.openxmlformats.org/drawingml/2006/main" lIns="73152" tIns="73152" rIns="73152" bIns="73152"/>
+          <a:lstStyle xmlns:a="http://schemas.openxmlformats.org/drawingml/2006/main"/>
+          <a:p xmlns:a="http://schemas.openxmlformats.org/drawingml/2006/main">
+            <a:pPr algn="ctr"/>
+            <a:r>
+              <a:rPr lang="en-US" sz="1600" b="1">
+                <a:solidFill>
+                  <a:srgbClr val="FFFFFF"/>
+                </a:solidFill>
+              </a:rPr>
+              <a:t>IMPACT</a:t>
+            </a:r>
+          </a:p>
+        </p:txBody>
+      </p:sp>
+      <p:sp>
+        <p:nvSpPr>
+          <p:cNvPr id="100110" name="TextBox 11"/>
+          <p:cNvSpPr/>
+          <p:nvPr/>
+        </p:nvSpPr>
+        <p:spPr>
+          <a:xfrm xmlns:a="http://schemas.openxmlformats.org/drawingml/2006/main">
+            <a:off x="621792" y="2834640"/>
+            <a:ext cx="1417320" cy="411480"/>
+          </a:xfrm>
+          <a:prstGeom xmlns:a="http://schemas.openxmlformats.org/drawingml/2006/main" prst="rect">
+            <a:avLst/>
+          </a:prstGeom>
+          <a:noFill xmlns:a="http://schemas.openxmlformats.org/drawingml/2006/main"/>
+          <a:ln xmlns:a="http://schemas.openxmlformats.org/drawingml/2006/main">
+            <a:noFill/>
+          </a:ln>
+        </p:spPr>
+        <p:txBody>
+          <a:bodyPr xmlns:a="http://schemas.openxmlformats.org/drawingml/2006/main" lIns="73152" tIns="73152" rIns="73152" bIns="73152"/>
+          <a:lstStyle xmlns:a="http://schemas.openxmlformats.org/drawingml/2006/main"/>
+          <a:p xmlns:a="http://schemas.openxmlformats.org/drawingml/2006/main">
+            <a:pPr algn="ctr"/>
+            <a:r>
+              <a:rPr lang="en-US" sz="1200" b="0">
+                <a:solidFill>
+                  <a:srgbClr val="D7DFEC"/>
+                </a:solidFill>
+              </a:rPr>
+              <a:t>Core vertical slice</a:t>
+            </a:r>
+          </a:p>
+        </p:txBody>
+      </p:sp>
+      <p:sp>
+        <p:nvSpPr>
+          <p:cNvPr id="100111" name="TextBox 12"/>
+          <p:cNvSpPr/>
+          <p:nvPr/>
+        </p:nvSpPr>
+        <p:spPr>
+          <a:xfrm xmlns:a="http://schemas.openxmlformats.org/drawingml/2006/main">
+            <a:off x="2267712" y="2834640"/>
+            <a:ext cx="1600200" cy="411480"/>
+          </a:xfrm>
+          <a:prstGeom xmlns:a="http://schemas.openxmlformats.org/drawingml/2006/main" prst="rect">
+            <a:avLst/>
+          </a:prstGeom>
+          <a:noFill xmlns:a="http://schemas.openxmlformats.org/drawingml/2006/main"/>
+          <a:ln xmlns:a="http://schemas.openxmlformats.org/drawingml/2006/main">
+            <a:noFill/>
+          </a:ln>
+        </p:spPr>
+        <p:txBody>
+          <a:bodyPr xmlns:a="http://schemas.openxmlformats.org/drawingml/2006/main" lIns="73152" tIns="73152" rIns="73152" bIns="73152"/>
+          <a:lstStyle xmlns:a="http://schemas.openxmlformats.org/drawingml/2006/main"/>
+          <a:p xmlns:a="http://schemas.openxmlformats.org/drawingml/2006/main">
+            <a:pPr algn="ctr"/>
+            <a:r>
+              <a:rPr lang="en-US" sz="1200" b="0">
+                <a:solidFill>
+                  <a:srgbClr val="D7DFEC"/>
+                </a:solidFill>
+              </a:rPr>
+              <a:t>Offline + documents</a:t>
+            </a:r>
+          </a:p>
+        </p:txBody>
+      </p:sp>
+      <p:sp>
+        <p:nvSpPr>
+          <p:cNvPr id="100112" name="TextBox 13"/>
+          <p:cNvSpPr/>
+          <p:nvPr/>
+        </p:nvSpPr>
+        <p:spPr>
+          <a:xfrm xmlns:a="http://schemas.openxmlformats.org/drawingml/2006/main">
+            <a:off x="3968496" y="2834640"/>
+            <a:ext cx="1691640" cy="411480"/>
+          </a:xfrm>
+          <a:prstGeom xmlns:a="http://schemas.openxmlformats.org/drawingml/2006/main" prst="rect">
+            <a:avLst/>
+          </a:prstGeom>
+          <a:noFill xmlns:a="http://schemas.openxmlformats.org/drawingml/2006/main"/>
+          <a:ln xmlns:a="http://schemas.openxmlformats.org/drawingml/2006/main">
+            <a:noFill/>
+          </a:ln>
+        </p:spPr>
+        <p:txBody>
+          <a:bodyPr xmlns:a="http://schemas.openxmlformats.org/drawingml/2006/main" lIns="73152" tIns="73152" rIns="73152" bIns="73152"/>
+          <a:lstStyle xmlns:a="http://schemas.openxmlformats.org/drawingml/2006/main"/>
+          <a:p xmlns:a="http://schemas.openxmlformats.org/drawingml/2006/main">
+            <a:pPr algn="ctr"/>
+            <a:r>
+              <a:rPr lang="en-US" sz="1200" b="0">
+                <a:solidFill>
+                  <a:srgbClr val="D7DFEC"/>
+                </a:solidFill>
+              </a:rPr>
+              <a:t>More schemes + dialects</a:t>
+            </a:r>
+          </a:p>
+        </p:txBody>
+      </p:sp>
+      <p:sp>
+        <p:nvSpPr>
+          <p:cNvPr id="100113" name="TextBox 14"/>
+          <p:cNvSpPr/>
+          <p:nvPr/>
+        </p:nvSpPr>
+        <p:spPr>
+          <a:xfrm xmlns:a="http://schemas.openxmlformats.org/drawingml/2006/main">
+            <a:off x="5806440" y="2834640"/>
+            <a:ext cx="1600200" cy="411480"/>
+          </a:xfrm>
+          <a:prstGeom xmlns:a="http://schemas.openxmlformats.org/drawingml/2006/main" prst="rect">
+            <a:avLst/>
+          </a:prstGeom>
+          <a:noFill xmlns:a="http://schemas.openxmlformats.org/drawingml/2006/main"/>
+          <a:ln xmlns:a="http://schemas.openxmlformats.org/drawingml/2006/main">
+            <a:noFill/>
+          </a:ln>
+        </p:spPr>
+        <p:txBody>
+          <a:bodyPr xmlns:a="http://schemas.openxmlformats.org/drawingml/2006/main" lIns="73152" tIns="73152" rIns="73152" bIns="73152"/>
+          <a:lstStyle xmlns:a="http://schemas.openxmlformats.org/drawingml/2006/main"/>
+          <a:p xmlns:a="http://schemas.openxmlformats.org/drawingml/2006/main">
+            <a:pPr algn="ctr"/>
+            <a:r>
+              <a:rPr lang="en-US" sz="1200" b="0">
+                <a:solidFill>
+                  <a:srgbClr val="D7DFEC"/>
+                </a:solidFill>
+              </a:rPr>
+              <a:t>Outcomes + partnerships</a:t>
+            </a:r>
+          </a:p>
+        </p:txBody>
+      </p:sp>
+    </p:spTree>
+  </p:cSld>
+  <p:transition>
+    <p:fade/>
+  </p:transition>
+</p:sld>
+</file>
+
+<file path=ppt/slides/slide9.xml><?xml version="1.0" encoding="utf-8"?>
+<p:sld xmlns:p="http://schemas.openxmlformats.org/presentationml/2006/main">
+  <p:cSld>
+    <p:bg>
+      <p:bgPr>
+        <a:solidFill xmlns:a="http://schemas.openxmlformats.org/drawingml/2006/main">
+          <a:srgbClr val="0B1220"/>
+        </a:solidFill>
+      </p:bgPr>
+    </p:bg>
+    <p:spTree>
+      <p:nvGrpSpPr>
+        <p:cNvPr id="1" name=""/>
+        <p:cNvGrpSpPr/>
+        <p:nvPr/>
+      </p:nvGrpSpPr>
+      <p:grpSpPr/>
+      <p:sp>
+        <p:nvSpPr>
+          <p:cNvPr id="100114" name="TextBox 1"/>
+          <p:cNvSpPr/>
+          <p:nvPr/>
+        </p:nvSpPr>
+        <p:spPr>
+          <a:xfrm xmlns:a="http://schemas.openxmlformats.org/drawingml/2006/main">
+            <a:off x="594360" y="411480"/>
+            <a:ext cx="7406640" cy="502920"/>
+          </a:xfrm>
+          <a:prstGeom xmlns:a="http://schemas.openxmlformats.org/drawingml/2006/main" prst="rect">
+            <a:avLst/>
+          </a:prstGeom>
+          <a:noFill xmlns:a="http://schemas.openxmlformats.org/drawingml/2006/main"/>
+          <a:ln xmlns:a="http://schemas.openxmlformats.org/drawingml/2006/main">
+            <a:noFill/>
+          </a:ln>
+        </p:spPr>
+        <p:txBody>
+          <a:bodyPr xmlns:a="http://schemas.openxmlformats.org/drawingml/2006/main" lIns="73152" tIns="73152" rIns="73152" bIns="73152"/>
+          <a:lstStyle xmlns:a="http://schemas.openxmlformats.org/drawingml/2006/main"/>
+          <a:p xmlns:a="http://schemas.openxmlformats.org/drawingml/2006/main">
+            <a:pPr algn="l"/>
+            <a:r>
+              <a:rPr lang="en-US" sz="2700" b="1">
+                <a:solidFill>
+                  <a:srgbClr val="FFFFFF"/>
+                </a:solidFill>
+              </a:rPr>
+              <a:t>Team &amp; contributions</a:t>
+            </a:r>
+          </a:p>
+        </p:txBody>
+      </p:sp>
+      <p:sp>
+        <p:nvSpPr>
+          <p:cNvPr id="100115" name="TextBox 2"/>
+          <p:cNvSpPr/>
+          <p:nvPr/>
+        </p:nvSpPr>
+        <p:spPr>
+          <a:xfrm xmlns:a="http://schemas.openxmlformats.org/drawingml/2006/main">
+            <a:off x="594360" y="987552"/>
+            <a:ext cx="914400" cy="73152"/>
+          </a:xfrm>
+          <a:prstGeom xmlns:a="http://schemas.openxmlformats.org/drawingml/2006/main" prst="rect">
+            <a:avLst/>
+          </a:prstGeom>
+          <a:solidFill xmlns:a="http://schemas.openxmlformats.org/drawingml/2006/main">
+            <a:srgbClr val="F97316"/>
+          </a:solidFill>
+          <a:ln xmlns:a="http://schemas.openxmlformats.org/drawingml/2006/main">
+            <a:noFill/>
+          </a:ln>
+        </p:spPr>
+        <p:txBody>
+          <a:bodyPr xmlns:a="http://schemas.openxmlformats.org/drawingml/2006/main" lIns="73152" tIns="73152" rIns="73152" bIns="73152"/>
+          <a:lstStyle xmlns:a="http://schemas.openxmlformats.org/drawingml/2006/main"/>
+          <a:p xmlns:a="http://schemas.openxmlformats.org/drawingml/2006/main">
+            <a:pPr algn="l"/>
+            <a:endParaRPr lang="en-US" sz="800" b="0">
+              <a:solidFill>
+                <a:srgbClr val="F97316"/>
+              </a:solidFill>
+            </a:endParaRPr>
+          </a:p>
+        </p:txBody>
+      </p:sp>
+      <p:sp>
+        <p:nvSpPr>
+          <p:cNvPr id="100116" name="TextBox 3"/>
+          <p:cNvSpPr/>
+          <p:nvPr/>
+        </p:nvSpPr>
+        <p:spPr>
+          <a:xfrm xmlns:a="http://schemas.openxmlformats.org/drawingml/2006/main">
+            <a:off x="594360" y="1115568"/>
+            <a:ext cx="7315200" cy="347472"/>
+          </a:xfrm>
+          <a:prstGeom xmlns:a="http://schemas.openxmlformats.org/drawingml/2006/main" prst="rect">
+            <a:avLst/>
+          </a:prstGeom>
+          <a:noFill xmlns:a="http://schemas.openxmlformats.org/drawingml/2006/main"/>
+          <a:ln xmlns:a="http://schemas.openxmlformats.org/drawingml/2006/main">
+            <a:noFill/>
+          </a:ln>
+        </p:spPr>
+        <p:txBody>
+          <a:bodyPr xmlns:a="http://schemas.openxmlformats.org/drawingml/2006/main" lIns="73152" tIns="73152" rIns="73152" bIns="73152"/>
+          <a:lstStyle xmlns:a="http://schemas.openxmlformats.org/drawingml/2006/main"/>
+          <a:p xmlns:a="http://schemas.openxmlformats.org/drawingml/2006/main">
+            <a:pPr algn="l"/>
+            <a:r>
+              <a:rPr lang="en-US" sz="1300" b="0">
+                <a:solidFill>
+                  <a:srgbClr val="A8B3C7"/>
+                </a:solidFill>
+              </a:rPr>
+              <a:t>Replace the placeholders with each teammate's name, role and screenshot.</a:t>
+            </a:r>
+          </a:p>
+        </p:txBody>
+      </p:sp>
+      <p:pic>
+        <p:nvPicPr>
+          <p:cNvPr id="100117" name="Picture 1" descr="VyaparMarg app icon"/>
+          <p:cNvPicPr>
+            <a:picLocks xmlns:a="http://schemas.openxmlformats.org/drawingml/2006/main" noChangeAspect="1"/>
+          </p:cNvPicPr>
+          <p:nvPr/>
+        </p:nvPicPr>
+        <p:blipFill>
+          <a:blip xmlns:r="http://schemas.openxmlformats.org/officeDocument/2006/relationships" xmlns:a="http://schemas.openxmlformats.org/drawingml/2006/main" r:embed="R879712e8a5a64b47"/>
+          <a:stretch xmlns:a="http://schemas.openxmlformats.org/drawingml/2006/main">
+            <a:fillRect/>
+          </a:stretch>
+        </p:blipFill>
+        <p:spPr>
+          <a:xfrm xmlns:a="http://schemas.openxmlformats.org/drawingml/2006/main">
+            <a:off x="685800" y="1508760"/>
+            <a:ext cx="685800" cy="685800"/>
+          </a:xfrm>
+          <a:prstGeom xmlns:a="http://schemas.openxmlformats.org/drawingml/2006/main" prst="rect">
+            <a:avLst/>
+          </a:prstGeom>
+        </p:spPr>
+      </p:pic>
+      <p:sp>
+        <p:nvSpPr>
+          <p:cNvPr id="100118" name="TextBox 4"/>
+          <p:cNvSpPr/>
+          <p:nvPr/>
+        </p:nvSpPr>
+        <p:spPr>
+          <a:xfrm xmlns:a="http://schemas.openxmlformats.org/drawingml/2006/main">
+            <a:off x="1554480" y="1417320"/>
+            <a:ext cx="2743200" cy="365760"/>
+          </a:xfrm>
+          <a:prstGeom xmlns:a="http://schemas.openxmlformats.org/drawingml/2006/main" prst="rect">
+            <a:avLst/>
+          </a:prstGeom>
+          <a:noFill xmlns:a="http://schemas.openxmlformats.org/drawingml/2006/main"/>
+          <a:ln xmlns:a="http://schemas.openxmlformats.org/drawingml/2006/main">
+            <a:noFill/>
+          </a:ln>
+        </p:spPr>
+        <p:txBody>
+          <a:bodyPr xmlns:a="http://schemas.openxmlformats.org/drawingml/2006/main" lIns="73152" tIns="73152" rIns="73152" bIns="73152"/>
+          <a:lstStyle xmlns:a="http://schemas.openxmlformats.org/drawingml/2006/main"/>
+          <a:p xmlns:a="http://schemas.openxmlformats.org/drawingml/2006/main">
+            <a:pPr algn="l"/>
+            <a:r>
+              <a:rPr lang="en-US" sz="2100" b="1">
+                <a:solidFill>
+                  <a:srgbClr val="FFFFFF"/>
+                </a:solidFill>
+              </a:rPr>
+              <a:t>Rangesh Gupta</a:t>
+            </a:r>
+          </a:p>
+        </p:txBody>
+      </p:sp>
+      <p:sp>
+        <p:nvSpPr>
+          <p:cNvPr id="100119" name="TextBox 5"/>
+          <p:cNvSpPr/>
+          <p:nvPr/>
+        </p:nvSpPr>
+        <p:spPr>
+          <a:xfrm xmlns:a="http://schemas.openxmlformats.org/drawingml/2006/main">
+            <a:off x="1554480" y="1874520"/>
+            <a:ext cx="3017520" cy="731520"/>
+          </a:xfrm>
+          <a:prstGeom xmlns:a="http://schemas.openxmlformats.org/drawingml/2006/main" prst="rect">
+            <a:avLst/>
+          </a:prstGeom>
+          <a:noFill xmlns:a="http://schemas.openxmlformats.org/drawingml/2006/main"/>
+          <a:ln xmlns:a="http://schemas.openxmlformats.org/drawingml/2006/main">
+            <a:noFill/>
+          </a:ln>
+        </p:spPr>
+        <p:txBody>
+          <a:bodyPr xmlns:a="http://schemas.openxmlformats.org/drawingml/2006/main" lIns="73152" tIns="73152" rIns="73152" bIns="73152"/>
+          <a:lstStyle xmlns:a="http://schemas.openxmlformats.org/drawingml/2006/main"/>
+          <a:p xmlns:a="http://schemas.openxmlformats.org/drawingml/2006/main">
+            <a:pPr algn="l"/>
+            <a:r>
+              <a:rPr lang="en-US" sz="1400" b="0">
+                <a:solidFill>
+                  <a:srgbClr val="D7DFEC"/>
+                </a:solidFill>
+              </a:rPr>
+              <a:t>Roll No. 53  |  SE CPMN A</a:t>
+            </a:r>
+          </a:p>
+          <a:p xmlns:a="http://schemas.openxmlformats.org/drawingml/2006/main">
+            <a:pPr algn="l"/>
+            <a:r>
+              <a:rPr lang="en-US" sz="1400" b="0">
+                <a:solidFill>
+                  <a:srgbClr val="D7DFEC"/>
+                </a:solidFill>
+              </a:rPr>
+              <a:t>Product concept, mobile UX and project integration</a:t>
+            </a:r>
+          </a:p>
+        </p:txBody>
+      </p:sp>
+      <p:sp>
+        <p:nvSpPr>
+          <p:cNvPr id="100120" name="TextBox 6"/>
+          <p:cNvSpPr/>
+          <p:nvPr/>
+        </p:nvSpPr>
+        <p:spPr>
+          <a:xfrm xmlns:a="http://schemas.openxmlformats.org/drawingml/2006/main">
+            <a:off x="685800" y="3154680"/>
+            <a:ext cx="2240280" cy="1554480"/>
+          </a:xfrm>
+          <a:prstGeom xmlns:a="http://schemas.openxmlformats.org/drawingml/2006/main" prst="roundRect">
+            <a:avLst/>
+          </a:prstGeom>
+          <a:solidFill xmlns:a="http://schemas.openxmlformats.org/drawingml/2006/main">
+            <a:srgbClr val="162238"/>
+          </a:solidFill>
+          <a:ln xmlns:a="http://schemas.openxmlformats.org/drawingml/2006/main">
+            <a:noFill/>
+          </a:ln>
+        </p:spPr>
+        <p:txBody>
+          <a:bodyPr xmlns:a="http://schemas.openxmlformats.org/drawingml/2006/main" lIns="73152" tIns="73152" rIns="73152" bIns="73152"/>
+          <a:lstStyle xmlns:a="http://schemas.openxmlformats.org/drawingml/2006/main"/>
+          <a:p xmlns:a="http://schemas.openxmlformats.org/drawingml/2006/main">
+            <a:pPr algn="l"/>
+            <a:endParaRPr lang="en-US" sz="1000" b="0">
+              <a:solidFill>
+                <a:srgbClr val="FFFFFF"/>
+              </a:solidFill>
+            </a:endParaRPr>
+          </a:p>
+        </p:txBody>
+      </p:sp>
+      <p:sp>
+        <p:nvSpPr>
+          <p:cNvPr id="100121" name="TextBox 7"/>
+          <p:cNvSpPr/>
+          <p:nvPr/>
+        </p:nvSpPr>
+        <p:spPr>
+          <a:xfrm xmlns:a="http://schemas.openxmlformats.org/drawingml/2006/main">
+            <a:off x="685800" y="3300984"/>
+            <a:ext cx="2240280" cy="292608"/>
+          </a:xfrm>
+          <a:prstGeom xmlns:a="http://schemas.openxmlformats.org/drawingml/2006/main" prst="rect">
+            <a:avLst/>
+          </a:prstGeom>
+          <a:noFill xmlns:a="http://schemas.openxmlformats.org/drawingml/2006/main"/>
+          <a:ln xmlns:a="http://schemas.openxmlformats.org/drawingml/2006/main">
+            <a:noFill/>
+          </a:ln>
+        </p:spPr>
+        <p:txBody>
+          <a:bodyPr xmlns:a="http://schemas.openxmlformats.org/drawingml/2006/main" lIns="73152" tIns="73152" rIns="73152" bIns="73152"/>
+          <a:lstStyle xmlns:a="http://schemas.openxmlformats.org/drawingml/2006/main"/>
+          <a:p xmlns:a="http://schemas.openxmlformats.org/drawingml/2006/main">
+            <a:pPr algn="l"/>
+            <a:r>
+              <a:rPr lang="en-US" sz="1600" b="1">
+                <a:solidFill>
+                  <a:srgbClr val="F97316"/>
+                </a:solidFill>
+              </a:rPr>
+              <a:t>Team member 2</a:t>
+            </a:r>
+          </a:p>
+        </p:txBody>
+      </p:sp>
+      <p:sp>
+        <p:nvSpPr>
+          <p:cNvPr id="100122" name="TextBox 8"/>
+          <p:cNvSpPr/>
+          <p:nvPr/>
+        </p:nvSpPr>
+        <p:spPr>
+          <a:xfrm xmlns:a="http://schemas.openxmlformats.org/drawingml/2006/main">
+            <a:off x="685800" y="3639312"/>
+            <a:ext cx="2240280" cy="987552"/>
+          </a:xfrm>
+          <a:prstGeom xmlns:a="http://schemas.openxmlformats.org/drawingml/2006/main" prst="rect">
+            <a:avLst/>
+          </a:prstGeom>
+          <a:noFill xmlns:a="http://schemas.openxmlformats.org/drawingml/2006/main"/>
+          <a:ln xmlns:a="http://schemas.openxmlformats.org/drawingml/2006/main">
+            <a:noFill/>
+          </a:ln>
+        </p:spPr>
+        <p:txBody>
+          <a:bodyPr xmlns:a="http://schemas.openxmlformats.org/drawingml/2006/main" lIns="73152" tIns="73152" rIns="73152" bIns="73152"/>
+          <a:lstStyle xmlns:a="http://schemas.openxmlformats.org/drawingml/2006/main"/>
+          <a:p xmlns:a="http://schemas.openxmlformats.org/drawingml/2006/main">
+            <a:pPr algn="l"/>
+            <a:r>
+              <a:rPr lang="en-US" sz="1200" b="0">
+                <a:solidFill>
+                  <a:srgbClr val="D7DFEC"/>
+                </a:solidFill>
+              </a:rPr>
+              <a:t>Name / roll no.</a:t>
+            </a:r>
+          </a:p>
+          <a:p xmlns:a="http://schemas.openxmlformats.org/drawingml/2006/main">
+            <a:pPr algn="l"/>
+            <a:r>
+              <a:rPr lang="en-US" sz="1200" b="0">
+                <a:solidFill>
+                  <a:srgbClr val="D7DFEC"/>
+                </a:solidFill>
+              </a:rPr>
+              <a:t>Role / contribution</a:t>
+            </a:r>
+          </a:p>
+          <a:p xmlns:a="http://schemas.openxmlformats.org/drawingml/2006/main">
+            <a:pPr algn="l"/>
+            <a:r>
+              <a:rPr lang="en-US" sz="1200" b="0">
+                <a:solidFill>
+                  <a:srgbClr val="D7DFEC"/>
+                </a:solidFill>
+              </a:rPr>
+              <a:t>Add project screenshot</a:t>
+            </a:r>
+          </a:p>
+        </p:txBody>
+      </p:sp>
+      <p:sp>
+        <p:nvSpPr>
+          <p:cNvPr id="100123" name="TextBox 9"/>
+          <p:cNvSpPr/>
+          <p:nvPr/>
+        </p:nvSpPr>
+        <p:spPr>
+          <a:xfrm xmlns:a="http://schemas.openxmlformats.org/drawingml/2006/main">
+            <a:off x="3246120" y="3154680"/>
+            <a:ext cx="2240280" cy="1554480"/>
+          </a:xfrm>
+          <a:prstGeom xmlns:a="http://schemas.openxmlformats.org/drawingml/2006/main" prst="roundRect">
+            <a:avLst/>
+          </a:prstGeom>
+          <a:solidFill xmlns:a="http://schemas.openxmlformats.org/drawingml/2006/main">
+            <a:srgbClr val="162238"/>
+          </a:solidFill>
+          <a:ln xmlns:a="http://schemas.openxmlformats.org/drawingml/2006/main">
+            <a:noFill/>
+          </a:ln>
+        </p:spPr>
+        <p:txBody>
+          <a:bodyPr xmlns:a="http://schemas.openxmlformats.org/drawingml/2006/main" lIns="73152" tIns="73152" rIns="73152" bIns="73152"/>
+          <a:lstStyle xmlns:a="http://schemas.openxmlformats.org/drawingml/2006/main"/>
+          <a:p xmlns:a="http://schemas.openxmlformats.org/drawingml/2006/main">
+            <a:pPr algn="l"/>
+            <a:endParaRPr lang="en-US" sz="1000" b="0">
+              <a:solidFill>
+                <a:srgbClr val="FFFFFF"/>
+              </a:solidFill>
+            </a:endParaRPr>
+          </a:p>
+        </p:txBody>
+      </p:sp>
+      <p:sp>
+        <p:nvSpPr>
+          <p:cNvPr id="100124" name="TextBox 10"/>
+          <p:cNvSpPr/>
+          <p:nvPr/>
+        </p:nvSpPr>
+        <p:spPr>
+          <a:xfrm xmlns:a="http://schemas.openxmlformats.org/drawingml/2006/main">
+            <a:off x="3246120" y="3300984"/>
+            <a:ext cx="2240280" cy="292608"/>
+          </a:xfrm>
+          <a:prstGeom xmlns:a="http://schemas.openxmlformats.org/drawingml/2006/main" prst="rect">
+            <a:avLst/>
+          </a:prstGeom>
+          <a:noFill xmlns:a="http://schemas.openxmlformats.org/drawingml/2006/main"/>
+          <a:ln xmlns:a="http://schemas.openxmlformats.org/drawingml/2006/main">
+            <a:noFill/>
+          </a:ln>
+        </p:spPr>
+        <p:txBody>
+          <a:bodyPr xmlns:a="http://schemas.openxmlformats.org/drawingml/2006/main" lIns="73152" tIns="73152" rIns="73152" bIns="73152"/>
+          <a:lstStyle xmlns:a="http://schemas.openxmlformats.org/drawingml/2006/main"/>
+          <a:p xmlns:a="http://schemas.openxmlformats.org/drawingml/2006/main">
+            <a:pPr algn="l"/>
+            <a:r>
+              <a:rPr lang="en-US" sz="1600" b="1">
+                <a:solidFill>
+                  <a:srgbClr val="145DA0"/>
+                </a:solidFill>
+              </a:rPr>
+              <a:t>Team member 3</a:t>
+            </a:r>
+          </a:p>
+        </p:txBody>
+      </p:sp>
+      <p:sp>
+        <p:nvSpPr>
+          <p:cNvPr id="100125" name="TextBox 11"/>
+          <p:cNvSpPr/>
+          <p:nvPr/>
+        </p:nvSpPr>
+        <p:spPr>
+          <a:xfrm xmlns:a="http://schemas.openxmlformats.org/drawingml/2006/main">
+            <a:off x="3246120" y="3639312"/>
+            <a:ext cx="2240280" cy="987552"/>
+          </a:xfrm>
+          <a:prstGeom xmlns:a="http://schemas.openxmlformats.org/drawingml/2006/main" prst="rect">
+            <a:avLst/>
+          </a:prstGeom>
+          <a:noFill xmlns:a="http://schemas.openxmlformats.org/drawingml/2006/main"/>
+          <a:ln xmlns:a="http://schemas.openxmlformats.org/drawingml/2006/main">
+            <a:noFill/>
+          </a:ln>
+        </p:spPr>
+        <p:txBody>
+          <a:bodyPr xmlns:a="http://schemas.openxmlformats.org/drawingml/2006/main" lIns="73152" tIns="73152" rIns="73152" bIns="73152"/>
+          <a:lstStyle xmlns:a="http://schemas.openxmlformats.org/drawingml/2006/main"/>
+          <a:p xmlns:a="http://schemas.openxmlformats.org/drawingml/2006/main">
+            <a:pPr algn="l"/>
+            <a:r>
+              <a:rPr lang="en-US" sz="1200" b="0">
+                <a:solidFill>
+                  <a:srgbClr val="D7DFEC"/>
+                </a:solidFill>
+              </a:rPr>
+              <a:t>Name / roll no.</a:t>
+            </a:r>
+          </a:p>
+          <a:p xmlns:a="http://schemas.openxmlformats.org/drawingml/2006/main">
+            <a:pPr algn="l"/>
+            <a:r>
+              <a:rPr lang="en-US" sz="1200" b="0">
+                <a:solidFill>
+                  <a:srgbClr val="D7DFEC"/>
+                </a:solidFill>
+              </a:rPr>
+              <a:t>Role / contribution</a:t>
+            </a:r>
+          </a:p>
+          <a:p xmlns:a="http://schemas.openxmlformats.org/drawingml/2006/main">
+            <a:pPr algn="l"/>
+            <a:r>
+              <a:rPr lang="en-US" sz="1200" b="0">
+                <a:solidFill>
+                  <a:srgbClr val="D7DFEC"/>
+                </a:solidFill>
+              </a:rPr>
+              <a:t>Add project screenshot</a:t>
+            </a:r>
+          </a:p>
+        </p:txBody>
+      </p:sp>
+      <p:sp>
+        <p:nvSpPr>
+          <p:cNvPr id="100126" name="TextBox 12"/>
+          <p:cNvSpPr/>
+          <p:nvPr/>
+        </p:nvSpPr>
+        <p:spPr>
+          <a:xfrm xmlns:a="http://schemas.openxmlformats.org/drawingml/2006/main">
+            <a:off x="5806440" y="3154680"/>
+            <a:ext cx="2240280" cy="1554480"/>
+          </a:xfrm>
+          <a:prstGeom xmlns:a="http://schemas.openxmlformats.org/drawingml/2006/main" prst="roundRect">
+            <a:avLst/>
+          </a:prstGeom>
+          <a:solidFill xmlns:a="http://schemas.openxmlformats.org/drawingml/2006/main">
+            <a:srgbClr val="162238"/>
+          </a:solidFill>
+          <a:ln xmlns:a="http://schemas.openxmlformats.org/drawingml/2006/main">
+            <a:noFill/>
+          </a:ln>
+        </p:spPr>
+        <p:txBody>
+          <a:bodyPr xmlns:a="http://schemas.openxmlformats.org/drawingml/2006/main" lIns="73152" tIns="73152" rIns="73152" bIns="73152"/>
+          <a:lstStyle xmlns:a="http://schemas.openxmlformats.org/drawingml/2006/main"/>
+          <a:p xmlns:a="http://schemas.openxmlformats.org/drawingml/2006/main">
+            <a:pPr algn="l"/>
+            <a:endParaRPr lang="en-US" sz="1000" b="0">
+              <a:solidFill>
+                <a:srgbClr val="FFFFFF"/>
+              </a:solidFill>
+            </a:endParaRPr>
+          </a:p>
+        </p:txBody>
+      </p:sp>
+      <p:sp>
+        <p:nvSpPr>
+          <p:cNvPr id="100127" name="TextBox 13"/>
+          <p:cNvSpPr/>
+          <p:nvPr/>
+        </p:nvSpPr>
+        <p:spPr>
+          <a:xfrm xmlns:a="http://schemas.openxmlformats.org/drawingml/2006/main">
+            <a:off x="5806440" y="3300984"/>
+            <a:ext cx="2240280" cy="292608"/>
+          </a:xfrm>
+          <a:prstGeom xmlns:a="http://schemas.openxmlformats.org/drawingml/2006/main" prst="rect">
+            <a:avLst/>
+          </a:prstGeom>
+          <a:noFill xmlns:a="http://schemas.openxmlformats.org/drawingml/2006/main"/>
+          <a:ln xmlns:a="http://schemas.openxmlformats.org/drawingml/2006/main">
+            <a:noFill/>
+          </a:ln>
+        </p:spPr>
+        <p:txBody>
+          <a:bodyPr xmlns:a="http://schemas.openxmlformats.org/drawingml/2006/main" lIns="73152" tIns="73152" rIns="73152" bIns="73152"/>
+          <a:lstStyle xmlns:a="http://schemas.openxmlformats.org/drawingml/2006/main"/>
+          <a:p xmlns:a="http://schemas.openxmlformats.org/drawingml/2006/main">
+            <a:pPr algn="l"/>
+            <a:r>
+              <a:rPr lang="en-US" sz="1600" b="1">
+                <a:solidFill>
+                  <a:srgbClr val="138A5E"/>
+                </a:solidFill>
+              </a:rPr>
+              <a:t>Team member 4</a:t>
+            </a:r>
+          </a:p>
+        </p:txBody>
+      </p:sp>
+      <p:sp>
+        <p:nvSpPr>
+          <p:cNvPr id="100128" name="TextBox 14"/>
+          <p:cNvSpPr/>
+          <p:nvPr/>
+        </p:nvSpPr>
+        <p:spPr>
+          <a:xfrm xmlns:a="http://schemas.openxmlformats.org/drawingml/2006/main">
+            <a:off x="5806440" y="3639312"/>
+            <a:ext cx="2240280" cy="987552"/>
+          </a:xfrm>
+          <a:prstGeom xmlns:a="http://schemas.openxmlformats.org/drawingml/2006/main" prst="rect">
+            <a:avLst/>
+          </a:prstGeom>
+          <a:noFill xmlns:a="http://schemas.openxmlformats.org/drawingml/2006/main"/>
+          <a:ln xmlns:a="http://schemas.openxmlformats.org/drawingml/2006/main">
+            <a:noFill/>
+          </a:ln>
+        </p:spPr>
+        <p:txBody>
+          <a:bodyPr xmlns:a="http://schemas.openxmlformats.org/drawingml/2006/main" lIns="73152" tIns="73152" rIns="73152" bIns="73152"/>
+          <a:lstStyle xmlns:a="http://schemas.openxmlformats.org/drawingml/2006/main"/>
+          <a:p xmlns:a="http://schemas.openxmlformats.org/drawingml/2006/main">
+            <a:pPr algn="l"/>
+            <a:r>
+              <a:rPr lang="en-US" sz="1200" b="0">
+                <a:solidFill>
+                  <a:srgbClr val="D7DFEC"/>
+                </a:solidFill>
+              </a:rPr>
+              <a:t>Name / roll no.</a:t>
+            </a:r>
+          </a:p>
+          <a:p xmlns:a="http://schemas.openxmlformats.org/drawingml/2006/main">
+            <a:pPr algn="l"/>
+            <a:r>
+              <a:rPr lang="en-US" sz="1200" b="0">
+                <a:solidFill>
+                  <a:srgbClr val="D7DFEC"/>
+                </a:solidFill>
+              </a:rPr>
+              <a:t>Role / contribution</a:t>
+            </a:r>
+          </a:p>
+          <a:p xmlns:a="http://schemas.openxmlformats.org/drawingml/2006/main">
+            <a:pPr algn="l"/>
+            <a:r>
+              <a:rPr lang="en-US" sz="1200" b="0">
+                <a:solidFill>
+                  <a:srgbClr val="D7DFEC"/>
+                </a:solidFill>
+              </a:rPr>
+              <a:t>Add project screenshot</a:t>
             </a:r>
           </a:p>
         </p:txBody>
